--- a/content/05-teaching-resources/slides/core/05-functions-procedures-and-validation.pptx
+++ b/content/05-teaching-resources/slides/core/05-functions-procedures-and-validation.pptx
@@ -10,10 +10,16 @@
     <p:sldId id="258" r:id="rId9"/>
     <p:sldId id="259" r:id="rId10"/>
     <p:sldId id="260" r:id="rId11"/>
-    <p:sldId id="261" r:id="rId12"/>
+    <p:sldId id="261" r:id="rId13"/>
     <p:sldId id="262" r:id="rId14"/>
     <p:sldId id="263" r:id="rId15"/>
     <p:sldId id="264" r:id="rId16"/>
+    <p:sldId id="265" r:id="rId17"/>
+    <p:sldId id="266" r:id="rId18"/>
+    <p:sldId id="267" r:id="rId19"/>
+    <p:sldId id="268" r:id="rId20"/>
+    <p:sldId id="269" r:id="rId21"/>
+    <p:sldId id="270" r:id="rId22"/>
   </p:sldIdLst>
   <p:sldSz cx="12191695" cy="6858000" type="screen4x3"/>
   <p:notesSz cx="6858000" cy="9144000"/>
@@ -510,7 +516,22 @@
           <a:lstStyle/>
           <a:p>
             <a:r>
-              <a:t>Give students a few minutes to answer on mini whiteboards or paper, then reveal the answers on the next slide.</a:t>
+              <a:t>Answers:</a:t>
+            </a:r>
+          </a:p>
+          <a:p>
+            <a:r>
+              <a:t>1. Return a result.</a:t>
+            </a:r>
+          </a:p>
+          <a:p>
+            <a:r>
+              <a:t>2. A value passed into a subroutine.</a:t>
+            </a:r>
+          </a:p>
+          <a:p>
+            <a:r>
+              <a:t>3. Avoid repeated code; easier to test and change.</a:t>
             </a:r>
           </a:p>
         </p:txBody>
@@ -580,7 +601,22 @@
           <a:lstStyle/>
           <a:p>
             <a:r>
-              <a:t>Talk through any answers the class found difficult.</a:t>
+              <a:t>Answers:</a:t>
+            </a:r>
+          </a:p>
+          <a:p>
+            <a:r>
+              <a:t>1. Import the library, then call it.</a:t>
+            </a:r>
+          </a:p>
+          <a:p>
+            <a:r>
+              <a:t>2. Dependencies to maintain, or security vulnerabilities.</a:t>
+            </a:r>
+          </a:p>
+          <a:p>
+            <a:r>
+              <a:t>3. E.g. len(), round(), max(), min().</a:t>
             </a:r>
           </a:p>
         </p:txBody>
@@ -606,6 +642,231 @@
 </file>
 
 <file path=ppt/notesSlides/notesSlide3.xml><?xml version="1.0" encoding="utf-8"?>
+<p:notes xmlns:a="http://schemas.openxmlformats.org/drawingml/2006/main" xmlns:p="http://schemas.openxmlformats.org/presentationml/2006/main" xmlns:r="http://schemas.openxmlformats.org/officeDocument/2006/relationships">
+  <p:cSld>
+    <p:spTree>
+      <p:nvGrpSpPr>
+        <p:cNvPr id="1" name=""/>
+        <p:cNvGrpSpPr/>
+        <p:nvPr/>
+      </p:nvGrpSpPr>
+      <p:grpSpPr>
+        <a:xfrm>
+          <a:off x="0" y="0"/>
+          <a:ext cx="0" cy="0"/>
+          <a:chOff x="0" y="0"/>
+          <a:chExt cx="0" cy="0"/>
+        </a:xfrm>
+      </p:grpSpPr>
+      <p:sp>
+        <p:nvSpPr>
+          <p:cNvPr id="2" name="Slide Image Placeholder 1"/>
+          <p:cNvSpPr>
+            <a:spLocks noGrp="1"/>
+          </p:cNvSpPr>
+          <p:nvPr>
+            <p:ph type="sldImg" idx="2"/>
+          </p:nvPr>
+        </p:nvSpPr>
+        <p:spPr/>
+      </p:sp>
+      <p:sp>
+        <p:nvSpPr>
+          <p:cNvPr id="3" name="Notes Placeholder 2"/>
+          <p:cNvSpPr>
+            <a:spLocks noGrp="1"/>
+          </p:cNvSpPr>
+          <p:nvPr>
+            <p:ph type="body" idx="3" sz="quarter"/>
+          </p:nvPr>
+        </p:nvSpPr>
+        <p:spPr/>
+        <p:txBody>
+          <a:bodyPr/>
+          <a:lstStyle/>
+          <a:p>
+            <a:r>
+              <a:t>Answers:</a:t>
+            </a:r>
+          </a:p>
+          <a:p>
+            <a:r>
+              <a:t>1. if 0 &lt;= mark &lt;= 100:</a:t>
+            </a:r>
+          </a:p>
+          <a:p>
+            <a:r>
+              <a:t>2. Mistyped digits in codes such as barcodes.</a:t>
+            </a:r>
+          </a:p>
+          <a:p>
+            <a:r>
+              <a:t>3. No, only that it's reasonable.</a:t>
+            </a:r>
+          </a:p>
+        </p:txBody>
+      </p:sp>
+      <p:sp>
+        <p:nvSpPr>
+          <p:cNvPr id="4" name="Slide Number Placeholder 3"/>
+          <p:cNvSpPr>
+            <a:spLocks noGrp="1"/>
+          </p:cNvSpPr>
+          <p:nvPr>
+            <p:ph type="sldNum" idx="5" sz="quarter"/>
+          </p:nvPr>
+        </p:nvSpPr>
+        <p:spPr/>
+      </p:sp>
+    </p:spTree>
+  </p:cSld>
+  <p:clrMapOvr>
+    <a:masterClrMapping/>
+  </p:clrMapOvr>
+</p:notes>
+</file>
+
+<file path=ppt/notesSlides/notesSlide4.xml><?xml version="1.0" encoding="utf-8"?>
+<p:notes xmlns:a="http://schemas.openxmlformats.org/drawingml/2006/main" xmlns:p="http://schemas.openxmlformats.org/presentationml/2006/main" xmlns:r="http://schemas.openxmlformats.org/officeDocument/2006/relationships">
+  <p:cSld>
+    <p:spTree>
+      <p:nvGrpSpPr>
+        <p:cNvPr id="1" name=""/>
+        <p:cNvGrpSpPr/>
+        <p:nvPr/>
+      </p:nvGrpSpPr>
+      <p:grpSpPr>
+        <a:xfrm>
+          <a:off x="0" y="0"/>
+          <a:ext cx="0" cy="0"/>
+          <a:chOff x="0" y="0"/>
+          <a:chExt cx="0" cy="0"/>
+        </a:xfrm>
+      </p:grpSpPr>
+      <p:sp>
+        <p:nvSpPr>
+          <p:cNvPr id="2" name="Slide Image Placeholder 1"/>
+          <p:cNvSpPr>
+            <a:spLocks noGrp="1"/>
+          </p:cNvSpPr>
+          <p:nvPr>
+            <p:ph type="sldImg" idx="2"/>
+          </p:nvPr>
+        </p:nvSpPr>
+        <p:spPr/>
+      </p:sp>
+      <p:sp>
+        <p:nvSpPr>
+          <p:cNvPr id="3" name="Notes Placeholder 2"/>
+          <p:cNvSpPr>
+            <a:spLocks noGrp="1"/>
+          </p:cNvSpPr>
+          <p:nvPr>
+            <p:ph type="body" idx="3" sz="quarter"/>
+          </p:nvPr>
+        </p:nvSpPr>
+        <p:spPr/>
+        <p:txBody>
+          <a:bodyPr/>
+          <a:lstStyle/>
+          <a:p>
+            <a:r>
+              <a:t>Give students a few minutes to answer on mini whiteboards or paper, then reveal the answers on the next slide.</a:t>
+            </a:r>
+          </a:p>
+        </p:txBody>
+      </p:sp>
+      <p:sp>
+        <p:nvSpPr>
+          <p:cNvPr id="4" name="Slide Number Placeholder 3"/>
+          <p:cNvSpPr>
+            <a:spLocks noGrp="1"/>
+          </p:cNvSpPr>
+          <p:nvPr>
+            <p:ph type="sldNum" idx="5" sz="quarter"/>
+          </p:nvPr>
+        </p:nvSpPr>
+        <p:spPr/>
+      </p:sp>
+    </p:spTree>
+  </p:cSld>
+  <p:clrMapOvr>
+    <a:masterClrMapping/>
+  </p:clrMapOvr>
+</p:notes>
+</file>
+
+<file path=ppt/notesSlides/notesSlide5.xml><?xml version="1.0" encoding="utf-8"?>
+<p:notes xmlns:a="http://schemas.openxmlformats.org/drawingml/2006/main" xmlns:p="http://schemas.openxmlformats.org/presentationml/2006/main" xmlns:r="http://schemas.openxmlformats.org/officeDocument/2006/relationships">
+  <p:cSld>
+    <p:spTree>
+      <p:nvGrpSpPr>
+        <p:cNvPr id="1" name=""/>
+        <p:cNvGrpSpPr/>
+        <p:nvPr/>
+      </p:nvGrpSpPr>
+      <p:grpSpPr>
+        <a:xfrm>
+          <a:off x="0" y="0"/>
+          <a:ext cx="0" cy="0"/>
+          <a:chOff x="0" y="0"/>
+          <a:chExt cx="0" cy="0"/>
+        </a:xfrm>
+      </p:grpSpPr>
+      <p:sp>
+        <p:nvSpPr>
+          <p:cNvPr id="2" name="Slide Image Placeholder 1"/>
+          <p:cNvSpPr>
+            <a:spLocks noGrp="1"/>
+          </p:cNvSpPr>
+          <p:nvPr>
+            <p:ph type="sldImg" idx="2"/>
+          </p:nvPr>
+        </p:nvSpPr>
+        <p:spPr/>
+      </p:sp>
+      <p:sp>
+        <p:nvSpPr>
+          <p:cNvPr id="3" name="Notes Placeholder 2"/>
+          <p:cNvSpPr>
+            <a:spLocks noGrp="1"/>
+          </p:cNvSpPr>
+          <p:nvPr>
+            <p:ph type="body" idx="3" sz="quarter"/>
+          </p:nvPr>
+        </p:nvSpPr>
+        <p:spPr/>
+        <p:txBody>
+          <a:bodyPr/>
+          <a:lstStyle/>
+          <a:p>
+            <a:r>
+              <a:t>Talk through any answers the class found difficult.</a:t>
+            </a:r>
+          </a:p>
+        </p:txBody>
+      </p:sp>
+      <p:sp>
+        <p:nvSpPr>
+          <p:cNvPr id="4" name="Slide Number Placeholder 3"/>
+          <p:cNvSpPr>
+            <a:spLocks noGrp="1"/>
+          </p:cNvSpPr>
+          <p:nvPr>
+            <p:ph type="sldNum" idx="5" sz="quarter"/>
+          </p:nvPr>
+        </p:nvSpPr>
+        <p:spPr/>
+      </p:sp>
+    </p:spTree>
+  </p:cSld>
+  <p:clrMapOvr>
+    <a:masterClrMapping/>
+  </p:clrMapOvr>
+</p:notes>
+</file>
+
+<file path=ppt/notesSlides/notesSlide6.xml><?xml version="1.0" encoding="utf-8"?>
 <p:notes xmlns:a="http://schemas.openxmlformats.org/drawingml/2006/main" xmlns:p="http://schemas.openxmlformats.org/presentationml/2006/main" xmlns:r="http://schemas.openxmlformats.org/officeDocument/2006/relationships">
   <p:cSld>
     <p:spTree>
@@ -3975,7 +4236,7 @@
 </p:sld>
 </file>
 
-<file path=ppt/slides/slide2.xml><?xml version="1.0" encoding="utf-8"?>
+<file path=ppt/slides/slide10.xml><?xml version="1.0" encoding="utf-8"?>
 <p:sld xmlns:a="http://schemas.openxmlformats.org/drawingml/2006/main" xmlns:p="http://schemas.openxmlformats.org/presentationml/2006/main" xmlns:r="http://schemas.openxmlformats.org/officeDocument/2006/relationships">
   <p:cSld>
     <p:bg>
@@ -4054,7 +4315,7 @@
                 </a:solidFill>
                 <a:latin typeface="Cambria"/>
               </a:rPr>
-              <a:t>Learning objectives</a:t>
+              <a:t>Validation checks</a:t>
             </a:r>
           </a:p>
         </p:txBody>
@@ -4120,1681 +4381,7 @@
                 </a:solidFill>
                 <a:latin typeface="Calibri"/>
               </a:rPr>
-              <a:t>2</a:t>
-            </a:r>
-          </a:p>
-        </p:txBody>
-      </p:sp>
-      <p:sp>
-        <p:nvSpPr>
-          <p:cNvPr id="6" name="TextBox 5"/>
-          <p:cNvSpPr txBox="1"/>
-          <p:nvPr/>
-        </p:nvSpPr>
-        <p:spPr>
-          <a:xfrm>
-            <a:off x="548640" y="1508760"/>
-            <a:ext cx="6766560" cy="365760"/>
-          </a:xfrm>
-          <a:prstGeom prst="rect">
-            <a:avLst/>
-          </a:prstGeom>
-          <a:noFill/>
-        </p:spPr>
-        <p:txBody>
-          <a:bodyPr wrap="square" anchor="t" lIns="0" rIns="0" tIns="0" bIns="0"/>
-          <a:lstStyle/>
-          <a:p>
-            <a:pPr algn="l"/>
-            <a:r>
-              <a:rPr sz="1600" b="0" i="1">
-                <a:solidFill>
-                  <a:srgbClr val="54595D"/>
-                </a:solidFill>
-                <a:latin typeface="Calibri"/>
-              </a:rPr>
-              <a:t>By the end of this lesson you should be able to:</a:t>
-            </a:r>
-          </a:p>
-        </p:txBody>
-      </p:sp>
-      <p:sp>
-        <p:nvSpPr>
-          <p:cNvPr id="7" name="Oval 6"/>
-          <p:cNvSpPr/>
-          <p:nvPr/>
-        </p:nvSpPr>
-        <p:spPr>
-          <a:xfrm>
-            <a:off x="548640" y="2240280"/>
-            <a:ext cx="457200" cy="457200"/>
-          </a:xfrm>
-          <a:prstGeom prst="ellipse">
-            <a:avLst/>
-          </a:prstGeom>
-          <a:solidFill>
-            <a:srgbClr val="F2B705"/>
-          </a:solidFill>
-          <a:ln>
-            <a:noFill/>
-          </a:ln>
-          <a:effectLst/>
-        </p:spPr>
-        <p:style>
-          <a:lnRef idx="1">
-            <a:schemeClr val="accent1"/>
-          </a:lnRef>
-          <a:fillRef idx="3">
-            <a:schemeClr val="accent1"/>
-          </a:fillRef>
-          <a:effectRef idx="2">
-            <a:schemeClr val="accent1"/>
-          </a:effectRef>
-          <a:fontRef idx="minor">
-            <a:schemeClr val="lt1"/>
-          </a:fontRef>
-        </p:style>
-        <p:txBody>
-          <a:bodyPr rtlCol="0" anchor="ctr" lIns="0" rIns="0" tIns="0" bIns="0"/>
-          <a:lstStyle/>
-          <a:p>
-            <a:pPr algn="ctr"/>
-            <a:r>
-              <a:rPr sz="1600" b="1">
-                <a:solidFill>
-                  <a:srgbClr val="202122"/>
-                </a:solidFill>
-                <a:latin typeface="Calibri"/>
-              </a:rPr>
-              <a:t>1</a:t>
-            </a:r>
-          </a:p>
-        </p:txBody>
-      </p:sp>
-      <p:sp>
-        <p:nvSpPr>
-          <p:cNvPr id="8" name="TextBox 7"/>
-          <p:cNvSpPr txBox="1"/>
-          <p:nvPr/>
-        </p:nvSpPr>
-        <p:spPr>
-          <a:xfrm>
-            <a:off x="1234440" y="2011680"/>
-            <a:ext cx="6035040" cy="914400"/>
-          </a:xfrm>
-          <a:prstGeom prst="rect">
-            <a:avLst/>
-          </a:prstGeom>
-          <a:noFill/>
-        </p:spPr>
-        <p:txBody>
-          <a:bodyPr wrap="square" anchor="ctr" lIns="0" rIns="0" tIns="0" bIns="0"/>
-          <a:lstStyle/>
-          <a:p>
-            <a:pPr algn="l"/>
-            <a:r>
-              <a:rPr sz="2000" b="0" i="0">
-                <a:solidFill>
-                  <a:srgbClr val="202122"/>
-                </a:solidFill>
-                <a:latin typeface="Calibri"/>
-              </a:rPr>
-              <a:t>Explain the difference between a function and a procedure.</a:t>
-            </a:r>
-          </a:p>
-        </p:txBody>
-      </p:sp>
-      <p:sp>
-        <p:nvSpPr>
-          <p:cNvPr id="9" name="Oval 8"/>
-          <p:cNvSpPr/>
-          <p:nvPr/>
-        </p:nvSpPr>
-        <p:spPr>
-          <a:xfrm>
-            <a:off x="548640" y="3291840"/>
-            <a:ext cx="457200" cy="457200"/>
-          </a:xfrm>
-          <a:prstGeom prst="ellipse">
-            <a:avLst/>
-          </a:prstGeom>
-          <a:solidFill>
-            <a:srgbClr val="F2B705"/>
-          </a:solidFill>
-          <a:ln>
-            <a:noFill/>
-          </a:ln>
-          <a:effectLst/>
-        </p:spPr>
-        <p:style>
-          <a:lnRef idx="1">
-            <a:schemeClr val="accent1"/>
-          </a:lnRef>
-          <a:fillRef idx="3">
-            <a:schemeClr val="accent1"/>
-          </a:fillRef>
-          <a:effectRef idx="2">
-            <a:schemeClr val="accent1"/>
-          </a:effectRef>
-          <a:fontRef idx="minor">
-            <a:schemeClr val="lt1"/>
-          </a:fontRef>
-        </p:style>
-        <p:txBody>
-          <a:bodyPr rtlCol="0" anchor="ctr" lIns="0" rIns="0" tIns="0" bIns="0"/>
-          <a:lstStyle/>
-          <a:p>
-            <a:pPr algn="ctr"/>
-            <a:r>
-              <a:rPr sz="1600" b="1">
-                <a:solidFill>
-                  <a:srgbClr val="202122"/>
-                </a:solidFill>
-                <a:latin typeface="Calibri"/>
-              </a:rPr>
-              <a:t>2</a:t>
-            </a:r>
-          </a:p>
-        </p:txBody>
-      </p:sp>
-      <p:sp>
-        <p:nvSpPr>
-          <p:cNvPr id="10" name="TextBox 9"/>
-          <p:cNvSpPr txBox="1"/>
-          <p:nvPr/>
-        </p:nvSpPr>
-        <p:spPr>
-          <a:xfrm>
-            <a:off x="1234440" y="3063240"/>
-            <a:ext cx="6035040" cy="914400"/>
-          </a:xfrm>
-          <a:prstGeom prst="rect">
-            <a:avLst/>
-          </a:prstGeom>
-          <a:noFill/>
-        </p:spPr>
-        <p:txBody>
-          <a:bodyPr wrap="square" anchor="ctr" lIns="0" rIns="0" tIns="0" bIns="0"/>
-          <a:lstStyle/>
-          <a:p>
-            <a:pPr algn="l"/>
-            <a:r>
-              <a:rPr sz="2000" b="0" i="0">
-                <a:solidFill>
-                  <a:srgbClr val="202122"/>
-                </a:solidFill>
-                <a:latin typeface="Calibri"/>
-              </a:rPr>
-              <a:t>Compare user-written, built-in and library subroutines.</a:t>
-            </a:r>
-          </a:p>
-        </p:txBody>
-      </p:sp>
-      <p:sp>
-        <p:nvSpPr>
-          <p:cNvPr id="11" name="Oval 10"/>
-          <p:cNvSpPr/>
-          <p:nvPr/>
-        </p:nvSpPr>
-        <p:spPr>
-          <a:xfrm>
-            <a:off x="548640" y="4343400"/>
-            <a:ext cx="457200" cy="457200"/>
-          </a:xfrm>
-          <a:prstGeom prst="ellipse">
-            <a:avLst/>
-          </a:prstGeom>
-          <a:solidFill>
-            <a:srgbClr val="F2B705"/>
-          </a:solidFill>
-          <a:ln>
-            <a:noFill/>
-          </a:ln>
-          <a:effectLst/>
-        </p:spPr>
-        <p:style>
-          <a:lnRef idx="1">
-            <a:schemeClr val="accent1"/>
-          </a:lnRef>
-          <a:fillRef idx="3">
-            <a:schemeClr val="accent1"/>
-          </a:fillRef>
-          <a:effectRef idx="2">
-            <a:schemeClr val="accent1"/>
-          </a:effectRef>
-          <a:fontRef idx="minor">
-            <a:schemeClr val="lt1"/>
-          </a:fontRef>
-        </p:style>
-        <p:txBody>
-          <a:bodyPr rtlCol="0" anchor="ctr" lIns="0" rIns="0" tIns="0" bIns="0"/>
-          <a:lstStyle/>
-          <a:p>
-            <a:pPr algn="ctr"/>
-            <a:r>
-              <a:rPr sz="1600" b="1">
-                <a:solidFill>
-                  <a:srgbClr val="202122"/>
-                </a:solidFill>
-                <a:latin typeface="Calibri"/>
-              </a:rPr>
-              <a:t>3</a:t>
-            </a:r>
-          </a:p>
-        </p:txBody>
-      </p:sp>
-      <p:sp>
-        <p:nvSpPr>
-          <p:cNvPr id="12" name="TextBox 11"/>
-          <p:cNvSpPr txBox="1"/>
-          <p:nvPr/>
-        </p:nvSpPr>
-        <p:spPr>
-          <a:xfrm>
-            <a:off x="1234440" y="4114800"/>
-            <a:ext cx="6035040" cy="914400"/>
-          </a:xfrm>
-          <a:prstGeom prst="rect">
-            <a:avLst/>
-          </a:prstGeom>
-          <a:noFill/>
-        </p:spPr>
-        <p:txBody>
-          <a:bodyPr wrap="square" anchor="ctr" lIns="0" rIns="0" tIns="0" bIns="0"/>
-          <a:lstStyle/>
-          <a:p>
-            <a:pPr algn="l"/>
-            <a:r>
-              <a:rPr sz="2000" b="0" i="0">
-                <a:solidFill>
-                  <a:srgbClr val="202122"/>
-                </a:solidFill>
-                <a:latin typeface="Calibri"/>
-              </a:rPr>
-              <a:t>Write validation checks in code.</a:t>
-            </a:r>
-          </a:p>
-        </p:txBody>
-      </p:sp>
-      <p:sp>
-        <p:nvSpPr>
-          <p:cNvPr id="13" name="Rounded Rectangle 12"/>
-          <p:cNvSpPr/>
-          <p:nvPr/>
-        </p:nvSpPr>
-        <p:spPr>
-          <a:xfrm>
-            <a:off x="7772400" y="1508760"/>
-            <a:ext cx="3867912" cy="4526280"/>
-          </a:xfrm>
-          <a:prstGeom prst="roundRect">
-            <a:avLst>
-              <a:gd name="adj" fmla="val 8000"/>
-            </a:avLst>
-          </a:prstGeom>
-          <a:solidFill>
-            <a:srgbClr val="EAF3FF"/>
-          </a:solidFill>
-          <a:ln>
-            <a:noFill/>
-          </a:ln>
-          <a:effectLst/>
-        </p:spPr>
-        <p:style>
-          <a:lnRef idx="1">
-            <a:schemeClr val="accent1"/>
-          </a:lnRef>
-          <a:fillRef idx="3">
-            <a:schemeClr val="accent1"/>
-          </a:fillRef>
-          <a:effectRef idx="2">
-            <a:schemeClr val="accent1"/>
-          </a:effectRef>
-          <a:fontRef idx="minor">
-            <a:schemeClr val="lt1"/>
-          </a:fontRef>
-        </p:style>
-        <p:txBody>
-          <a:bodyPr rtlCol="0" anchor="ctr"/>
-          <a:lstStyle/>
-          <a:p/>
-        </p:txBody>
-      </p:sp>
-      <p:sp>
-        <p:nvSpPr>
-          <p:cNvPr id="14" name="TextBox 13"/>
-          <p:cNvSpPr txBox="1"/>
-          <p:nvPr/>
-        </p:nvSpPr>
-        <p:spPr>
-          <a:xfrm>
-            <a:off x="8046720" y="1737360"/>
-            <a:ext cx="3291840" cy="365760"/>
-          </a:xfrm>
-          <a:prstGeom prst="rect">
-            <a:avLst/>
-          </a:prstGeom>
-          <a:noFill/>
-        </p:spPr>
-        <p:txBody>
-          <a:bodyPr wrap="square" anchor="t" lIns="0" rIns="0" tIns="0" bIns="0"/>
-          <a:lstStyle/>
-          <a:p>
-            <a:pPr algn="l"/>
-            <a:r>
-              <a:rPr sz="1300" b="1" i="0">
-                <a:solidFill>
-                  <a:srgbClr val="0645AD"/>
-                </a:solidFill>
-                <a:latin typeface="Calibri"/>
-              </a:rPr>
-              <a:t>STARTER</a:t>
-            </a:r>
-          </a:p>
-        </p:txBody>
-      </p:sp>
-      <p:sp>
-        <p:nvSpPr>
-          <p:cNvPr id="15" name="TextBox 14"/>
-          <p:cNvSpPr txBox="1"/>
-          <p:nvPr/>
-        </p:nvSpPr>
-        <p:spPr>
-          <a:xfrm>
-            <a:off x="8046720" y="2194560"/>
-            <a:ext cx="3291840" cy="3657600"/>
-          </a:xfrm>
-          <a:prstGeom prst="rect">
-            <a:avLst/>
-          </a:prstGeom>
-          <a:noFill/>
-        </p:spPr>
-        <p:txBody>
-          <a:bodyPr wrap="square" anchor="t" lIns="0" rIns="0" tIns="0" bIns="0"/>
-          <a:lstStyle/>
-          <a:p>
-            <a:pPr algn="l"/>
-            <a:r>
-              <a:rPr sz="2200" b="0" i="0">
-                <a:solidFill>
-                  <a:srgbClr val="03306E"/>
-                </a:solidFill>
-                <a:latin typeface="Cambria"/>
-              </a:rPr>
-              <a:t>You need to check an email address in five places in your program. Would you copy the code five times? Why not?</a:t>
-            </a:r>
-          </a:p>
-        </p:txBody>
-      </p:sp>
-    </p:spTree>
-  </p:cSld>
-  <p:clrMapOvr>
-    <a:masterClrMapping/>
-  </p:clrMapOvr>
-</p:sld>
-</file>
-
-<file path=ppt/slides/slide3.xml><?xml version="1.0" encoding="utf-8"?>
-<p:sld xmlns:a="http://schemas.openxmlformats.org/drawingml/2006/main" xmlns:p="http://schemas.openxmlformats.org/presentationml/2006/main" xmlns:r="http://schemas.openxmlformats.org/officeDocument/2006/relationships">
-  <p:cSld>
-    <p:bg>
-      <p:bgPr>
-        <a:solidFill>
-          <a:srgbClr val="FFFFFF"/>
-        </a:solidFill>
-        <a:effectLst/>
-      </p:bgPr>
-    </p:bg>
-    <p:spTree>
-      <p:nvGrpSpPr>
-        <p:cNvPr id="1" name=""/>
-        <p:cNvGrpSpPr/>
-        <p:nvPr/>
-      </p:nvGrpSpPr>
-      <p:grpSpPr/>
-      <p:sp>
-        <p:nvSpPr>
-          <p:cNvPr id="2" name="TextBox 1"/>
-          <p:cNvSpPr txBox="1"/>
-          <p:nvPr/>
-        </p:nvSpPr>
-        <p:spPr>
-          <a:xfrm>
-            <a:off x="548640" y="320040"/>
-            <a:ext cx="11094415" cy="274320"/>
-          </a:xfrm>
-          <a:prstGeom prst="rect">
-            <a:avLst/>
-          </a:prstGeom>
-          <a:noFill/>
-        </p:spPr>
-        <p:txBody>
-          <a:bodyPr wrap="square" anchor="t" lIns="0" rIns="0" tIns="0" bIns="0"/>
-          <a:lstStyle/>
-          <a:p>
-            <a:pPr algn="l"/>
-            <a:r>
-              <a:rPr sz="1100" b="1" i="0">
-                <a:solidFill>
-                  <a:srgbClr val="54595D"/>
-                </a:solidFill>
-                <a:latin typeface="Calibri"/>
-              </a:rPr>
-              <a:t>CORE COMPONENT  ·  Core Paper 1</a:t>
-            </a:r>
-          </a:p>
-        </p:txBody>
-      </p:sp>
-      <p:sp>
-        <p:nvSpPr>
-          <p:cNvPr id="3" name="TextBox 2"/>
-          <p:cNvSpPr txBox="1"/>
-          <p:nvPr/>
-        </p:nvSpPr>
-        <p:spPr>
-          <a:xfrm>
-            <a:off x="548640" y="566928"/>
-            <a:ext cx="11094415" cy="822960"/>
-          </a:xfrm>
-          <a:prstGeom prst="rect">
-            <a:avLst/>
-          </a:prstGeom>
-          <a:noFill/>
-        </p:spPr>
-        <p:txBody>
-          <a:bodyPr wrap="square" anchor="ctr" lIns="0" rIns="0" tIns="0" bIns="0"/>
-          <a:lstStyle/>
-          <a:p>
-            <a:pPr algn="l"/>
-            <a:r>
-              <a:rPr sz="3200" b="1" i="0">
-                <a:solidFill>
-                  <a:srgbClr val="03306E"/>
-                </a:solidFill>
-                <a:latin typeface="Cambria"/>
-              </a:rPr>
-              <a:t>Functions and procedures</a:t>
-            </a:r>
-          </a:p>
-        </p:txBody>
-      </p:sp>
-      <p:sp>
-        <p:nvSpPr>
-          <p:cNvPr id="4" name="TextBox 3"/>
-          <p:cNvSpPr txBox="1"/>
-          <p:nvPr/>
-        </p:nvSpPr>
-        <p:spPr>
-          <a:xfrm>
-            <a:off x="548640" y="6446520"/>
-            <a:ext cx="8229600" cy="274320"/>
-          </a:xfrm>
-          <a:prstGeom prst="rect">
-            <a:avLst/>
-          </a:prstGeom>
-          <a:noFill/>
-        </p:spPr>
-        <p:txBody>
-          <a:bodyPr wrap="square" anchor="t" lIns="0" rIns="0" tIns="0" bIns="0"/>
-          <a:lstStyle/>
-          <a:p>
-            <a:pPr algn="l"/>
-            <a:r>
-              <a:rPr sz="1000" b="0" i="0">
-                <a:solidFill>
-                  <a:srgbClr val="54595D"/>
-                </a:solidFill>
-                <a:latin typeface="Calibri"/>
-              </a:rPr>
-              <a:t>Digital Software Development T Level  ·  Functions, Procedures and Validation</a:t>
-            </a:r>
-          </a:p>
-        </p:txBody>
-      </p:sp>
-      <p:sp>
-        <p:nvSpPr>
-          <p:cNvPr id="5" name="TextBox 4"/>
-          <p:cNvSpPr txBox="1"/>
-          <p:nvPr/>
-        </p:nvSpPr>
-        <p:spPr>
-          <a:xfrm>
-            <a:off x="10728655" y="6446520"/>
-            <a:ext cx="914400" cy="274320"/>
-          </a:xfrm>
-          <a:prstGeom prst="rect">
-            <a:avLst/>
-          </a:prstGeom>
-          <a:noFill/>
-        </p:spPr>
-        <p:txBody>
-          <a:bodyPr wrap="square" anchor="t" lIns="0" rIns="0" tIns="0" bIns="0"/>
-          <a:lstStyle/>
-          <a:p>
-            <a:pPr algn="r"/>
-            <a:r>
-              <a:rPr sz="1000" b="0" i="0">
-                <a:solidFill>
-                  <a:srgbClr val="54595D"/>
-                </a:solidFill>
-                <a:latin typeface="Calibri"/>
-              </a:rPr>
-              <a:t>3</a:t>
-            </a:r>
-          </a:p>
-        </p:txBody>
-      </p:sp>
-      <p:sp>
-        <p:nvSpPr>
-          <p:cNvPr id="6" name="Rounded Rectangle 5"/>
-          <p:cNvSpPr/>
-          <p:nvPr/>
-        </p:nvSpPr>
-        <p:spPr>
-          <a:xfrm>
-            <a:off x="548640" y="1600200"/>
-            <a:ext cx="5364327" cy="640080"/>
-          </a:xfrm>
-          <a:prstGeom prst="roundRect">
-            <a:avLst>
-              <a:gd name="adj" fmla="val 15000"/>
-            </a:avLst>
-          </a:prstGeom>
-          <a:solidFill>
-            <a:srgbClr val="03306E"/>
-          </a:solidFill>
-          <a:ln>
-            <a:noFill/>
-          </a:ln>
-          <a:effectLst/>
-        </p:spPr>
-        <p:style>
-          <a:lnRef idx="1">
-            <a:schemeClr val="accent1"/>
-          </a:lnRef>
-          <a:fillRef idx="3">
-            <a:schemeClr val="accent1"/>
-          </a:fillRef>
-          <a:effectRef idx="2">
-            <a:schemeClr val="accent1"/>
-          </a:effectRef>
-          <a:fontRef idx="minor">
-            <a:schemeClr val="lt1"/>
-          </a:fontRef>
-        </p:style>
-        <p:txBody>
-          <a:bodyPr rtlCol="0" anchor="ctr"/>
-          <a:lstStyle/>
-          <a:p/>
-        </p:txBody>
-      </p:sp>
-      <p:sp>
-        <p:nvSpPr>
-          <p:cNvPr id="7" name="TextBox 6"/>
-          <p:cNvSpPr txBox="1"/>
-          <p:nvPr/>
-        </p:nvSpPr>
-        <p:spPr>
-          <a:xfrm>
-            <a:off x="777240" y="1600200"/>
-            <a:ext cx="4907127" cy="640080"/>
-          </a:xfrm>
-          <a:prstGeom prst="rect">
-            <a:avLst/>
-          </a:prstGeom>
-          <a:noFill/>
-        </p:spPr>
-        <p:txBody>
-          <a:bodyPr wrap="square" anchor="ctr" lIns="0" rIns="0" tIns="0" bIns="0"/>
-          <a:lstStyle/>
-          <a:p>
-            <a:pPr algn="l"/>
-            <a:r>
-              <a:rPr sz="2000" b="1" i="0">
-                <a:solidFill>
-                  <a:srgbClr val="FFFFFF"/>
-                </a:solidFill>
-                <a:latin typeface="Calibri"/>
-              </a:rPr>
-              <a:t>Function</a:t>
-            </a:r>
-          </a:p>
-        </p:txBody>
-      </p:sp>
-      <p:sp>
-        <p:nvSpPr>
-          <p:cNvPr id="8" name="Rounded Rectangle 7"/>
-          <p:cNvSpPr/>
-          <p:nvPr/>
-        </p:nvSpPr>
-        <p:spPr>
-          <a:xfrm>
-            <a:off x="548640" y="2377440"/>
-            <a:ext cx="5364327" cy="3794760"/>
-          </a:xfrm>
-          <a:prstGeom prst="roundRect">
-            <a:avLst>
-              <a:gd name="adj" fmla="val 4000"/>
-            </a:avLst>
-          </a:prstGeom>
-          <a:solidFill>
-            <a:srgbClr val="EAF3FF"/>
-          </a:solidFill>
-          <a:ln>
-            <a:noFill/>
-          </a:ln>
-          <a:effectLst/>
-        </p:spPr>
-        <p:style>
-          <a:lnRef idx="1">
-            <a:schemeClr val="accent1"/>
-          </a:lnRef>
-          <a:fillRef idx="3">
-            <a:schemeClr val="accent1"/>
-          </a:fillRef>
-          <a:effectRef idx="2">
-            <a:schemeClr val="accent1"/>
-          </a:effectRef>
-          <a:fontRef idx="minor">
-            <a:schemeClr val="lt1"/>
-          </a:fontRef>
-        </p:style>
-        <p:txBody>
-          <a:bodyPr rtlCol="0" anchor="ctr"/>
-          <a:lstStyle/>
-          <a:p/>
-        </p:txBody>
-      </p:sp>
-      <p:sp>
-        <p:nvSpPr>
-          <p:cNvPr id="9" name="TextBox 8"/>
-          <p:cNvSpPr txBox="1"/>
-          <p:nvPr/>
-        </p:nvSpPr>
-        <p:spPr>
-          <a:xfrm>
-            <a:off x="822959" y="2606040"/>
-            <a:ext cx="4815687" cy="3337560"/>
-          </a:xfrm>
-          <a:prstGeom prst="rect">
-            <a:avLst/>
-          </a:prstGeom>
-          <a:noFill/>
-        </p:spPr>
-        <p:txBody>
-          <a:bodyPr wrap="square" lIns="0" rIns="0" tIns="0" bIns="0">
-            <a:spAutoFit/>
-          </a:bodyPr>
-          <a:lstStyle/>
-          <a:p>
-            <a:pPr marL="274320" indent="-274320">
-              <a:spcAft>
-                <a:spcPts val="990"/>
-              </a:spcAft>
-              <a:buClr>
-                <a:srgbClr val="0645AD"/>
-              </a:buClr>
-              <a:buFont typeface="Arial"/>
-              <a:buChar char="•"/>
-            </a:pPr>
-            <a:r>
-              <a:rPr sz="2200" b="0">
-                <a:solidFill>
-                  <a:srgbClr val="202122"/>
-                </a:solidFill>
-                <a:latin typeface="Calibri"/>
-              </a:rPr>
-              <a:t>May take parameters</a:t>
-            </a:r>
-          </a:p>
-          <a:p>
-            <a:pPr marL="274320" indent="-274320">
-              <a:spcAft>
-                <a:spcPts val="990"/>
-              </a:spcAft>
-              <a:buClr>
-                <a:srgbClr val="0645AD"/>
-              </a:buClr>
-              <a:buFont typeface="Arial"/>
-              <a:buChar char="•"/>
-            </a:pPr>
-            <a:r>
-              <a:rPr sz="2200" b="0">
-                <a:solidFill>
-                  <a:srgbClr val="202122"/>
-                </a:solidFill>
-                <a:latin typeface="Calibri"/>
-              </a:rPr>
-              <a:t>Must return a result</a:t>
-            </a:r>
-          </a:p>
-          <a:p>
-            <a:pPr marL="274320" indent="-274320">
-              <a:spcAft>
-                <a:spcPts val="990"/>
-              </a:spcAft>
-              <a:buClr>
-                <a:srgbClr val="0645AD"/>
-              </a:buClr>
-              <a:buFont typeface="Arial"/>
-              <a:buChar char="•"/>
-            </a:pPr>
-            <a:r>
-              <a:rPr sz="2200" b="1">
-                <a:solidFill>
-                  <a:srgbClr val="202122"/>
-                </a:solidFill>
-                <a:latin typeface="Calibri"/>
-              </a:rPr>
-              <a:t>Example:</a:t>
-            </a:r>
-            <a:r>
-              <a:rPr sz="2200" b="0">
-                <a:solidFill>
-                  <a:srgbClr val="202122"/>
-                </a:solidFill>
-                <a:latin typeface="Calibri"/>
-              </a:rPr>
-              <a:t> def area(w, h): return w * h</a:t>
-            </a:r>
-          </a:p>
-        </p:txBody>
-      </p:sp>
-      <p:sp>
-        <p:nvSpPr>
-          <p:cNvPr id="10" name="Rounded Rectangle 9"/>
-          <p:cNvSpPr/>
-          <p:nvPr/>
-        </p:nvSpPr>
-        <p:spPr>
-          <a:xfrm>
-            <a:off x="6278727" y="1600200"/>
-            <a:ext cx="5364327" cy="640080"/>
-          </a:xfrm>
-          <a:prstGeom prst="roundRect">
-            <a:avLst>
-              <a:gd name="adj" fmla="val 15000"/>
-            </a:avLst>
-          </a:prstGeom>
-          <a:solidFill>
-            <a:srgbClr val="0645AD"/>
-          </a:solidFill>
-          <a:ln>
-            <a:noFill/>
-          </a:ln>
-          <a:effectLst/>
-        </p:spPr>
-        <p:style>
-          <a:lnRef idx="1">
-            <a:schemeClr val="accent1"/>
-          </a:lnRef>
-          <a:fillRef idx="3">
-            <a:schemeClr val="accent1"/>
-          </a:fillRef>
-          <a:effectRef idx="2">
-            <a:schemeClr val="accent1"/>
-          </a:effectRef>
-          <a:fontRef idx="minor">
-            <a:schemeClr val="lt1"/>
-          </a:fontRef>
-        </p:style>
-        <p:txBody>
-          <a:bodyPr rtlCol="0" anchor="ctr"/>
-          <a:lstStyle/>
-          <a:p/>
-        </p:txBody>
-      </p:sp>
-      <p:sp>
-        <p:nvSpPr>
-          <p:cNvPr id="11" name="TextBox 10"/>
-          <p:cNvSpPr txBox="1"/>
-          <p:nvPr/>
-        </p:nvSpPr>
-        <p:spPr>
-          <a:xfrm>
-            <a:off x="6507327" y="1600200"/>
-            <a:ext cx="4907127" cy="640080"/>
-          </a:xfrm>
-          <a:prstGeom prst="rect">
-            <a:avLst/>
-          </a:prstGeom>
-          <a:noFill/>
-        </p:spPr>
-        <p:txBody>
-          <a:bodyPr wrap="square" anchor="ctr" lIns="0" rIns="0" tIns="0" bIns="0"/>
-          <a:lstStyle/>
-          <a:p>
-            <a:pPr algn="l"/>
-            <a:r>
-              <a:rPr sz="2000" b="1" i="0">
-                <a:solidFill>
-                  <a:srgbClr val="FFFFFF"/>
-                </a:solidFill>
-                <a:latin typeface="Calibri"/>
-              </a:rPr>
-              <a:t>Procedure</a:t>
-            </a:r>
-          </a:p>
-        </p:txBody>
-      </p:sp>
-      <p:sp>
-        <p:nvSpPr>
-          <p:cNvPr id="12" name="Rounded Rectangle 11"/>
-          <p:cNvSpPr/>
-          <p:nvPr/>
-        </p:nvSpPr>
-        <p:spPr>
-          <a:xfrm>
-            <a:off x="6278727" y="2377440"/>
-            <a:ext cx="5364327" cy="3794760"/>
-          </a:xfrm>
-          <a:prstGeom prst="roundRect">
-            <a:avLst>
-              <a:gd name="adj" fmla="val 4000"/>
-            </a:avLst>
-          </a:prstGeom>
-          <a:solidFill>
-            <a:srgbClr val="EAF3FF"/>
-          </a:solidFill>
-          <a:ln>
-            <a:noFill/>
-          </a:ln>
-          <a:effectLst/>
-        </p:spPr>
-        <p:style>
-          <a:lnRef idx="1">
-            <a:schemeClr val="accent1"/>
-          </a:lnRef>
-          <a:fillRef idx="3">
-            <a:schemeClr val="accent1"/>
-          </a:fillRef>
-          <a:effectRef idx="2">
-            <a:schemeClr val="accent1"/>
-          </a:effectRef>
-          <a:fontRef idx="minor">
-            <a:schemeClr val="lt1"/>
-          </a:fontRef>
-        </p:style>
-        <p:txBody>
-          <a:bodyPr rtlCol="0" anchor="ctr"/>
-          <a:lstStyle/>
-          <a:p/>
-        </p:txBody>
-      </p:sp>
-      <p:sp>
-        <p:nvSpPr>
-          <p:cNvPr id="13" name="TextBox 12"/>
-          <p:cNvSpPr txBox="1"/>
-          <p:nvPr/>
-        </p:nvSpPr>
-        <p:spPr>
-          <a:xfrm>
-            <a:off x="6553047" y="2606040"/>
-            <a:ext cx="4815687" cy="3337560"/>
-          </a:xfrm>
-          <a:prstGeom prst="rect">
-            <a:avLst/>
-          </a:prstGeom>
-          <a:noFill/>
-        </p:spPr>
-        <p:txBody>
-          <a:bodyPr wrap="square" lIns="0" rIns="0" tIns="0" bIns="0">
-            <a:spAutoFit/>
-          </a:bodyPr>
-          <a:lstStyle/>
-          <a:p>
-            <a:pPr marL="274320" indent="-274320">
-              <a:spcAft>
-                <a:spcPts val="990"/>
-              </a:spcAft>
-              <a:buClr>
-                <a:srgbClr val="0645AD"/>
-              </a:buClr>
-              <a:buFont typeface="Arial"/>
-              <a:buChar char="•"/>
-            </a:pPr>
-            <a:r>
-              <a:rPr sz="2200" b="0">
-                <a:solidFill>
-                  <a:srgbClr val="202122"/>
-                </a:solidFill>
-                <a:latin typeface="Calibri"/>
-              </a:rPr>
-              <a:t>May take parameters</a:t>
-            </a:r>
-          </a:p>
-          <a:p>
-            <a:pPr marL="274320" indent="-274320">
-              <a:spcAft>
-                <a:spcPts val="990"/>
-              </a:spcAft>
-              <a:buClr>
-                <a:srgbClr val="0645AD"/>
-              </a:buClr>
-              <a:buFont typeface="Arial"/>
-              <a:buChar char="•"/>
-            </a:pPr>
-            <a:r>
-              <a:rPr sz="2200" b="0">
-                <a:solidFill>
-                  <a:srgbClr val="202122"/>
-                </a:solidFill>
-                <a:latin typeface="Calibri"/>
-              </a:rPr>
-              <a:t>Does not return a result</a:t>
-            </a:r>
-          </a:p>
-          <a:p>
-            <a:pPr marL="274320" indent="-274320">
-              <a:spcAft>
-                <a:spcPts val="990"/>
-              </a:spcAft>
-              <a:buClr>
-                <a:srgbClr val="0645AD"/>
-              </a:buClr>
-              <a:buFont typeface="Arial"/>
-              <a:buChar char="•"/>
-            </a:pPr>
-            <a:r>
-              <a:rPr sz="2200" b="1">
-                <a:solidFill>
-                  <a:srgbClr val="202122"/>
-                </a:solidFill>
-                <a:latin typeface="Calibri"/>
-              </a:rPr>
-              <a:t>Example:</a:t>
-            </a:r>
-            <a:r>
-              <a:rPr sz="2200" b="0">
-                <a:solidFill>
-                  <a:srgbClr val="202122"/>
-                </a:solidFill>
-                <a:latin typeface="Calibri"/>
-              </a:rPr>
-              <a:t> def greet(name): print('Hello', name)</a:t>
-            </a:r>
-          </a:p>
-        </p:txBody>
-      </p:sp>
-    </p:spTree>
-  </p:cSld>
-  <p:clrMapOvr>
-    <a:masterClrMapping/>
-  </p:clrMapOvr>
-</p:sld>
-</file>
-
-<file path=ppt/slides/slide4.xml><?xml version="1.0" encoding="utf-8"?>
-<p:sld xmlns:a="http://schemas.openxmlformats.org/drawingml/2006/main" xmlns:p="http://schemas.openxmlformats.org/presentationml/2006/main" xmlns:r="http://schemas.openxmlformats.org/officeDocument/2006/relationships">
-  <p:cSld>
-    <p:bg>
-      <p:bgPr>
-        <a:solidFill>
-          <a:srgbClr val="FFFFFF"/>
-        </a:solidFill>
-        <a:effectLst/>
-      </p:bgPr>
-    </p:bg>
-    <p:spTree>
-      <p:nvGrpSpPr>
-        <p:cNvPr id="1" name=""/>
-        <p:cNvGrpSpPr/>
-        <p:nvPr/>
-      </p:nvGrpSpPr>
-      <p:grpSpPr/>
-      <p:sp>
-        <p:nvSpPr>
-          <p:cNvPr id="2" name="TextBox 1"/>
-          <p:cNvSpPr txBox="1"/>
-          <p:nvPr/>
-        </p:nvSpPr>
-        <p:spPr>
-          <a:xfrm>
-            <a:off x="548640" y="320040"/>
-            <a:ext cx="11094415" cy="274320"/>
-          </a:xfrm>
-          <a:prstGeom prst="rect">
-            <a:avLst/>
-          </a:prstGeom>
-          <a:noFill/>
-        </p:spPr>
-        <p:txBody>
-          <a:bodyPr wrap="square" anchor="t" lIns="0" rIns="0" tIns="0" bIns="0"/>
-          <a:lstStyle/>
-          <a:p>
-            <a:pPr algn="l"/>
-            <a:r>
-              <a:rPr sz="1100" b="1" i="0">
-                <a:solidFill>
-                  <a:srgbClr val="54595D"/>
-                </a:solidFill>
-                <a:latin typeface="Calibri"/>
-              </a:rPr>
-              <a:t>CORE COMPONENT  ·  Core Paper 1</a:t>
-            </a:r>
-          </a:p>
-        </p:txBody>
-      </p:sp>
-      <p:sp>
-        <p:nvSpPr>
-          <p:cNvPr id="3" name="TextBox 2"/>
-          <p:cNvSpPr txBox="1"/>
-          <p:nvPr/>
-        </p:nvSpPr>
-        <p:spPr>
-          <a:xfrm>
-            <a:off x="548640" y="566928"/>
-            <a:ext cx="11094415" cy="822960"/>
-          </a:xfrm>
-          <a:prstGeom prst="rect">
-            <a:avLst/>
-          </a:prstGeom>
-          <a:noFill/>
-        </p:spPr>
-        <p:txBody>
-          <a:bodyPr wrap="square" anchor="ctr" lIns="0" rIns="0" tIns="0" bIns="0"/>
-          <a:lstStyle/>
-          <a:p>
-            <a:pPr algn="l"/>
-            <a:r>
-              <a:rPr sz="3200" b="1" i="0">
-                <a:solidFill>
-                  <a:srgbClr val="03306E"/>
-                </a:solidFill>
-                <a:latin typeface="Cambria"/>
-              </a:rPr>
-              <a:t>Where subroutines come from</a:t>
-            </a:r>
-          </a:p>
-        </p:txBody>
-      </p:sp>
-      <p:sp>
-        <p:nvSpPr>
-          <p:cNvPr id="4" name="TextBox 3"/>
-          <p:cNvSpPr txBox="1"/>
-          <p:nvPr/>
-        </p:nvSpPr>
-        <p:spPr>
-          <a:xfrm>
-            <a:off x="548640" y="6446520"/>
-            <a:ext cx="8229600" cy="274320"/>
-          </a:xfrm>
-          <a:prstGeom prst="rect">
-            <a:avLst/>
-          </a:prstGeom>
-          <a:noFill/>
-        </p:spPr>
-        <p:txBody>
-          <a:bodyPr wrap="square" anchor="t" lIns="0" rIns="0" tIns="0" bIns="0"/>
-          <a:lstStyle/>
-          <a:p>
-            <a:pPr algn="l"/>
-            <a:r>
-              <a:rPr sz="1000" b="0" i="0">
-                <a:solidFill>
-                  <a:srgbClr val="54595D"/>
-                </a:solidFill>
-                <a:latin typeface="Calibri"/>
-              </a:rPr>
-              <a:t>Digital Software Development T Level  ·  Functions, Procedures and Validation</a:t>
-            </a:r>
-          </a:p>
-        </p:txBody>
-      </p:sp>
-      <p:sp>
-        <p:nvSpPr>
-          <p:cNvPr id="5" name="TextBox 4"/>
-          <p:cNvSpPr txBox="1"/>
-          <p:nvPr/>
-        </p:nvSpPr>
-        <p:spPr>
-          <a:xfrm>
-            <a:off x="10728655" y="6446520"/>
-            <a:ext cx="914400" cy="274320"/>
-          </a:xfrm>
-          <a:prstGeom prst="rect">
-            <a:avLst/>
-          </a:prstGeom>
-          <a:noFill/>
-        </p:spPr>
-        <p:txBody>
-          <a:bodyPr wrap="square" anchor="t" lIns="0" rIns="0" tIns="0" bIns="0"/>
-          <a:lstStyle/>
-          <a:p>
-            <a:pPr algn="r"/>
-            <a:r>
-              <a:rPr sz="1000" b="0" i="0">
-                <a:solidFill>
-                  <a:srgbClr val="54595D"/>
-                </a:solidFill>
-                <a:latin typeface="Calibri"/>
-              </a:rPr>
-              <a:t>4</a:t>
-            </a:r>
-          </a:p>
-        </p:txBody>
-      </p:sp>
-      <p:graphicFrame>
-        <p:nvGraphicFramePr>
-          <p:cNvPr id="6" name="Table 5"/>
-          <p:cNvGraphicFramePr>
-            <a:graphicFrameLocks noGrp="1"/>
-          </p:cNvGraphicFramePr>
-          <p:nvPr/>
-        </p:nvGraphicFramePr>
-        <p:xfrm>
-          <a:off x="548640" y="1600200"/>
-          <a:ext cx="11094413" cy="4526280"/>
-        </p:xfrm>
-        <a:graphic>
-          <a:graphicData uri="http://schemas.openxmlformats.org/drawingml/2006/table">
-            <a:tbl>
-              <a:tblPr firstRow="1" bandRow="1">
-                <a:tableStyleId>{5C22544A-7EE6-4342-B048-85BDC9FD1C3A}</a:tableStyleId>
-              </a:tblPr>
-              <a:tblGrid>
-                <a:gridCol w="2773603"/>
-                <a:gridCol w="3782186"/>
-                <a:gridCol w="4538624"/>
-              </a:tblGrid>
-              <a:tr h="905256">
-                <a:tc>
-                  <a:txBody>
-                    <a:bodyPr wrap="square"/>
-                    <a:lstStyle/>
-                    <a:p>
-                      <a:r>
-                        <a:rPr sz="1600" b="1">
-                          <a:solidFill>
-                            <a:srgbClr val="FFFFFF"/>
-                          </a:solidFill>
-                          <a:latin typeface="Calibri"/>
-                        </a:rPr>
-                        <a:t>Source</a:t>
-                      </a:r>
-                    </a:p>
-                  </a:txBody>
-                  <a:tcPr marL="91440" marR="91440" anchor="ctr">
-                    <a:solidFill>
-                      <a:srgbClr val="03306E"/>
-                    </a:solidFill>
-                  </a:tcPr>
-                </a:tc>
-                <a:tc>
-                  <a:txBody>
-                    <a:bodyPr wrap="square"/>
-                    <a:lstStyle/>
-                    <a:p>
-                      <a:r>
-                        <a:rPr sz="1600" b="1">
-                          <a:solidFill>
-                            <a:srgbClr val="FFFFFF"/>
-                          </a:solidFill>
-                          <a:latin typeface="Calibri"/>
-                        </a:rPr>
-                        <a:t>Example</a:t>
-                      </a:r>
-                    </a:p>
-                  </a:txBody>
-                  <a:tcPr marL="91440" marR="91440" anchor="ctr">
-                    <a:solidFill>
-                      <a:srgbClr val="03306E"/>
-                    </a:solidFill>
-                  </a:tcPr>
-                </a:tc>
-                <a:tc>
-                  <a:txBody>
-                    <a:bodyPr wrap="square"/>
-                    <a:lstStyle/>
-                    <a:p>
-                      <a:r>
-                        <a:rPr sz="1600" b="1">
-                          <a:solidFill>
-                            <a:srgbClr val="FFFFFF"/>
-                          </a:solidFill>
-                          <a:latin typeface="Calibri"/>
-                        </a:rPr>
-                        <a:t>Trade-off</a:t>
-                      </a:r>
-                    </a:p>
-                  </a:txBody>
-                  <a:tcPr marL="91440" marR="91440" anchor="ctr">
-                    <a:solidFill>
-                      <a:srgbClr val="03306E"/>
-                    </a:solidFill>
-                  </a:tcPr>
-                </a:tc>
-              </a:tr>
-              <a:tr h="905256">
-                <a:tc>
-                  <a:txBody>
-                    <a:bodyPr wrap="square"/>
-                    <a:lstStyle/>
-                    <a:p>
-                      <a:r>
-                        <a:rPr sz="1600" b="1">
-                          <a:solidFill>
-                            <a:srgbClr val="03306E"/>
-                          </a:solidFill>
-                          <a:latin typeface="Calibri"/>
-                        </a:rPr>
-                        <a:t>User-written</a:t>
-                      </a:r>
-                    </a:p>
-                  </a:txBody>
-                  <a:tcPr marL="91440" marR="91440" anchor="ctr">
-                    <a:solidFill>
-                      <a:srgbClr val="FFFFFF"/>
-                    </a:solidFill>
-                  </a:tcPr>
-                </a:tc>
-                <a:tc>
-                  <a:txBody>
-                    <a:bodyPr wrap="square"/>
-                    <a:lstStyle/>
-                    <a:p>
-                      <a:r>
-                        <a:rPr sz="1600" b="0">
-                          <a:solidFill>
-                            <a:srgbClr val="202122"/>
-                          </a:solidFill>
-                          <a:latin typeface="Calibri"/>
-                        </a:rPr>
-                        <a:t>def calculate_vat(price):</a:t>
-                      </a:r>
-                    </a:p>
-                  </a:txBody>
-                  <a:tcPr marL="91440" marR="91440" anchor="ctr">
-                    <a:solidFill>
-                      <a:srgbClr val="FFFFFF"/>
-                    </a:solidFill>
-                  </a:tcPr>
-                </a:tc>
-                <a:tc>
-                  <a:txBody>
-                    <a:bodyPr wrap="square"/>
-                    <a:lstStyle/>
-                    <a:p>
-                      <a:r>
-                        <a:rPr sz="1600" b="0">
-                          <a:solidFill>
-                            <a:srgbClr val="202122"/>
-                          </a:solidFill>
-                          <a:latin typeface="Calibri"/>
-                        </a:rPr>
-                        <a:t>Exactly what you need, but you must write and test it</a:t>
-                      </a:r>
-                    </a:p>
-                  </a:txBody>
-                  <a:tcPr marL="91440" marR="91440" anchor="ctr">
-                    <a:solidFill>
-                      <a:srgbClr val="FFFFFF"/>
-                    </a:solidFill>
-                  </a:tcPr>
-                </a:tc>
-              </a:tr>
-              <a:tr h="905256">
-                <a:tc>
-                  <a:txBody>
-                    <a:bodyPr wrap="square"/>
-                    <a:lstStyle/>
-                    <a:p>
-                      <a:r>
-                        <a:rPr sz="1600" b="1">
-                          <a:solidFill>
-                            <a:srgbClr val="03306E"/>
-                          </a:solidFill>
-                          <a:latin typeface="Calibri"/>
-                        </a:rPr>
-                        <a:t>Built into the language</a:t>
-                      </a:r>
-                    </a:p>
-                  </a:txBody>
-                  <a:tcPr marL="91440" marR="91440" anchor="ctr">
-                    <a:solidFill>
-                      <a:srgbClr val="EAF3FF"/>
-                    </a:solidFill>
-                  </a:tcPr>
-                </a:tc>
-                <a:tc>
-                  <a:txBody>
-                    <a:bodyPr wrap="square"/>
-                    <a:lstStyle/>
-                    <a:p>
-                      <a:r>
-                        <a:rPr sz="1600" b="0">
-                          <a:solidFill>
-                            <a:srgbClr val="202122"/>
-                          </a:solidFill>
-                          <a:latin typeface="Calibri"/>
-                        </a:rPr>
-                        <a:t>len(), round(), max()</a:t>
-                      </a:r>
-                    </a:p>
-                  </a:txBody>
-                  <a:tcPr marL="91440" marR="91440" anchor="ctr">
-                    <a:solidFill>
-                      <a:srgbClr val="EAF3FF"/>
-                    </a:solidFill>
-                  </a:tcPr>
-                </a:tc>
-                <a:tc>
-                  <a:txBody>
-                    <a:bodyPr wrap="square"/>
-                    <a:lstStyle/>
-                    <a:p>
-                      <a:r>
-                        <a:rPr sz="1600" b="0">
-                          <a:solidFill>
-                            <a:srgbClr val="202122"/>
-                          </a:solidFill>
-                          <a:latin typeface="Calibri"/>
-                        </a:rPr>
-                        <a:t>Reliable and fast, but general purpose</a:t>
-                      </a:r>
-                    </a:p>
-                  </a:txBody>
-                  <a:tcPr marL="91440" marR="91440" anchor="ctr">
-                    <a:solidFill>
-                      <a:srgbClr val="EAF3FF"/>
-                    </a:solidFill>
-                  </a:tcPr>
-                </a:tc>
-              </a:tr>
-              <a:tr h="905256">
-                <a:tc>
-                  <a:txBody>
-                    <a:bodyPr wrap="square"/>
-                    <a:lstStyle/>
-                    <a:p>
-                      <a:r>
-                        <a:rPr sz="1600" b="1">
-                          <a:solidFill>
-                            <a:srgbClr val="03306E"/>
-                          </a:solidFill>
-                          <a:latin typeface="Calibri"/>
-                        </a:rPr>
-                        <a:t>Language libraries</a:t>
-                      </a:r>
-                    </a:p>
-                  </a:txBody>
-                  <a:tcPr marL="91440" marR="91440" anchor="ctr">
-                    <a:solidFill>
-                      <a:srgbClr val="FFFFFF"/>
-                    </a:solidFill>
-                  </a:tcPr>
-                </a:tc>
-                <a:tc>
-                  <a:txBody>
-                    <a:bodyPr wrap="square"/>
-                    <a:lstStyle/>
-                    <a:p>
-                      <a:r>
-                        <a:rPr sz="1600" b="0">
-                          <a:solidFill>
-                            <a:srgbClr val="202122"/>
-                          </a:solidFill>
-                          <a:latin typeface="Calibri"/>
-                        </a:rPr>
-                        <a:t>math.sqrt(), random.randint()</a:t>
-                      </a:r>
-                    </a:p>
-                  </a:txBody>
-                  <a:tcPr marL="91440" marR="91440" anchor="ctr">
-                    <a:solidFill>
-                      <a:srgbClr val="FFFFFF"/>
-                    </a:solidFill>
-                  </a:tcPr>
-                </a:tc>
-                <a:tc>
-                  <a:txBody>
-                    <a:bodyPr wrap="square"/>
-                    <a:lstStyle/>
-                    <a:p>
-                      <a:r>
-                        <a:rPr sz="1600" b="0">
-                          <a:solidFill>
-                            <a:srgbClr val="202122"/>
-                          </a:solidFill>
-                          <a:latin typeface="Calibri"/>
-                        </a:rPr>
-                        <a:t>Tested and documented; needs an import</a:t>
-                      </a:r>
-                    </a:p>
-                  </a:txBody>
-                  <a:tcPr marL="91440" marR="91440" anchor="ctr">
-                    <a:solidFill>
-                      <a:srgbClr val="FFFFFF"/>
-                    </a:solidFill>
-                  </a:tcPr>
-                </a:tc>
-              </a:tr>
-              <a:tr h="905256">
-                <a:tc>
-                  <a:txBody>
-                    <a:bodyPr wrap="square"/>
-                    <a:lstStyle/>
-                    <a:p>
-                      <a:r>
-                        <a:rPr sz="1600" b="1">
-                          <a:solidFill>
-                            <a:srgbClr val="03306E"/>
-                          </a:solidFill>
-                          <a:latin typeface="Calibri"/>
-                        </a:rPr>
-                        <a:t>Third-party libraries</a:t>
-                      </a:r>
-                    </a:p>
-                  </a:txBody>
-                  <a:tcPr marL="91440" marR="91440" anchor="ctr">
-                    <a:solidFill>
-                      <a:srgbClr val="EAF3FF"/>
-                    </a:solidFill>
-                  </a:tcPr>
-                </a:tc>
-                <a:tc>
-                  <a:txBody>
-                    <a:bodyPr wrap="square"/>
-                    <a:lstStyle/>
-                    <a:p>
-                      <a:r>
-                        <a:rPr sz="1600" b="0">
-                          <a:solidFill>
-                            <a:srgbClr val="202122"/>
-                          </a:solidFill>
-                          <a:latin typeface="Calibri"/>
-                        </a:rPr>
-                        <a:t>pandas, Matplotlib</a:t>
-                      </a:r>
-                    </a:p>
-                  </a:txBody>
-                  <a:tcPr marL="91440" marR="91440" anchor="ctr">
-                    <a:solidFill>
-                      <a:srgbClr val="EAF3FF"/>
-                    </a:solidFill>
-                  </a:tcPr>
-                </a:tc>
-                <a:tc>
-                  <a:txBody>
-                    <a:bodyPr wrap="square"/>
-                    <a:lstStyle/>
-                    <a:p>
-                      <a:r>
-                        <a:rPr sz="1600" b="0">
-                          <a:solidFill>
-                            <a:srgbClr val="202122"/>
-                          </a:solidFill>
-                          <a:latin typeface="Calibri"/>
-                        </a:rPr>
-                        <a:t>Powerful, but adds dependencies and security risk</a:t>
-                      </a:r>
-                    </a:p>
-                  </a:txBody>
-                  <a:tcPr marL="91440" marR="91440" anchor="ctr">
-                    <a:solidFill>
-                      <a:srgbClr val="EAF3FF"/>
-                    </a:solidFill>
-                  </a:tcPr>
-                </a:tc>
-              </a:tr>
-            </a:tbl>
-          </a:graphicData>
-        </a:graphic>
-      </p:graphicFrame>
-    </p:spTree>
-  </p:cSld>
-  <p:clrMapOvr>
-    <a:masterClrMapping/>
-  </p:clrMapOvr>
-</p:sld>
-</file>
-
-<file path=ppt/slides/slide5.xml><?xml version="1.0" encoding="utf-8"?>
-<p:sld xmlns:a="http://schemas.openxmlformats.org/drawingml/2006/main" xmlns:p="http://schemas.openxmlformats.org/presentationml/2006/main" xmlns:r="http://schemas.openxmlformats.org/officeDocument/2006/relationships">
-  <p:cSld>
-    <p:bg>
-      <p:bgPr>
-        <a:solidFill>
-          <a:srgbClr val="FFFFFF"/>
-        </a:solidFill>
-        <a:effectLst/>
-      </p:bgPr>
-    </p:bg>
-    <p:spTree>
-      <p:nvGrpSpPr>
-        <p:cNvPr id="1" name=""/>
-        <p:cNvGrpSpPr/>
-        <p:nvPr/>
-      </p:nvGrpSpPr>
-      <p:grpSpPr/>
-      <p:sp>
-        <p:nvSpPr>
-          <p:cNvPr id="2" name="TextBox 1"/>
-          <p:cNvSpPr txBox="1"/>
-          <p:nvPr/>
-        </p:nvSpPr>
-        <p:spPr>
-          <a:xfrm>
-            <a:off x="548640" y="320040"/>
-            <a:ext cx="11094415" cy="274320"/>
-          </a:xfrm>
-          <a:prstGeom prst="rect">
-            <a:avLst/>
-          </a:prstGeom>
-          <a:noFill/>
-        </p:spPr>
-        <p:txBody>
-          <a:bodyPr wrap="square" anchor="t" lIns="0" rIns="0" tIns="0" bIns="0"/>
-          <a:lstStyle/>
-          <a:p>
-            <a:pPr algn="l"/>
-            <a:r>
-              <a:rPr sz="1100" b="1" i="0">
-                <a:solidFill>
-                  <a:srgbClr val="54595D"/>
-                </a:solidFill>
-                <a:latin typeface="Calibri"/>
-              </a:rPr>
-              <a:t>CORE COMPONENT  ·  Core Paper 1</a:t>
-            </a:r>
-          </a:p>
-        </p:txBody>
-      </p:sp>
-      <p:sp>
-        <p:nvSpPr>
-          <p:cNvPr id="3" name="TextBox 2"/>
-          <p:cNvSpPr txBox="1"/>
-          <p:nvPr/>
-        </p:nvSpPr>
-        <p:spPr>
-          <a:xfrm>
-            <a:off x="548640" y="566928"/>
-            <a:ext cx="11094415" cy="822960"/>
-          </a:xfrm>
-          <a:prstGeom prst="rect">
-            <a:avLst/>
-          </a:prstGeom>
-          <a:noFill/>
-        </p:spPr>
-        <p:txBody>
-          <a:bodyPr wrap="square" anchor="ctr" lIns="0" rIns="0" tIns="0" bIns="0"/>
-          <a:lstStyle/>
-          <a:p>
-            <a:pPr algn="l"/>
-            <a:r>
-              <a:rPr sz="3200" b="1" i="0">
-                <a:solidFill>
-                  <a:srgbClr val="03306E"/>
-                </a:solidFill>
-                <a:latin typeface="Cambria"/>
-              </a:rPr>
-              <a:t>Validation checks</a:t>
-            </a:r>
-          </a:p>
-        </p:txBody>
-      </p:sp>
-      <p:sp>
-        <p:nvSpPr>
-          <p:cNvPr id="4" name="TextBox 3"/>
-          <p:cNvSpPr txBox="1"/>
-          <p:nvPr/>
-        </p:nvSpPr>
-        <p:spPr>
-          <a:xfrm>
-            <a:off x="548640" y="6446520"/>
-            <a:ext cx="8229600" cy="274320"/>
-          </a:xfrm>
-          <a:prstGeom prst="rect">
-            <a:avLst/>
-          </a:prstGeom>
-          <a:noFill/>
-        </p:spPr>
-        <p:txBody>
-          <a:bodyPr wrap="square" anchor="t" lIns="0" rIns="0" tIns="0" bIns="0"/>
-          <a:lstStyle/>
-          <a:p>
-            <a:pPr algn="l"/>
-            <a:r>
-              <a:rPr sz="1000" b="0" i="0">
-                <a:solidFill>
-                  <a:srgbClr val="54595D"/>
-                </a:solidFill>
-                <a:latin typeface="Calibri"/>
-              </a:rPr>
-              <a:t>Digital Software Development T Level  ·  Functions, Procedures and Validation</a:t>
-            </a:r>
-          </a:p>
-        </p:txBody>
-      </p:sp>
-      <p:sp>
-        <p:nvSpPr>
-          <p:cNvPr id="5" name="TextBox 4"/>
-          <p:cNvSpPr txBox="1"/>
-          <p:nvPr/>
-        </p:nvSpPr>
-        <p:spPr>
-          <a:xfrm>
-            <a:off x="10728655" y="6446520"/>
-            <a:ext cx="914400" cy="274320"/>
-          </a:xfrm>
-          <a:prstGeom prst="rect">
-            <a:avLst/>
-          </a:prstGeom>
-          <a:noFill/>
-        </p:spPr>
-        <p:txBody>
-          <a:bodyPr wrap="square" anchor="t" lIns="0" rIns="0" tIns="0" bIns="0"/>
-          <a:lstStyle/>
-          <a:p>
-            <a:pPr algn="r"/>
-            <a:r>
-              <a:rPr sz="1000" b="0" i="0">
-                <a:solidFill>
-                  <a:srgbClr val="54595D"/>
-                </a:solidFill>
-                <a:latin typeface="Calibri"/>
-              </a:rPr>
-              <a:t>5</a:t>
+              <a:t>10</a:t>
             </a:r>
           </a:p>
         </p:txBody>
@@ -6310,6 +4897,4810 @@
 </p:sld>
 </file>
 
+<file path=ppt/slides/slide11.xml><?xml version="1.0" encoding="utf-8"?>
+<p:sld xmlns:a="http://schemas.openxmlformats.org/drawingml/2006/main" xmlns:p="http://schemas.openxmlformats.org/presentationml/2006/main" xmlns:r="http://schemas.openxmlformats.org/officeDocument/2006/relationships">
+  <p:cSld>
+    <p:bg>
+      <p:bgPr>
+        <a:solidFill>
+          <a:srgbClr val="FFFFFF"/>
+        </a:solidFill>
+        <a:effectLst/>
+      </p:bgPr>
+    </p:bg>
+    <p:spTree>
+      <p:nvGrpSpPr>
+        <p:cNvPr id="1" name=""/>
+        <p:cNvGrpSpPr/>
+        <p:nvPr/>
+      </p:nvGrpSpPr>
+      <p:grpSpPr/>
+      <p:sp>
+        <p:nvSpPr>
+          <p:cNvPr id="2" name="TextBox 1"/>
+          <p:cNvSpPr txBox="1"/>
+          <p:nvPr/>
+        </p:nvSpPr>
+        <p:spPr>
+          <a:xfrm>
+            <a:off x="548640" y="320040"/>
+            <a:ext cx="11094415" cy="274320"/>
+          </a:xfrm>
+          <a:prstGeom prst="rect">
+            <a:avLst/>
+          </a:prstGeom>
+          <a:noFill/>
+        </p:spPr>
+        <p:txBody>
+          <a:bodyPr wrap="square" anchor="t" lIns="0" rIns="0" tIns="0" bIns="0"/>
+          <a:lstStyle/>
+          <a:p>
+            <a:pPr algn="l"/>
+            <a:r>
+              <a:rPr sz="1100" b="1" i="0">
+                <a:solidFill>
+                  <a:srgbClr val="54595D"/>
+                </a:solidFill>
+                <a:latin typeface="Calibri"/>
+              </a:rPr>
+              <a:t>CORE COMPONENT  ·  Core Paper 1</a:t>
+            </a:r>
+          </a:p>
+        </p:txBody>
+      </p:sp>
+      <p:sp>
+        <p:nvSpPr>
+          <p:cNvPr id="3" name="TextBox 2"/>
+          <p:cNvSpPr txBox="1"/>
+          <p:nvPr/>
+        </p:nvSpPr>
+        <p:spPr>
+          <a:xfrm>
+            <a:off x="548640" y="566928"/>
+            <a:ext cx="11094415" cy="822960"/>
+          </a:xfrm>
+          <a:prstGeom prst="rect">
+            <a:avLst/>
+          </a:prstGeom>
+          <a:noFill/>
+        </p:spPr>
+        <p:txBody>
+          <a:bodyPr wrap="square" anchor="ctr" lIns="0" rIns="0" tIns="0" bIns="0"/>
+          <a:lstStyle/>
+          <a:p>
+            <a:pPr algn="l"/>
+            <a:r>
+              <a:rPr sz="3200" b="1" i="0">
+                <a:solidFill>
+                  <a:srgbClr val="03306E"/>
+                </a:solidFill>
+                <a:latin typeface="Cambria"/>
+              </a:rPr>
+              <a:t>Quick check: Validation checks</a:t>
+            </a:r>
+          </a:p>
+        </p:txBody>
+      </p:sp>
+      <p:sp>
+        <p:nvSpPr>
+          <p:cNvPr id="4" name="TextBox 3"/>
+          <p:cNvSpPr txBox="1"/>
+          <p:nvPr/>
+        </p:nvSpPr>
+        <p:spPr>
+          <a:xfrm>
+            <a:off x="548640" y="6446520"/>
+            <a:ext cx="8229600" cy="274320"/>
+          </a:xfrm>
+          <a:prstGeom prst="rect">
+            <a:avLst/>
+          </a:prstGeom>
+          <a:noFill/>
+        </p:spPr>
+        <p:txBody>
+          <a:bodyPr wrap="square" anchor="t" lIns="0" rIns="0" tIns="0" bIns="0"/>
+          <a:lstStyle/>
+          <a:p>
+            <a:pPr algn="l"/>
+            <a:r>
+              <a:rPr sz="1000" b="0" i="0">
+                <a:solidFill>
+                  <a:srgbClr val="54595D"/>
+                </a:solidFill>
+                <a:latin typeface="Calibri"/>
+              </a:rPr>
+              <a:t>Digital Software Development T Level  ·  Functions, Procedures and Validation</a:t>
+            </a:r>
+          </a:p>
+        </p:txBody>
+      </p:sp>
+      <p:sp>
+        <p:nvSpPr>
+          <p:cNvPr id="5" name="TextBox 4"/>
+          <p:cNvSpPr txBox="1"/>
+          <p:nvPr/>
+        </p:nvSpPr>
+        <p:spPr>
+          <a:xfrm>
+            <a:off x="10728655" y="6446520"/>
+            <a:ext cx="914400" cy="274320"/>
+          </a:xfrm>
+          <a:prstGeom prst="rect">
+            <a:avLst/>
+          </a:prstGeom>
+          <a:noFill/>
+        </p:spPr>
+        <p:txBody>
+          <a:bodyPr wrap="square" anchor="t" lIns="0" rIns="0" tIns="0" bIns="0"/>
+          <a:lstStyle/>
+          <a:p>
+            <a:pPr algn="r"/>
+            <a:r>
+              <a:rPr sz="1000" b="0" i="0">
+                <a:solidFill>
+                  <a:srgbClr val="54595D"/>
+                </a:solidFill>
+                <a:latin typeface="Calibri"/>
+              </a:rPr>
+              <a:t>11</a:t>
+            </a:r>
+          </a:p>
+        </p:txBody>
+      </p:sp>
+      <p:sp>
+        <p:nvSpPr>
+          <p:cNvPr id="6" name="Oval 5"/>
+          <p:cNvSpPr/>
+          <p:nvPr/>
+        </p:nvSpPr>
+        <p:spPr>
+          <a:xfrm>
+            <a:off x="548640" y="1691640"/>
+            <a:ext cx="502920" cy="502920"/>
+          </a:xfrm>
+          <a:prstGeom prst="ellipse">
+            <a:avLst/>
+          </a:prstGeom>
+          <a:solidFill>
+            <a:srgbClr val="F2B705"/>
+          </a:solidFill>
+          <a:ln>
+            <a:noFill/>
+          </a:ln>
+          <a:effectLst/>
+        </p:spPr>
+        <p:style>
+          <a:lnRef idx="1">
+            <a:schemeClr val="accent1"/>
+          </a:lnRef>
+          <a:fillRef idx="3">
+            <a:schemeClr val="accent1"/>
+          </a:fillRef>
+          <a:effectRef idx="2">
+            <a:schemeClr val="accent1"/>
+          </a:effectRef>
+          <a:fontRef idx="minor">
+            <a:schemeClr val="lt1"/>
+          </a:fontRef>
+        </p:style>
+        <p:txBody>
+          <a:bodyPr rtlCol="0" anchor="ctr" lIns="0" rIns="0" tIns="0" bIns="0"/>
+          <a:lstStyle/>
+          <a:p>
+            <a:pPr algn="ctr"/>
+            <a:r>
+              <a:rPr sz="1600" b="1">
+                <a:solidFill>
+                  <a:srgbClr val="202122"/>
+                </a:solidFill>
+                <a:latin typeface="Calibri"/>
+              </a:rPr>
+              <a:t>1</a:t>
+            </a:r>
+          </a:p>
+        </p:txBody>
+      </p:sp>
+      <p:sp>
+        <p:nvSpPr>
+          <p:cNvPr id="7" name="TextBox 6"/>
+          <p:cNvSpPr txBox="1"/>
+          <p:nvPr/>
+        </p:nvSpPr>
+        <p:spPr>
+          <a:xfrm>
+            <a:off x="1371600" y="1645920"/>
+            <a:ext cx="10271455" cy="1188720"/>
+          </a:xfrm>
+          <a:prstGeom prst="rect">
+            <a:avLst/>
+          </a:prstGeom>
+          <a:noFill/>
+        </p:spPr>
+        <p:txBody>
+          <a:bodyPr wrap="square" anchor="t" lIns="0" rIns="0" tIns="0" bIns="0"/>
+          <a:lstStyle/>
+          <a:p>
+            <a:pPr algn="l"/>
+            <a:r>
+              <a:rPr sz="2400" b="0" i="0">
+                <a:solidFill>
+                  <a:srgbClr val="202122"/>
+                </a:solidFill>
+                <a:latin typeface="Calibri"/>
+              </a:rPr>
+              <a:t>Write a range check for a mark from 0 to 100.</a:t>
+            </a:r>
+          </a:p>
+        </p:txBody>
+      </p:sp>
+      <p:sp>
+        <p:nvSpPr>
+          <p:cNvPr id="8" name="Oval 7"/>
+          <p:cNvSpPr/>
+          <p:nvPr/>
+        </p:nvSpPr>
+        <p:spPr>
+          <a:xfrm>
+            <a:off x="548640" y="3108960"/>
+            <a:ext cx="502920" cy="502920"/>
+          </a:xfrm>
+          <a:prstGeom prst="ellipse">
+            <a:avLst/>
+          </a:prstGeom>
+          <a:solidFill>
+            <a:srgbClr val="F2B705"/>
+          </a:solidFill>
+          <a:ln>
+            <a:noFill/>
+          </a:ln>
+          <a:effectLst/>
+        </p:spPr>
+        <p:style>
+          <a:lnRef idx="1">
+            <a:schemeClr val="accent1"/>
+          </a:lnRef>
+          <a:fillRef idx="3">
+            <a:schemeClr val="accent1"/>
+          </a:fillRef>
+          <a:effectRef idx="2">
+            <a:schemeClr val="accent1"/>
+          </a:effectRef>
+          <a:fontRef idx="minor">
+            <a:schemeClr val="lt1"/>
+          </a:fontRef>
+        </p:style>
+        <p:txBody>
+          <a:bodyPr rtlCol="0" anchor="ctr" lIns="0" rIns="0" tIns="0" bIns="0"/>
+          <a:lstStyle/>
+          <a:p>
+            <a:pPr algn="ctr"/>
+            <a:r>
+              <a:rPr sz="1600" b="1">
+                <a:solidFill>
+                  <a:srgbClr val="202122"/>
+                </a:solidFill>
+                <a:latin typeface="Calibri"/>
+              </a:rPr>
+              <a:t>2</a:t>
+            </a:r>
+          </a:p>
+        </p:txBody>
+      </p:sp>
+      <p:sp>
+        <p:nvSpPr>
+          <p:cNvPr id="9" name="TextBox 8"/>
+          <p:cNvSpPr txBox="1"/>
+          <p:nvPr/>
+        </p:nvSpPr>
+        <p:spPr>
+          <a:xfrm>
+            <a:off x="1371600" y="3063240"/>
+            <a:ext cx="10271455" cy="1188720"/>
+          </a:xfrm>
+          <a:prstGeom prst="rect">
+            <a:avLst/>
+          </a:prstGeom>
+          <a:noFill/>
+        </p:spPr>
+        <p:txBody>
+          <a:bodyPr wrap="square" anchor="t" lIns="0" rIns="0" tIns="0" bIns="0"/>
+          <a:lstStyle/>
+          <a:p>
+            <a:pPr algn="l"/>
+            <a:r>
+              <a:rPr sz="2400" b="0" i="0">
+                <a:solidFill>
+                  <a:srgbClr val="202122"/>
+                </a:solidFill>
+                <a:latin typeface="Calibri"/>
+              </a:rPr>
+              <a:t>What does a check digit protect against?</a:t>
+            </a:r>
+          </a:p>
+        </p:txBody>
+      </p:sp>
+      <p:sp>
+        <p:nvSpPr>
+          <p:cNvPr id="10" name="Oval 9"/>
+          <p:cNvSpPr/>
+          <p:nvPr/>
+        </p:nvSpPr>
+        <p:spPr>
+          <a:xfrm>
+            <a:off x="548640" y="4526280"/>
+            <a:ext cx="502920" cy="502920"/>
+          </a:xfrm>
+          <a:prstGeom prst="ellipse">
+            <a:avLst/>
+          </a:prstGeom>
+          <a:solidFill>
+            <a:srgbClr val="F2B705"/>
+          </a:solidFill>
+          <a:ln>
+            <a:noFill/>
+          </a:ln>
+          <a:effectLst/>
+        </p:spPr>
+        <p:style>
+          <a:lnRef idx="1">
+            <a:schemeClr val="accent1"/>
+          </a:lnRef>
+          <a:fillRef idx="3">
+            <a:schemeClr val="accent1"/>
+          </a:fillRef>
+          <a:effectRef idx="2">
+            <a:schemeClr val="accent1"/>
+          </a:effectRef>
+          <a:fontRef idx="minor">
+            <a:schemeClr val="lt1"/>
+          </a:fontRef>
+        </p:style>
+        <p:txBody>
+          <a:bodyPr rtlCol="0" anchor="ctr" lIns="0" rIns="0" tIns="0" bIns="0"/>
+          <a:lstStyle/>
+          <a:p>
+            <a:pPr algn="ctr"/>
+            <a:r>
+              <a:rPr sz="1600" b="1">
+                <a:solidFill>
+                  <a:srgbClr val="202122"/>
+                </a:solidFill>
+                <a:latin typeface="Calibri"/>
+              </a:rPr>
+              <a:t>3</a:t>
+            </a:r>
+          </a:p>
+        </p:txBody>
+      </p:sp>
+      <p:sp>
+        <p:nvSpPr>
+          <p:cNvPr id="11" name="TextBox 10"/>
+          <p:cNvSpPr txBox="1"/>
+          <p:nvPr/>
+        </p:nvSpPr>
+        <p:spPr>
+          <a:xfrm>
+            <a:off x="1371600" y="4480560"/>
+            <a:ext cx="10271455" cy="1188720"/>
+          </a:xfrm>
+          <a:prstGeom prst="rect">
+            <a:avLst/>
+          </a:prstGeom>
+          <a:noFill/>
+        </p:spPr>
+        <p:txBody>
+          <a:bodyPr wrap="square" anchor="t" lIns="0" rIns="0" tIns="0" bIns="0"/>
+          <a:lstStyle/>
+          <a:p>
+            <a:pPr algn="l"/>
+            <a:r>
+              <a:rPr sz="2400" b="0" i="0">
+                <a:solidFill>
+                  <a:srgbClr val="202122"/>
+                </a:solidFill>
+                <a:latin typeface="Calibri"/>
+              </a:rPr>
+              <a:t>Can validation prove data is correct?</a:t>
+            </a:r>
+          </a:p>
+        </p:txBody>
+      </p:sp>
+      <p:sp>
+        <p:nvSpPr>
+          <p:cNvPr id="12" name="TextBox 11"/>
+          <p:cNvSpPr txBox="1"/>
+          <p:nvPr/>
+        </p:nvSpPr>
+        <p:spPr>
+          <a:xfrm>
+            <a:off x="548640" y="5852160"/>
+            <a:ext cx="11094415" cy="365760"/>
+          </a:xfrm>
+          <a:prstGeom prst="rect">
+            <a:avLst/>
+          </a:prstGeom>
+          <a:noFill/>
+        </p:spPr>
+        <p:txBody>
+          <a:bodyPr wrap="square" anchor="t" lIns="0" rIns="0" tIns="0" bIns="0"/>
+          <a:lstStyle/>
+          <a:p>
+            <a:pPr algn="l"/>
+            <a:r>
+              <a:rPr sz="1300" b="0" i="1">
+                <a:solidFill>
+                  <a:srgbClr val="54595D"/>
+                </a:solidFill>
+                <a:latin typeface="Calibri"/>
+              </a:rPr>
+              <a:t>Answer on mini whiteboards or in your book. Answers are in the speaker notes.</a:t>
+            </a:r>
+          </a:p>
+        </p:txBody>
+      </p:sp>
+    </p:spTree>
+  </p:cSld>
+  <p:clrMapOvr>
+    <a:masterClrMapping/>
+  </p:clrMapOvr>
+</p:sld>
+</file>
+
+<file path=ppt/slides/slide12.xml><?xml version="1.0" encoding="utf-8"?>
+<p:sld xmlns:a="http://schemas.openxmlformats.org/drawingml/2006/main" xmlns:p="http://schemas.openxmlformats.org/presentationml/2006/main" xmlns:r="http://schemas.openxmlformats.org/officeDocument/2006/relationships">
+  <p:cSld>
+    <p:bg>
+      <p:bgPr>
+        <a:solidFill>
+          <a:srgbClr val="FFFFFF"/>
+        </a:solidFill>
+        <a:effectLst/>
+      </p:bgPr>
+    </p:bg>
+    <p:spTree>
+      <p:nvGrpSpPr>
+        <p:cNvPr id="1" name=""/>
+        <p:cNvGrpSpPr/>
+        <p:nvPr/>
+      </p:nvGrpSpPr>
+      <p:grpSpPr/>
+      <p:sp>
+        <p:nvSpPr>
+          <p:cNvPr id="2" name="TextBox 1"/>
+          <p:cNvSpPr txBox="1"/>
+          <p:nvPr/>
+        </p:nvSpPr>
+        <p:spPr>
+          <a:xfrm>
+            <a:off x="548640" y="320040"/>
+            <a:ext cx="11094415" cy="274320"/>
+          </a:xfrm>
+          <a:prstGeom prst="rect">
+            <a:avLst/>
+          </a:prstGeom>
+          <a:noFill/>
+        </p:spPr>
+        <p:txBody>
+          <a:bodyPr wrap="square" anchor="t" lIns="0" rIns="0" tIns="0" bIns="0"/>
+          <a:lstStyle/>
+          <a:p>
+            <a:pPr algn="l"/>
+            <a:r>
+              <a:rPr sz="1100" b="1" i="0">
+                <a:solidFill>
+                  <a:srgbClr val="54595D"/>
+                </a:solidFill>
+                <a:latin typeface="Calibri"/>
+              </a:rPr>
+              <a:t>CORE COMPONENT  ·  Core Paper 1</a:t>
+            </a:r>
+          </a:p>
+        </p:txBody>
+      </p:sp>
+      <p:sp>
+        <p:nvSpPr>
+          <p:cNvPr id="3" name="TextBox 2"/>
+          <p:cNvSpPr txBox="1"/>
+          <p:nvPr/>
+        </p:nvSpPr>
+        <p:spPr>
+          <a:xfrm>
+            <a:off x="548640" y="566928"/>
+            <a:ext cx="11094415" cy="822960"/>
+          </a:xfrm>
+          <a:prstGeom prst="rect">
+            <a:avLst/>
+          </a:prstGeom>
+          <a:noFill/>
+        </p:spPr>
+        <p:txBody>
+          <a:bodyPr wrap="square" anchor="ctr" lIns="0" rIns="0" tIns="0" bIns="0"/>
+          <a:lstStyle/>
+          <a:p>
+            <a:pPr algn="l"/>
+            <a:r>
+              <a:rPr sz="3200" b="1" i="0">
+                <a:solidFill>
+                  <a:srgbClr val="03306E"/>
+                </a:solidFill>
+                <a:latin typeface="Cambria"/>
+              </a:rPr>
+              <a:t>Check your understanding</a:t>
+            </a:r>
+          </a:p>
+        </p:txBody>
+      </p:sp>
+      <p:sp>
+        <p:nvSpPr>
+          <p:cNvPr id="4" name="TextBox 3"/>
+          <p:cNvSpPr txBox="1"/>
+          <p:nvPr/>
+        </p:nvSpPr>
+        <p:spPr>
+          <a:xfrm>
+            <a:off x="548640" y="6446520"/>
+            <a:ext cx="8229600" cy="274320"/>
+          </a:xfrm>
+          <a:prstGeom prst="rect">
+            <a:avLst/>
+          </a:prstGeom>
+          <a:noFill/>
+        </p:spPr>
+        <p:txBody>
+          <a:bodyPr wrap="square" anchor="t" lIns="0" rIns="0" tIns="0" bIns="0"/>
+          <a:lstStyle/>
+          <a:p>
+            <a:pPr algn="l"/>
+            <a:r>
+              <a:rPr sz="1000" b="0" i="0">
+                <a:solidFill>
+                  <a:srgbClr val="54595D"/>
+                </a:solidFill>
+                <a:latin typeface="Calibri"/>
+              </a:rPr>
+              <a:t>Digital Software Development T Level  ·  Functions, Procedures and Validation</a:t>
+            </a:r>
+          </a:p>
+        </p:txBody>
+      </p:sp>
+      <p:sp>
+        <p:nvSpPr>
+          <p:cNvPr id="5" name="TextBox 4"/>
+          <p:cNvSpPr txBox="1"/>
+          <p:nvPr/>
+        </p:nvSpPr>
+        <p:spPr>
+          <a:xfrm>
+            <a:off x="10728655" y="6446520"/>
+            <a:ext cx="914400" cy="274320"/>
+          </a:xfrm>
+          <a:prstGeom prst="rect">
+            <a:avLst/>
+          </a:prstGeom>
+          <a:noFill/>
+        </p:spPr>
+        <p:txBody>
+          <a:bodyPr wrap="square" anchor="t" lIns="0" rIns="0" tIns="0" bIns="0"/>
+          <a:lstStyle/>
+          <a:p>
+            <a:pPr algn="r"/>
+            <a:r>
+              <a:rPr sz="1000" b="0" i="0">
+                <a:solidFill>
+                  <a:srgbClr val="54595D"/>
+                </a:solidFill>
+                <a:latin typeface="Calibri"/>
+              </a:rPr>
+              <a:t>12</a:t>
+            </a:r>
+          </a:p>
+        </p:txBody>
+      </p:sp>
+      <p:sp>
+        <p:nvSpPr>
+          <p:cNvPr id="6" name="Oval 5"/>
+          <p:cNvSpPr/>
+          <p:nvPr/>
+        </p:nvSpPr>
+        <p:spPr>
+          <a:xfrm>
+            <a:off x="548640" y="1618488"/>
+            <a:ext cx="411480" cy="411480"/>
+          </a:xfrm>
+          <a:prstGeom prst="ellipse">
+            <a:avLst/>
+          </a:prstGeom>
+          <a:solidFill>
+            <a:srgbClr val="F2B705"/>
+          </a:solidFill>
+          <a:ln>
+            <a:noFill/>
+          </a:ln>
+          <a:effectLst/>
+        </p:spPr>
+        <p:style>
+          <a:lnRef idx="1">
+            <a:schemeClr val="accent1"/>
+          </a:lnRef>
+          <a:fillRef idx="3">
+            <a:schemeClr val="accent1"/>
+          </a:fillRef>
+          <a:effectRef idx="2">
+            <a:schemeClr val="accent1"/>
+          </a:effectRef>
+          <a:fontRef idx="minor">
+            <a:schemeClr val="lt1"/>
+          </a:fontRef>
+        </p:style>
+        <p:txBody>
+          <a:bodyPr rtlCol="0" anchor="ctr" lIns="0" rIns="0" tIns="0" bIns="0"/>
+          <a:lstStyle/>
+          <a:p>
+            <a:pPr algn="ctr"/>
+            <a:r>
+              <a:rPr sz="1400" b="1">
+                <a:solidFill>
+                  <a:srgbClr val="202122"/>
+                </a:solidFill>
+                <a:latin typeface="Calibri"/>
+              </a:rPr>
+              <a:t>1</a:t>
+            </a:r>
+          </a:p>
+        </p:txBody>
+      </p:sp>
+      <p:sp>
+        <p:nvSpPr>
+          <p:cNvPr id="7" name="TextBox 6"/>
+          <p:cNvSpPr txBox="1"/>
+          <p:nvPr/>
+        </p:nvSpPr>
+        <p:spPr>
+          <a:xfrm>
+            <a:off x="1234440" y="1600200"/>
+            <a:ext cx="10408615" cy="1030986"/>
+          </a:xfrm>
+          <a:prstGeom prst="rect">
+            <a:avLst/>
+          </a:prstGeom>
+          <a:noFill/>
+        </p:spPr>
+        <p:txBody>
+          <a:bodyPr wrap="square" anchor="t" lIns="0" rIns="0" tIns="0" bIns="0"/>
+          <a:lstStyle/>
+          <a:p>
+            <a:pPr algn="l"/>
+            <a:r>
+              <a:rPr sz="2200" b="0" i="0">
+                <a:solidFill>
+                  <a:srgbClr val="202122"/>
+                </a:solidFill>
+                <a:latin typeface="Calibri"/>
+              </a:rPr>
+              <a:t>What must a function do that a procedure does not?</a:t>
+            </a:r>
+          </a:p>
+        </p:txBody>
+      </p:sp>
+      <p:sp>
+        <p:nvSpPr>
+          <p:cNvPr id="8" name="Oval 7"/>
+          <p:cNvSpPr/>
+          <p:nvPr/>
+        </p:nvSpPr>
+        <p:spPr>
+          <a:xfrm>
+            <a:off x="548640" y="2814066"/>
+            <a:ext cx="411480" cy="411480"/>
+          </a:xfrm>
+          <a:prstGeom prst="ellipse">
+            <a:avLst/>
+          </a:prstGeom>
+          <a:solidFill>
+            <a:srgbClr val="F2B705"/>
+          </a:solidFill>
+          <a:ln>
+            <a:noFill/>
+          </a:ln>
+          <a:effectLst/>
+        </p:spPr>
+        <p:style>
+          <a:lnRef idx="1">
+            <a:schemeClr val="accent1"/>
+          </a:lnRef>
+          <a:fillRef idx="3">
+            <a:schemeClr val="accent1"/>
+          </a:fillRef>
+          <a:effectRef idx="2">
+            <a:schemeClr val="accent1"/>
+          </a:effectRef>
+          <a:fontRef idx="minor">
+            <a:schemeClr val="lt1"/>
+          </a:fontRef>
+        </p:style>
+        <p:txBody>
+          <a:bodyPr rtlCol="0" anchor="ctr" lIns="0" rIns="0" tIns="0" bIns="0"/>
+          <a:lstStyle/>
+          <a:p>
+            <a:pPr algn="ctr"/>
+            <a:r>
+              <a:rPr sz="1400" b="1">
+                <a:solidFill>
+                  <a:srgbClr val="202122"/>
+                </a:solidFill>
+                <a:latin typeface="Calibri"/>
+              </a:rPr>
+              <a:t>2</a:t>
+            </a:r>
+          </a:p>
+        </p:txBody>
+      </p:sp>
+      <p:sp>
+        <p:nvSpPr>
+          <p:cNvPr id="9" name="TextBox 8"/>
+          <p:cNvSpPr txBox="1"/>
+          <p:nvPr/>
+        </p:nvSpPr>
+        <p:spPr>
+          <a:xfrm>
+            <a:off x="1234440" y="2795778"/>
+            <a:ext cx="10408615" cy="1030986"/>
+          </a:xfrm>
+          <a:prstGeom prst="rect">
+            <a:avLst/>
+          </a:prstGeom>
+          <a:noFill/>
+        </p:spPr>
+        <p:txBody>
+          <a:bodyPr wrap="square" anchor="t" lIns="0" rIns="0" tIns="0" bIns="0"/>
+          <a:lstStyle/>
+          <a:p>
+            <a:pPr algn="l"/>
+            <a:r>
+              <a:rPr sz="2200" b="0" i="0">
+                <a:solidFill>
+                  <a:srgbClr val="202122"/>
+                </a:solidFill>
+                <a:latin typeface="Calibri"/>
+              </a:rPr>
+              <a:t>Give one drawback of third-party libraries.</a:t>
+            </a:r>
+          </a:p>
+        </p:txBody>
+      </p:sp>
+      <p:sp>
+        <p:nvSpPr>
+          <p:cNvPr id="10" name="Oval 9"/>
+          <p:cNvSpPr/>
+          <p:nvPr/>
+        </p:nvSpPr>
+        <p:spPr>
+          <a:xfrm>
+            <a:off x="548640" y="4009644"/>
+            <a:ext cx="411480" cy="411480"/>
+          </a:xfrm>
+          <a:prstGeom prst="ellipse">
+            <a:avLst/>
+          </a:prstGeom>
+          <a:solidFill>
+            <a:srgbClr val="F2B705"/>
+          </a:solidFill>
+          <a:ln>
+            <a:noFill/>
+          </a:ln>
+          <a:effectLst/>
+        </p:spPr>
+        <p:style>
+          <a:lnRef idx="1">
+            <a:schemeClr val="accent1"/>
+          </a:lnRef>
+          <a:fillRef idx="3">
+            <a:schemeClr val="accent1"/>
+          </a:fillRef>
+          <a:effectRef idx="2">
+            <a:schemeClr val="accent1"/>
+          </a:effectRef>
+          <a:fontRef idx="minor">
+            <a:schemeClr val="lt1"/>
+          </a:fontRef>
+        </p:style>
+        <p:txBody>
+          <a:bodyPr rtlCol="0" anchor="ctr" lIns="0" rIns="0" tIns="0" bIns="0"/>
+          <a:lstStyle/>
+          <a:p>
+            <a:pPr algn="ctr"/>
+            <a:r>
+              <a:rPr sz="1400" b="1">
+                <a:solidFill>
+                  <a:srgbClr val="202122"/>
+                </a:solidFill>
+                <a:latin typeface="Calibri"/>
+              </a:rPr>
+              <a:t>3</a:t>
+            </a:r>
+          </a:p>
+        </p:txBody>
+      </p:sp>
+      <p:sp>
+        <p:nvSpPr>
+          <p:cNvPr id="11" name="TextBox 10"/>
+          <p:cNvSpPr txBox="1"/>
+          <p:nvPr/>
+        </p:nvSpPr>
+        <p:spPr>
+          <a:xfrm>
+            <a:off x="1234440" y="3991356"/>
+            <a:ext cx="10408615" cy="1030986"/>
+          </a:xfrm>
+          <a:prstGeom prst="rect">
+            <a:avLst/>
+          </a:prstGeom>
+          <a:noFill/>
+        </p:spPr>
+        <p:txBody>
+          <a:bodyPr wrap="square" anchor="t" lIns="0" rIns="0" tIns="0" bIns="0"/>
+          <a:lstStyle/>
+          <a:p>
+            <a:pPr algn="l"/>
+            <a:r>
+              <a:rPr sz="2200" b="0" i="0">
+                <a:solidFill>
+                  <a:srgbClr val="202122"/>
+                </a:solidFill>
+                <a:latin typeface="Calibri"/>
+              </a:rPr>
+              <a:t>Which check makes sure a field is not blank?</a:t>
+            </a:r>
+          </a:p>
+        </p:txBody>
+      </p:sp>
+      <p:sp>
+        <p:nvSpPr>
+          <p:cNvPr id="12" name="Oval 11"/>
+          <p:cNvSpPr/>
+          <p:nvPr/>
+        </p:nvSpPr>
+        <p:spPr>
+          <a:xfrm>
+            <a:off x="548640" y="5205221"/>
+            <a:ext cx="411480" cy="411480"/>
+          </a:xfrm>
+          <a:prstGeom prst="ellipse">
+            <a:avLst/>
+          </a:prstGeom>
+          <a:solidFill>
+            <a:srgbClr val="F2B705"/>
+          </a:solidFill>
+          <a:ln>
+            <a:noFill/>
+          </a:ln>
+          <a:effectLst/>
+        </p:spPr>
+        <p:style>
+          <a:lnRef idx="1">
+            <a:schemeClr val="accent1"/>
+          </a:lnRef>
+          <a:fillRef idx="3">
+            <a:schemeClr val="accent1"/>
+          </a:fillRef>
+          <a:effectRef idx="2">
+            <a:schemeClr val="accent1"/>
+          </a:effectRef>
+          <a:fontRef idx="minor">
+            <a:schemeClr val="lt1"/>
+          </a:fontRef>
+        </p:style>
+        <p:txBody>
+          <a:bodyPr rtlCol="0" anchor="ctr" lIns="0" rIns="0" tIns="0" bIns="0"/>
+          <a:lstStyle/>
+          <a:p>
+            <a:pPr algn="ctr"/>
+            <a:r>
+              <a:rPr sz="1400" b="1">
+                <a:solidFill>
+                  <a:srgbClr val="202122"/>
+                </a:solidFill>
+                <a:latin typeface="Calibri"/>
+              </a:rPr>
+              <a:t>4</a:t>
+            </a:r>
+          </a:p>
+        </p:txBody>
+      </p:sp>
+      <p:sp>
+        <p:nvSpPr>
+          <p:cNvPr id="13" name="TextBox 12"/>
+          <p:cNvSpPr txBox="1"/>
+          <p:nvPr/>
+        </p:nvSpPr>
+        <p:spPr>
+          <a:xfrm>
+            <a:off x="1234440" y="5186933"/>
+            <a:ext cx="10408615" cy="1030986"/>
+          </a:xfrm>
+          <a:prstGeom prst="rect">
+            <a:avLst/>
+          </a:prstGeom>
+          <a:noFill/>
+        </p:spPr>
+        <p:txBody>
+          <a:bodyPr wrap="square" anchor="t" lIns="0" rIns="0" tIns="0" bIns="0"/>
+          <a:lstStyle/>
+          <a:p>
+            <a:pPr algn="l"/>
+            <a:r>
+              <a:rPr sz="2200" b="0" i="0">
+                <a:solidFill>
+                  <a:srgbClr val="202122"/>
+                </a:solidFill>
+                <a:latin typeface="Calibri"/>
+              </a:rPr>
+              <a:t>Write a range check for an age between 11 and 18.</a:t>
+            </a:r>
+          </a:p>
+        </p:txBody>
+      </p:sp>
+    </p:spTree>
+  </p:cSld>
+  <p:clrMapOvr>
+    <a:masterClrMapping/>
+  </p:clrMapOvr>
+</p:sld>
+</file>
+
+<file path=ppt/slides/slide13.xml><?xml version="1.0" encoding="utf-8"?>
+<p:sld xmlns:a="http://schemas.openxmlformats.org/drawingml/2006/main" xmlns:p="http://schemas.openxmlformats.org/presentationml/2006/main" xmlns:r="http://schemas.openxmlformats.org/officeDocument/2006/relationships">
+  <p:cSld>
+    <p:bg>
+      <p:bgPr>
+        <a:solidFill>
+          <a:srgbClr val="FFFFFF"/>
+        </a:solidFill>
+        <a:effectLst/>
+      </p:bgPr>
+    </p:bg>
+    <p:spTree>
+      <p:nvGrpSpPr>
+        <p:cNvPr id="1" name=""/>
+        <p:cNvGrpSpPr/>
+        <p:nvPr/>
+      </p:nvGrpSpPr>
+      <p:grpSpPr/>
+      <p:sp>
+        <p:nvSpPr>
+          <p:cNvPr id="2" name="TextBox 1"/>
+          <p:cNvSpPr txBox="1"/>
+          <p:nvPr/>
+        </p:nvSpPr>
+        <p:spPr>
+          <a:xfrm>
+            <a:off x="548640" y="320040"/>
+            <a:ext cx="11094415" cy="274320"/>
+          </a:xfrm>
+          <a:prstGeom prst="rect">
+            <a:avLst/>
+          </a:prstGeom>
+          <a:noFill/>
+        </p:spPr>
+        <p:txBody>
+          <a:bodyPr wrap="square" anchor="t" lIns="0" rIns="0" tIns="0" bIns="0"/>
+          <a:lstStyle/>
+          <a:p>
+            <a:pPr algn="l"/>
+            <a:r>
+              <a:rPr sz="1100" b="1" i="0">
+                <a:solidFill>
+                  <a:srgbClr val="54595D"/>
+                </a:solidFill>
+                <a:latin typeface="Calibri"/>
+              </a:rPr>
+              <a:t>CORE COMPONENT  ·  Core Paper 1</a:t>
+            </a:r>
+          </a:p>
+        </p:txBody>
+      </p:sp>
+      <p:sp>
+        <p:nvSpPr>
+          <p:cNvPr id="3" name="TextBox 2"/>
+          <p:cNvSpPr txBox="1"/>
+          <p:nvPr/>
+        </p:nvSpPr>
+        <p:spPr>
+          <a:xfrm>
+            <a:off x="548640" y="566928"/>
+            <a:ext cx="11094415" cy="822960"/>
+          </a:xfrm>
+          <a:prstGeom prst="rect">
+            <a:avLst/>
+          </a:prstGeom>
+          <a:noFill/>
+        </p:spPr>
+        <p:txBody>
+          <a:bodyPr wrap="square" anchor="ctr" lIns="0" rIns="0" tIns="0" bIns="0"/>
+          <a:lstStyle/>
+          <a:p>
+            <a:pPr algn="l"/>
+            <a:r>
+              <a:rPr sz="3200" b="1" i="0">
+                <a:solidFill>
+                  <a:srgbClr val="03306E"/>
+                </a:solidFill>
+                <a:latin typeface="Cambria"/>
+              </a:rPr>
+              <a:t>Answers</a:t>
+            </a:r>
+          </a:p>
+        </p:txBody>
+      </p:sp>
+      <p:sp>
+        <p:nvSpPr>
+          <p:cNvPr id="4" name="TextBox 3"/>
+          <p:cNvSpPr txBox="1"/>
+          <p:nvPr/>
+        </p:nvSpPr>
+        <p:spPr>
+          <a:xfrm>
+            <a:off x="548640" y="6446520"/>
+            <a:ext cx="8229600" cy="274320"/>
+          </a:xfrm>
+          <a:prstGeom prst="rect">
+            <a:avLst/>
+          </a:prstGeom>
+          <a:noFill/>
+        </p:spPr>
+        <p:txBody>
+          <a:bodyPr wrap="square" anchor="t" lIns="0" rIns="0" tIns="0" bIns="0"/>
+          <a:lstStyle/>
+          <a:p>
+            <a:pPr algn="l"/>
+            <a:r>
+              <a:rPr sz="1000" b="0" i="0">
+                <a:solidFill>
+                  <a:srgbClr val="54595D"/>
+                </a:solidFill>
+                <a:latin typeface="Calibri"/>
+              </a:rPr>
+              <a:t>Digital Software Development T Level  ·  Functions, Procedures and Validation</a:t>
+            </a:r>
+          </a:p>
+        </p:txBody>
+      </p:sp>
+      <p:sp>
+        <p:nvSpPr>
+          <p:cNvPr id="5" name="TextBox 4"/>
+          <p:cNvSpPr txBox="1"/>
+          <p:nvPr/>
+        </p:nvSpPr>
+        <p:spPr>
+          <a:xfrm>
+            <a:off x="10728655" y="6446520"/>
+            <a:ext cx="914400" cy="274320"/>
+          </a:xfrm>
+          <a:prstGeom prst="rect">
+            <a:avLst/>
+          </a:prstGeom>
+          <a:noFill/>
+        </p:spPr>
+        <p:txBody>
+          <a:bodyPr wrap="square" anchor="t" lIns="0" rIns="0" tIns="0" bIns="0"/>
+          <a:lstStyle/>
+          <a:p>
+            <a:pPr algn="r"/>
+            <a:r>
+              <a:rPr sz="1000" b="0" i="0">
+                <a:solidFill>
+                  <a:srgbClr val="54595D"/>
+                </a:solidFill>
+                <a:latin typeface="Calibri"/>
+              </a:rPr>
+              <a:t>13</a:t>
+            </a:r>
+          </a:p>
+        </p:txBody>
+      </p:sp>
+      <p:sp>
+        <p:nvSpPr>
+          <p:cNvPr id="6" name="Oval 5"/>
+          <p:cNvSpPr/>
+          <p:nvPr/>
+        </p:nvSpPr>
+        <p:spPr>
+          <a:xfrm>
+            <a:off x="548640" y="1618488"/>
+            <a:ext cx="411480" cy="411480"/>
+          </a:xfrm>
+          <a:prstGeom prst="ellipse">
+            <a:avLst/>
+          </a:prstGeom>
+          <a:solidFill>
+            <a:srgbClr val="F2B705"/>
+          </a:solidFill>
+          <a:ln>
+            <a:noFill/>
+          </a:ln>
+          <a:effectLst/>
+        </p:spPr>
+        <p:style>
+          <a:lnRef idx="1">
+            <a:schemeClr val="accent1"/>
+          </a:lnRef>
+          <a:fillRef idx="3">
+            <a:schemeClr val="accent1"/>
+          </a:fillRef>
+          <a:effectRef idx="2">
+            <a:schemeClr val="accent1"/>
+          </a:effectRef>
+          <a:fontRef idx="minor">
+            <a:schemeClr val="lt1"/>
+          </a:fontRef>
+        </p:style>
+        <p:txBody>
+          <a:bodyPr rtlCol="0" anchor="ctr" lIns="0" rIns="0" tIns="0" bIns="0"/>
+          <a:lstStyle/>
+          <a:p>
+            <a:pPr algn="ctr"/>
+            <a:r>
+              <a:rPr sz="1400" b="1">
+                <a:solidFill>
+                  <a:srgbClr val="202122"/>
+                </a:solidFill>
+                <a:latin typeface="Calibri"/>
+              </a:rPr>
+              <a:t>1</a:t>
+            </a:r>
+          </a:p>
+        </p:txBody>
+      </p:sp>
+      <p:sp>
+        <p:nvSpPr>
+          <p:cNvPr id="7" name="TextBox 6"/>
+          <p:cNvSpPr txBox="1"/>
+          <p:nvPr/>
+        </p:nvSpPr>
+        <p:spPr>
+          <a:xfrm>
+            <a:off x="1234440" y="1600200"/>
+            <a:ext cx="10408615" cy="1030986"/>
+          </a:xfrm>
+          <a:prstGeom prst="rect">
+            <a:avLst/>
+          </a:prstGeom>
+          <a:noFill/>
+        </p:spPr>
+        <p:txBody>
+          <a:bodyPr wrap="square" anchor="t" lIns="0" rIns="0" tIns="0" bIns="0"/>
+          <a:lstStyle/>
+          <a:p>
+            <a:pPr algn="l"/>
+            <a:r>
+              <a:rPr sz="1800" b="0" i="0">
+                <a:solidFill>
+                  <a:srgbClr val="54595D"/>
+                </a:solidFill>
+                <a:latin typeface="Calibri"/>
+              </a:rPr>
+              <a:t>What must a function do that a procedure does not?</a:t>
+            </a:r>
+          </a:p>
+          <a:p>
+            <a:r>
+              <a:rPr sz="1800" b="1">
+                <a:solidFill>
+                  <a:srgbClr val="03306E"/>
+                </a:solidFill>
+                <a:latin typeface="Calibri"/>
+              </a:rPr>
+              <a:t>Return a result.</a:t>
+            </a:r>
+          </a:p>
+        </p:txBody>
+      </p:sp>
+      <p:sp>
+        <p:nvSpPr>
+          <p:cNvPr id="8" name="Oval 7"/>
+          <p:cNvSpPr/>
+          <p:nvPr/>
+        </p:nvSpPr>
+        <p:spPr>
+          <a:xfrm>
+            <a:off x="548640" y="2814066"/>
+            <a:ext cx="411480" cy="411480"/>
+          </a:xfrm>
+          <a:prstGeom prst="ellipse">
+            <a:avLst/>
+          </a:prstGeom>
+          <a:solidFill>
+            <a:srgbClr val="F2B705"/>
+          </a:solidFill>
+          <a:ln>
+            <a:noFill/>
+          </a:ln>
+          <a:effectLst/>
+        </p:spPr>
+        <p:style>
+          <a:lnRef idx="1">
+            <a:schemeClr val="accent1"/>
+          </a:lnRef>
+          <a:fillRef idx="3">
+            <a:schemeClr val="accent1"/>
+          </a:fillRef>
+          <a:effectRef idx="2">
+            <a:schemeClr val="accent1"/>
+          </a:effectRef>
+          <a:fontRef idx="minor">
+            <a:schemeClr val="lt1"/>
+          </a:fontRef>
+        </p:style>
+        <p:txBody>
+          <a:bodyPr rtlCol="0" anchor="ctr" lIns="0" rIns="0" tIns="0" bIns="0"/>
+          <a:lstStyle/>
+          <a:p>
+            <a:pPr algn="ctr"/>
+            <a:r>
+              <a:rPr sz="1400" b="1">
+                <a:solidFill>
+                  <a:srgbClr val="202122"/>
+                </a:solidFill>
+                <a:latin typeface="Calibri"/>
+              </a:rPr>
+              <a:t>2</a:t>
+            </a:r>
+          </a:p>
+        </p:txBody>
+      </p:sp>
+      <p:sp>
+        <p:nvSpPr>
+          <p:cNvPr id="9" name="TextBox 8"/>
+          <p:cNvSpPr txBox="1"/>
+          <p:nvPr/>
+        </p:nvSpPr>
+        <p:spPr>
+          <a:xfrm>
+            <a:off x="1234440" y="2795778"/>
+            <a:ext cx="10408615" cy="1030986"/>
+          </a:xfrm>
+          <a:prstGeom prst="rect">
+            <a:avLst/>
+          </a:prstGeom>
+          <a:noFill/>
+        </p:spPr>
+        <p:txBody>
+          <a:bodyPr wrap="square" anchor="t" lIns="0" rIns="0" tIns="0" bIns="0"/>
+          <a:lstStyle/>
+          <a:p>
+            <a:pPr algn="l"/>
+            <a:r>
+              <a:rPr sz="1800" b="0" i="0">
+                <a:solidFill>
+                  <a:srgbClr val="54595D"/>
+                </a:solidFill>
+                <a:latin typeface="Calibri"/>
+              </a:rPr>
+              <a:t>Give one drawback of third-party libraries.</a:t>
+            </a:r>
+          </a:p>
+          <a:p>
+            <a:r>
+              <a:rPr sz="1800" b="1">
+                <a:solidFill>
+                  <a:srgbClr val="03306E"/>
+                </a:solidFill>
+                <a:latin typeface="Calibri"/>
+              </a:rPr>
+              <a:t>Extra dependencies, or security and maintenance risk.</a:t>
+            </a:r>
+          </a:p>
+        </p:txBody>
+      </p:sp>
+      <p:sp>
+        <p:nvSpPr>
+          <p:cNvPr id="10" name="Oval 9"/>
+          <p:cNvSpPr/>
+          <p:nvPr/>
+        </p:nvSpPr>
+        <p:spPr>
+          <a:xfrm>
+            <a:off x="548640" y="4009644"/>
+            <a:ext cx="411480" cy="411480"/>
+          </a:xfrm>
+          <a:prstGeom prst="ellipse">
+            <a:avLst/>
+          </a:prstGeom>
+          <a:solidFill>
+            <a:srgbClr val="F2B705"/>
+          </a:solidFill>
+          <a:ln>
+            <a:noFill/>
+          </a:ln>
+          <a:effectLst/>
+        </p:spPr>
+        <p:style>
+          <a:lnRef idx="1">
+            <a:schemeClr val="accent1"/>
+          </a:lnRef>
+          <a:fillRef idx="3">
+            <a:schemeClr val="accent1"/>
+          </a:fillRef>
+          <a:effectRef idx="2">
+            <a:schemeClr val="accent1"/>
+          </a:effectRef>
+          <a:fontRef idx="minor">
+            <a:schemeClr val="lt1"/>
+          </a:fontRef>
+        </p:style>
+        <p:txBody>
+          <a:bodyPr rtlCol="0" anchor="ctr" lIns="0" rIns="0" tIns="0" bIns="0"/>
+          <a:lstStyle/>
+          <a:p>
+            <a:pPr algn="ctr"/>
+            <a:r>
+              <a:rPr sz="1400" b="1">
+                <a:solidFill>
+                  <a:srgbClr val="202122"/>
+                </a:solidFill>
+                <a:latin typeface="Calibri"/>
+              </a:rPr>
+              <a:t>3</a:t>
+            </a:r>
+          </a:p>
+        </p:txBody>
+      </p:sp>
+      <p:sp>
+        <p:nvSpPr>
+          <p:cNvPr id="11" name="TextBox 10"/>
+          <p:cNvSpPr txBox="1"/>
+          <p:nvPr/>
+        </p:nvSpPr>
+        <p:spPr>
+          <a:xfrm>
+            <a:off x="1234440" y="3991356"/>
+            <a:ext cx="10408615" cy="1030986"/>
+          </a:xfrm>
+          <a:prstGeom prst="rect">
+            <a:avLst/>
+          </a:prstGeom>
+          <a:noFill/>
+        </p:spPr>
+        <p:txBody>
+          <a:bodyPr wrap="square" anchor="t" lIns="0" rIns="0" tIns="0" bIns="0"/>
+          <a:lstStyle/>
+          <a:p>
+            <a:pPr algn="l"/>
+            <a:r>
+              <a:rPr sz="1800" b="0" i="0">
+                <a:solidFill>
+                  <a:srgbClr val="54595D"/>
+                </a:solidFill>
+                <a:latin typeface="Calibri"/>
+              </a:rPr>
+              <a:t>Which check makes sure a field is not blank?</a:t>
+            </a:r>
+          </a:p>
+          <a:p>
+            <a:r>
+              <a:rPr sz="1800" b="1">
+                <a:solidFill>
+                  <a:srgbClr val="03306E"/>
+                </a:solidFill>
+                <a:latin typeface="Calibri"/>
+              </a:rPr>
+              <a:t>Presence check.</a:t>
+            </a:r>
+          </a:p>
+        </p:txBody>
+      </p:sp>
+      <p:sp>
+        <p:nvSpPr>
+          <p:cNvPr id="12" name="Oval 11"/>
+          <p:cNvSpPr/>
+          <p:nvPr/>
+        </p:nvSpPr>
+        <p:spPr>
+          <a:xfrm>
+            <a:off x="548640" y="5205221"/>
+            <a:ext cx="411480" cy="411480"/>
+          </a:xfrm>
+          <a:prstGeom prst="ellipse">
+            <a:avLst/>
+          </a:prstGeom>
+          <a:solidFill>
+            <a:srgbClr val="F2B705"/>
+          </a:solidFill>
+          <a:ln>
+            <a:noFill/>
+          </a:ln>
+          <a:effectLst/>
+        </p:spPr>
+        <p:style>
+          <a:lnRef idx="1">
+            <a:schemeClr val="accent1"/>
+          </a:lnRef>
+          <a:fillRef idx="3">
+            <a:schemeClr val="accent1"/>
+          </a:fillRef>
+          <a:effectRef idx="2">
+            <a:schemeClr val="accent1"/>
+          </a:effectRef>
+          <a:fontRef idx="minor">
+            <a:schemeClr val="lt1"/>
+          </a:fontRef>
+        </p:style>
+        <p:txBody>
+          <a:bodyPr rtlCol="0" anchor="ctr" lIns="0" rIns="0" tIns="0" bIns="0"/>
+          <a:lstStyle/>
+          <a:p>
+            <a:pPr algn="ctr"/>
+            <a:r>
+              <a:rPr sz="1400" b="1">
+                <a:solidFill>
+                  <a:srgbClr val="202122"/>
+                </a:solidFill>
+                <a:latin typeface="Calibri"/>
+              </a:rPr>
+              <a:t>4</a:t>
+            </a:r>
+          </a:p>
+        </p:txBody>
+      </p:sp>
+      <p:sp>
+        <p:nvSpPr>
+          <p:cNvPr id="13" name="TextBox 12"/>
+          <p:cNvSpPr txBox="1"/>
+          <p:nvPr/>
+        </p:nvSpPr>
+        <p:spPr>
+          <a:xfrm>
+            <a:off x="1234440" y="5186933"/>
+            <a:ext cx="10408615" cy="1030986"/>
+          </a:xfrm>
+          <a:prstGeom prst="rect">
+            <a:avLst/>
+          </a:prstGeom>
+          <a:noFill/>
+        </p:spPr>
+        <p:txBody>
+          <a:bodyPr wrap="square" anchor="t" lIns="0" rIns="0" tIns="0" bIns="0"/>
+          <a:lstStyle/>
+          <a:p>
+            <a:pPr algn="l"/>
+            <a:r>
+              <a:rPr sz="1800" b="0" i="0">
+                <a:solidFill>
+                  <a:srgbClr val="54595D"/>
+                </a:solidFill>
+                <a:latin typeface="Calibri"/>
+              </a:rPr>
+              <a:t>Write a range check for an age between 11 and 18.</a:t>
+            </a:r>
+          </a:p>
+          <a:p>
+            <a:r>
+              <a:rPr sz="1800" b="1">
+                <a:solidFill>
+                  <a:srgbClr val="03306E"/>
+                </a:solidFill>
+                <a:latin typeface="Calibri"/>
+              </a:rPr>
+              <a:t>if 11 &lt;= age &lt;= 18:</a:t>
+            </a:r>
+          </a:p>
+        </p:txBody>
+      </p:sp>
+    </p:spTree>
+  </p:cSld>
+  <p:clrMapOvr>
+    <a:masterClrMapping/>
+  </p:clrMapOvr>
+</p:sld>
+</file>
+
+<file path=ppt/slides/slide14.xml><?xml version="1.0" encoding="utf-8"?>
+<p:sld xmlns:a="http://schemas.openxmlformats.org/drawingml/2006/main" xmlns:p="http://schemas.openxmlformats.org/presentationml/2006/main" xmlns:r="http://schemas.openxmlformats.org/officeDocument/2006/relationships">
+  <p:cSld>
+    <p:bg>
+      <p:bgPr>
+        <a:solidFill>
+          <a:srgbClr val="FFFFFF"/>
+        </a:solidFill>
+        <a:effectLst/>
+      </p:bgPr>
+    </p:bg>
+    <p:spTree>
+      <p:nvGrpSpPr>
+        <p:cNvPr id="1" name=""/>
+        <p:cNvGrpSpPr/>
+        <p:nvPr/>
+      </p:nvGrpSpPr>
+      <p:grpSpPr/>
+      <p:sp>
+        <p:nvSpPr>
+          <p:cNvPr id="2" name="TextBox 1"/>
+          <p:cNvSpPr txBox="1"/>
+          <p:nvPr/>
+        </p:nvSpPr>
+        <p:spPr>
+          <a:xfrm>
+            <a:off x="548640" y="320040"/>
+            <a:ext cx="11094415" cy="274320"/>
+          </a:xfrm>
+          <a:prstGeom prst="rect">
+            <a:avLst/>
+          </a:prstGeom>
+          <a:noFill/>
+        </p:spPr>
+        <p:txBody>
+          <a:bodyPr wrap="square" anchor="t" lIns="0" rIns="0" tIns="0" bIns="0"/>
+          <a:lstStyle/>
+          <a:p>
+            <a:pPr algn="l"/>
+            <a:r>
+              <a:rPr sz="1100" b="1" i="0">
+                <a:solidFill>
+                  <a:srgbClr val="54595D"/>
+                </a:solidFill>
+                <a:latin typeface="Calibri"/>
+              </a:rPr>
+              <a:t>CORE COMPONENT  ·  Core Paper 1</a:t>
+            </a:r>
+          </a:p>
+        </p:txBody>
+      </p:sp>
+      <p:sp>
+        <p:nvSpPr>
+          <p:cNvPr id="3" name="TextBox 2"/>
+          <p:cNvSpPr txBox="1"/>
+          <p:nvPr/>
+        </p:nvSpPr>
+        <p:spPr>
+          <a:xfrm>
+            <a:off x="548640" y="566928"/>
+            <a:ext cx="11094415" cy="822960"/>
+          </a:xfrm>
+          <a:prstGeom prst="rect">
+            <a:avLst/>
+          </a:prstGeom>
+          <a:noFill/>
+        </p:spPr>
+        <p:txBody>
+          <a:bodyPr wrap="square" anchor="ctr" lIns="0" rIns="0" tIns="0" bIns="0"/>
+          <a:lstStyle/>
+          <a:p>
+            <a:pPr algn="l"/>
+            <a:r>
+              <a:rPr sz="3200" b="1" i="0">
+                <a:solidFill>
+                  <a:srgbClr val="03306E"/>
+                </a:solidFill>
+                <a:latin typeface="Cambria"/>
+              </a:rPr>
+              <a:t>Activity: Validation library</a:t>
+            </a:r>
+          </a:p>
+        </p:txBody>
+      </p:sp>
+      <p:sp>
+        <p:nvSpPr>
+          <p:cNvPr id="4" name="TextBox 3"/>
+          <p:cNvSpPr txBox="1"/>
+          <p:nvPr/>
+        </p:nvSpPr>
+        <p:spPr>
+          <a:xfrm>
+            <a:off x="548640" y="6446520"/>
+            <a:ext cx="8229600" cy="274320"/>
+          </a:xfrm>
+          <a:prstGeom prst="rect">
+            <a:avLst/>
+          </a:prstGeom>
+          <a:noFill/>
+        </p:spPr>
+        <p:txBody>
+          <a:bodyPr wrap="square" anchor="t" lIns="0" rIns="0" tIns="0" bIns="0"/>
+          <a:lstStyle/>
+          <a:p>
+            <a:pPr algn="l"/>
+            <a:r>
+              <a:rPr sz="1000" b="0" i="0">
+                <a:solidFill>
+                  <a:srgbClr val="54595D"/>
+                </a:solidFill>
+                <a:latin typeface="Calibri"/>
+              </a:rPr>
+              <a:t>Digital Software Development T Level  ·  Functions, Procedures and Validation</a:t>
+            </a:r>
+          </a:p>
+        </p:txBody>
+      </p:sp>
+      <p:sp>
+        <p:nvSpPr>
+          <p:cNvPr id="5" name="TextBox 4"/>
+          <p:cNvSpPr txBox="1"/>
+          <p:nvPr/>
+        </p:nvSpPr>
+        <p:spPr>
+          <a:xfrm>
+            <a:off x="10728655" y="6446520"/>
+            <a:ext cx="914400" cy="274320"/>
+          </a:xfrm>
+          <a:prstGeom prst="rect">
+            <a:avLst/>
+          </a:prstGeom>
+          <a:noFill/>
+        </p:spPr>
+        <p:txBody>
+          <a:bodyPr wrap="square" anchor="t" lIns="0" rIns="0" tIns="0" bIns="0"/>
+          <a:lstStyle/>
+          <a:p>
+            <a:pPr algn="r"/>
+            <a:r>
+              <a:rPr sz="1000" b="0" i="0">
+                <a:solidFill>
+                  <a:srgbClr val="54595D"/>
+                </a:solidFill>
+                <a:latin typeface="Calibri"/>
+              </a:rPr>
+              <a:t>14</a:t>
+            </a:r>
+          </a:p>
+        </p:txBody>
+      </p:sp>
+      <p:sp>
+        <p:nvSpPr>
+          <p:cNvPr id="6" name="Rounded Rectangle 5"/>
+          <p:cNvSpPr/>
+          <p:nvPr/>
+        </p:nvSpPr>
+        <p:spPr>
+          <a:xfrm>
+            <a:off x="548640" y="1508760"/>
+            <a:ext cx="2011680" cy="457200"/>
+          </a:xfrm>
+          <a:prstGeom prst="roundRect">
+            <a:avLst>
+              <a:gd name="adj" fmla="val 50000"/>
+            </a:avLst>
+          </a:prstGeom>
+          <a:solidFill>
+            <a:srgbClr val="F2B705"/>
+          </a:solidFill>
+          <a:ln>
+            <a:noFill/>
+          </a:ln>
+          <a:effectLst/>
+        </p:spPr>
+        <p:style>
+          <a:lnRef idx="1">
+            <a:schemeClr val="accent1"/>
+          </a:lnRef>
+          <a:fillRef idx="3">
+            <a:schemeClr val="accent1"/>
+          </a:fillRef>
+          <a:effectRef idx="2">
+            <a:schemeClr val="accent1"/>
+          </a:effectRef>
+          <a:fontRef idx="minor">
+            <a:schemeClr val="lt1"/>
+          </a:fontRef>
+        </p:style>
+        <p:txBody>
+          <a:bodyPr rtlCol="0" anchor="ctr"/>
+          <a:lstStyle/>
+          <a:p/>
+        </p:txBody>
+      </p:sp>
+      <p:sp>
+        <p:nvSpPr>
+          <p:cNvPr id="7" name="TextBox 6"/>
+          <p:cNvSpPr txBox="1"/>
+          <p:nvPr/>
+        </p:nvSpPr>
+        <p:spPr>
+          <a:xfrm>
+            <a:off x="548640" y="1508760"/>
+            <a:ext cx="2011680" cy="457200"/>
+          </a:xfrm>
+          <a:prstGeom prst="rect">
+            <a:avLst/>
+          </a:prstGeom>
+          <a:noFill/>
+        </p:spPr>
+        <p:txBody>
+          <a:bodyPr wrap="square" anchor="ctr" lIns="0" rIns="0" tIns="0" bIns="0"/>
+          <a:lstStyle/>
+          <a:p>
+            <a:pPr algn="ctr"/>
+            <a:r>
+              <a:rPr sz="1400" b="1" i="0">
+                <a:solidFill>
+                  <a:srgbClr val="202122"/>
+                </a:solidFill>
+                <a:latin typeface="Calibri"/>
+              </a:rPr>
+              <a:t>30 minutes</a:t>
+            </a:r>
+          </a:p>
+        </p:txBody>
+      </p:sp>
+      <p:sp>
+        <p:nvSpPr>
+          <p:cNvPr id="8" name="TextBox 7"/>
+          <p:cNvSpPr txBox="1"/>
+          <p:nvPr/>
+        </p:nvSpPr>
+        <p:spPr>
+          <a:xfrm>
+            <a:off x="2743200" y="1508760"/>
+            <a:ext cx="4754880" cy="457200"/>
+          </a:xfrm>
+          <a:prstGeom prst="rect">
+            <a:avLst/>
+          </a:prstGeom>
+          <a:noFill/>
+        </p:spPr>
+        <p:txBody>
+          <a:bodyPr wrap="square" anchor="ctr" lIns="0" rIns="0" tIns="0" bIns="0"/>
+          <a:lstStyle/>
+          <a:p>
+            <a:pPr algn="l"/>
+            <a:r>
+              <a:rPr sz="1400" b="0" i="1">
+                <a:solidFill>
+                  <a:srgbClr val="54595D"/>
+                </a:solidFill>
+                <a:latin typeface="Calibri"/>
+              </a:rPr>
+              <a:t>Pairs, in Python</a:t>
+            </a:r>
+          </a:p>
+        </p:txBody>
+      </p:sp>
+      <p:sp>
+        <p:nvSpPr>
+          <p:cNvPr id="9" name="Oval 8"/>
+          <p:cNvSpPr/>
+          <p:nvPr/>
+        </p:nvSpPr>
+        <p:spPr>
+          <a:xfrm>
+            <a:off x="548640" y="2482596"/>
+            <a:ext cx="384048" cy="384048"/>
+          </a:xfrm>
+          <a:prstGeom prst="ellipse">
+            <a:avLst/>
+          </a:prstGeom>
+          <a:solidFill>
+            <a:srgbClr val="0645AD"/>
+          </a:solidFill>
+          <a:ln>
+            <a:noFill/>
+          </a:ln>
+          <a:effectLst/>
+        </p:spPr>
+        <p:style>
+          <a:lnRef idx="1">
+            <a:schemeClr val="accent1"/>
+          </a:lnRef>
+          <a:fillRef idx="3">
+            <a:schemeClr val="accent1"/>
+          </a:fillRef>
+          <a:effectRef idx="2">
+            <a:schemeClr val="accent1"/>
+          </a:effectRef>
+          <a:fontRef idx="minor">
+            <a:schemeClr val="lt1"/>
+          </a:fontRef>
+        </p:style>
+        <p:txBody>
+          <a:bodyPr rtlCol="0" anchor="ctr" lIns="0" rIns="0" tIns="0" bIns="0"/>
+          <a:lstStyle/>
+          <a:p>
+            <a:pPr algn="ctr"/>
+            <a:r>
+              <a:rPr sz="1300" b="1">
+                <a:solidFill>
+                  <a:srgbClr val="FFFFFF"/>
+                </a:solidFill>
+                <a:latin typeface="Calibri"/>
+              </a:rPr>
+              <a:t>1</a:t>
+            </a:r>
+          </a:p>
+        </p:txBody>
+      </p:sp>
+      <p:sp>
+        <p:nvSpPr>
+          <p:cNvPr id="10" name="TextBox 9"/>
+          <p:cNvSpPr txBox="1"/>
+          <p:nvPr/>
+        </p:nvSpPr>
+        <p:spPr>
+          <a:xfrm>
+            <a:off x="1143000" y="2240280"/>
+            <a:ext cx="5943600" cy="868680"/>
+          </a:xfrm>
+          <a:prstGeom prst="rect">
+            <a:avLst/>
+          </a:prstGeom>
+          <a:noFill/>
+        </p:spPr>
+        <p:txBody>
+          <a:bodyPr wrap="square" anchor="ctr" lIns="0" rIns="0" tIns="0" bIns="0"/>
+          <a:lstStyle/>
+          <a:p>
+            <a:pPr algn="l"/>
+            <a:r>
+              <a:rPr sz="1700" b="0" i="0">
+                <a:solidFill>
+                  <a:srgbClr val="202122"/>
+                </a:solidFill>
+                <a:latin typeface="Calibri"/>
+              </a:rPr>
+              <a:t>Write functions is_present(), is_in_range() and is_valid_email() that return True or False.</a:t>
+            </a:r>
+          </a:p>
+        </p:txBody>
+      </p:sp>
+      <p:sp>
+        <p:nvSpPr>
+          <p:cNvPr id="11" name="Oval 10"/>
+          <p:cNvSpPr/>
+          <p:nvPr/>
+        </p:nvSpPr>
+        <p:spPr>
+          <a:xfrm>
+            <a:off x="548640" y="3461004"/>
+            <a:ext cx="384048" cy="384048"/>
+          </a:xfrm>
+          <a:prstGeom prst="ellipse">
+            <a:avLst/>
+          </a:prstGeom>
+          <a:solidFill>
+            <a:srgbClr val="0645AD"/>
+          </a:solidFill>
+          <a:ln>
+            <a:noFill/>
+          </a:ln>
+          <a:effectLst/>
+        </p:spPr>
+        <p:style>
+          <a:lnRef idx="1">
+            <a:schemeClr val="accent1"/>
+          </a:lnRef>
+          <a:fillRef idx="3">
+            <a:schemeClr val="accent1"/>
+          </a:fillRef>
+          <a:effectRef idx="2">
+            <a:schemeClr val="accent1"/>
+          </a:effectRef>
+          <a:fontRef idx="minor">
+            <a:schemeClr val="lt1"/>
+          </a:fontRef>
+        </p:style>
+        <p:txBody>
+          <a:bodyPr rtlCol="0" anchor="ctr" lIns="0" rIns="0" tIns="0" bIns="0"/>
+          <a:lstStyle/>
+          <a:p>
+            <a:pPr algn="ctr"/>
+            <a:r>
+              <a:rPr sz="1300" b="1">
+                <a:solidFill>
+                  <a:srgbClr val="FFFFFF"/>
+                </a:solidFill>
+                <a:latin typeface="Calibri"/>
+              </a:rPr>
+              <a:t>2</a:t>
+            </a:r>
+          </a:p>
+        </p:txBody>
+      </p:sp>
+      <p:sp>
+        <p:nvSpPr>
+          <p:cNvPr id="12" name="TextBox 11"/>
+          <p:cNvSpPr txBox="1"/>
+          <p:nvPr/>
+        </p:nvSpPr>
+        <p:spPr>
+          <a:xfrm>
+            <a:off x="1143000" y="3218688"/>
+            <a:ext cx="5943600" cy="868680"/>
+          </a:xfrm>
+          <a:prstGeom prst="rect">
+            <a:avLst/>
+          </a:prstGeom>
+          <a:noFill/>
+        </p:spPr>
+        <p:txBody>
+          <a:bodyPr wrap="square" anchor="ctr" lIns="0" rIns="0" tIns="0" bIns="0"/>
+          <a:lstStyle/>
+          <a:p>
+            <a:pPr algn="l"/>
+            <a:r>
+              <a:rPr sz="1700" b="0" i="0">
+                <a:solidFill>
+                  <a:srgbClr val="202122"/>
+                </a:solidFill>
+                <a:latin typeface="Calibri"/>
+              </a:rPr>
+              <a:t>Write a procedure that keeps asking for input until every check passes.</a:t>
+            </a:r>
+          </a:p>
+        </p:txBody>
+      </p:sp>
+      <p:sp>
+        <p:nvSpPr>
+          <p:cNvPr id="13" name="Oval 12"/>
+          <p:cNvSpPr/>
+          <p:nvPr/>
+        </p:nvSpPr>
+        <p:spPr>
+          <a:xfrm>
+            <a:off x="548640" y="4439412"/>
+            <a:ext cx="384048" cy="384048"/>
+          </a:xfrm>
+          <a:prstGeom prst="ellipse">
+            <a:avLst/>
+          </a:prstGeom>
+          <a:solidFill>
+            <a:srgbClr val="0645AD"/>
+          </a:solidFill>
+          <a:ln>
+            <a:noFill/>
+          </a:ln>
+          <a:effectLst/>
+        </p:spPr>
+        <p:style>
+          <a:lnRef idx="1">
+            <a:schemeClr val="accent1"/>
+          </a:lnRef>
+          <a:fillRef idx="3">
+            <a:schemeClr val="accent1"/>
+          </a:fillRef>
+          <a:effectRef idx="2">
+            <a:schemeClr val="accent1"/>
+          </a:effectRef>
+          <a:fontRef idx="minor">
+            <a:schemeClr val="lt1"/>
+          </a:fontRef>
+        </p:style>
+        <p:txBody>
+          <a:bodyPr rtlCol="0" anchor="ctr" lIns="0" rIns="0" tIns="0" bIns="0"/>
+          <a:lstStyle/>
+          <a:p>
+            <a:pPr algn="ctr"/>
+            <a:r>
+              <a:rPr sz="1300" b="1">
+                <a:solidFill>
+                  <a:srgbClr val="FFFFFF"/>
+                </a:solidFill>
+                <a:latin typeface="Calibri"/>
+              </a:rPr>
+              <a:t>3</a:t>
+            </a:r>
+          </a:p>
+        </p:txBody>
+      </p:sp>
+      <p:sp>
+        <p:nvSpPr>
+          <p:cNvPr id="14" name="TextBox 13"/>
+          <p:cNvSpPr txBox="1"/>
+          <p:nvPr/>
+        </p:nvSpPr>
+        <p:spPr>
+          <a:xfrm>
+            <a:off x="1143000" y="4197096"/>
+            <a:ext cx="5943600" cy="868680"/>
+          </a:xfrm>
+          <a:prstGeom prst="rect">
+            <a:avLst/>
+          </a:prstGeom>
+          <a:noFill/>
+        </p:spPr>
+        <p:txBody>
+          <a:bodyPr wrap="square" anchor="ctr" lIns="0" rIns="0" tIns="0" bIns="0"/>
+          <a:lstStyle/>
+          <a:p>
+            <a:pPr algn="l"/>
+            <a:r>
+              <a:rPr sz="1700" b="0" i="0">
+                <a:solidFill>
+                  <a:srgbClr val="202122"/>
+                </a:solidFill>
+                <a:latin typeface="Calibri"/>
+              </a:rPr>
+              <a:t>Test each function with valid, invalid and boundary data.</a:t>
+            </a:r>
+          </a:p>
+        </p:txBody>
+      </p:sp>
+      <p:sp>
+        <p:nvSpPr>
+          <p:cNvPr id="15" name="Oval 14"/>
+          <p:cNvSpPr/>
+          <p:nvPr/>
+        </p:nvSpPr>
+        <p:spPr>
+          <a:xfrm>
+            <a:off x="548640" y="5417820"/>
+            <a:ext cx="384048" cy="384048"/>
+          </a:xfrm>
+          <a:prstGeom prst="ellipse">
+            <a:avLst/>
+          </a:prstGeom>
+          <a:solidFill>
+            <a:srgbClr val="0645AD"/>
+          </a:solidFill>
+          <a:ln>
+            <a:noFill/>
+          </a:ln>
+          <a:effectLst/>
+        </p:spPr>
+        <p:style>
+          <a:lnRef idx="1">
+            <a:schemeClr val="accent1"/>
+          </a:lnRef>
+          <a:fillRef idx="3">
+            <a:schemeClr val="accent1"/>
+          </a:fillRef>
+          <a:effectRef idx="2">
+            <a:schemeClr val="accent1"/>
+          </a:effectRef>
+          <a:fontRef idx="minor">
+            <a:schemeClr val="lt1"/>
+          </a:fontRef>
+        </p:style>
+        <p:txBody>
+          <a:bodyPr rtlCol="0" anchor="ctr" lIns="0" rIns="0" tIns="0" bIns="0"/>
+          <a:lstStyle/>
+          <a:p>
+            <a:pPr algn="ctr"/>
+            <a:r>
+              <a:rPr sz="1300" b="1">
+                <a:solidFill>
+                  <a:srgbClr val="FFFFFF"/>
+                </a:solidFill>
+                <a:latin typeface="Calibri"/>
+              </a:rPr>
+              <a:t>4</a:t>
+            </a:r>
+          </a:p>
+        </p:txBody>
+      </p:sp>
+      <p:sp>
+        <p:nvSpPr>
+          <p:cNvPr id="16" name="TextBox 15"/>
+          <p:cNvSpPr txBox="1"/>
+          <p:nvPr/>
+        </p:nvSpPr>
+        <p:spPr>
+          <a:xfrm>
+            <a:off x="1143000" y="5175504"/>
+            <a:ext cx="5943600" cy="868680"/>
+          </a:xfrm>
+          <a:prstGeom prst="rect">
+            <a:avLst/>
+          </a:prstGeom>
+          <a:noFill/>
+        </p:spPr>
+        <p:txBody>
+          <a:bodyPr wrap="square" anchor="ctr" lIns="0" rIns="0" tIns="0" bIns="0"/>
+          <a:lstStyle/>
+          <a:p>
+            <a:pPr algn="l"/>
+            <a:r>
+              <a:rPr sz="1700" b="0" i="0">
+                <a:solidFill>
+                  <a:srgbClr val="202122"/>
+                </a:solidFill>
+                <a:latin typeface="Calibri"/>
+              </a:rPr>
+              <a:t>Add a docstring to each function.</a:t>
+            </a:r>
+          </a:p>
+        </p:txBody>
+      </p:sp>
+      <p:sp>
+        <p:nvSpPr>
+          <p:cNvPr id="17" name="Rounded Rectangle 16"/>
+          <p:cNvSpPr/>
+          <p:nvPr/>
+        </p:nvSpPr>
+        <p:spPr>
+          <a:xfrm>
+            <a:off x="7772400" y="1508760"/>
+            <a:ext cx="3867912" cy="4572000"/>
+          </a:xfrm>
+          <a:prstGeom prst="roundRect">
+            <a:avLst>
+              <a:gd name="adj" fmla="val 8000"/>
+            </a:avLst>
+          </a:prstGeom>
+          <a:solidFill>
+            <a:srgbClr val="EAF3FF"/>
+          </a:solidFill>
+          <a:ln>
+            <a:noFill/>
+          </a:ln>
+          <a:effectLst/>
+        </p:spPr>
+        <p:style>
+          <a:lnRef idx="1">
+            <a:schemeClr val="accent1"/>
+          </a:lnRef>
+          <a:fillRef idx="3">
+            <a:schemeClr val="accent1"/>
+          </a:fillRef>
+          <a:effectRef idx="2">
+            <a:schemeClr val="accent1"/>
+          </a:effectRef>
+          <a:fontRef idx="minor">
+            <a:schemeClr val="lt1"/>
+          </a:fontRef>
+        </p:style>
+        <p:txBody>
+          <a:bodyPr rtlCol="0" anchor="ctr"/>
+          <a:lstStyle/>
+          <a:p/>
+        </p:txBody>
+      </p:sp>
+      <p:sp>
+        <p:nvSpPr>
+          <p:cNvPr id="18" name="TextBox 17"/>
+          <p:cNvSpPr txBox="1"/>
+          <p:nvPr/>
+        </p:nvSpPr>
+        <p:spPr>
+          <a:xfrm>
+            <a:off x="8046720" y="1737360"/>
+            <a:ext cx="3291840" cy="365760"/>
+          </a:xfrm>
+          <a:prstGeom prst="rect">
+            <a:avLst/>
+          </a:prstGeom>
+          <a:noFill/>
+        </p:spPr>
+        <p:txBody>
+          <a:bodyPr wrap="square" anchor="t" lIns="0" rIns="0" tIns="0" bIns="0"/>
+          <a:lstStyle/>
+          <a:p>
+            <a:pPr algn="l"/>
+            <a:r>
+              <a:rPr sz="1300" b="1" i="0">
+                <a:solidFill>
+                  <a:srgbClr val="0645AD"/>
+                </a:solidFill>
+                <a:latin typeface="Calibri"/>
+              </a:rPr>
+              <a:t>SUCCESS CRITERIA</a:t>
+            </a:r>
+          </a:p>
+        </p:txBody>
+      </p:sp>
+      <p:sp>
+        <p:nvSpPr>
+          <p:cNvPr id="19" name="TextBox 18"/>
+          <p:cNvSpPr txBox="1"/>
+          <p:nvPr/>
+        </p:nvSpPr>
+        <p:spPr>
+          <a:xfrm>
+            <a:off x="8046720" y="2240280"/>
+            <a:ext cx="3337560" cy="3657600"/>
+          </a:xfrm>
+          <a:prstGeom prst="rect">
+            <a:avLst/>
+          </a:prstGeom>
+          <a:noFill/>
+        </p:spPr>
+        <p:txBody>
+          <a:bodyPr wrap="square" lIns="0" rIns="0" tIns="0" bIns="0">
+            <a:spAutoFit/>
+          </a:bodyPr>
+          <a:lstStyle/>
+          <a:p>
+            <a:pPr marL="274320" indent="-274320">
+              <a:spcAft>
+                <a:spcPts val="810"/>
+              </a:spcAft>
+              <a:buClr>
+                <a:srgbClr val="0645AD"/>
+              </a:buClr>
+              <a:buFont typeface="Arial"/>
+              <a:buChar char="•"/>
+            </a:pPr>
+            <a:r>
+              <a:rPr sz="1800" b="0">
+                <a:solidFill>
+                  <a:srgbClr val="202122"/>
+                </a:solidFill>
+                <a:latin typeface="Calibri"/>
+              </a:rPr>
+              <a:t>Functions return Booleans</a:t>
+            </a:r>
+          </a:p>
+          <a:p>
+            <a:pPr marL="274320" indent="-274320">
+              <a:spcAft>
+                <a:spcPts val="810"/>
+              </a:spcAft>
+              <a:buClr>
+                <a:srgbClr val="0645AD"/>
+              </a:buClr>
+              <a:buFont typeface="Arial"/>
+              <a:buChar char="•"/>
+            </a:pPr>
+            <a:r>
+              <a:rPr sz="1800" b="0">
+                <a:solidFill>
+                  <a:srgbClr val="202122"/>
+                </a:solidFill>
+                <a:latin typeface="Calibri"/>
+              </a:rPr>
+              <a:t>No repeated code</a:t>
+            </a:r>
+          </a:p>
+          <a:p>
+            <a:pPr marL="274320" indent="-274320">
+              <a:spcAft>
+                <a:spcPts val="810"/>
+              </a:spcAft>
+              <a:buClr>
+                <a:srgbClr val="0645AD"/>
+              </a:buClr>
+              <a:buFont typeface="Arial"/>
+              <a:buChar char="•"/>
+            </a:pPr>
+            <a:r>
+              <a:rPr sz="1800" b="0">
+                <a:solidFill>
+                  <a:srgbClr val="202122"/>
+                </a:solidFill>
+                <a:latin typeface="Calibri"/>
+              </a:rPr>
+              <a:t>Boundaries tested</a:t>
+            </a:r>
+          </a:p>
+        </p:txBody>
+      </p:sp>
+    </p:spTree>
+  </p:cSld>
+  <p:clrMapOvr>
+    <a:masterClrMapping/>
+  </p:clrMapOvr>
+</p:sld>
+</file>
+
+<file path=ppt/slides/slide15.xml><?xml version="1.0" encoding="utf-8"?>
+<p:sld xmlns:a="http://schemas.openxmlformats.org/drawingml/2006/main" xmlns:p="http://schemas.openxmlformats.org/presentationml/2006/main" xmlns:r="http://schemas.openxmlformats.org/officeDocument/2006/relationships">
+  <p:cSld>
+    <p:bg>
+      <p:bgPr>
+        <a:solidFill>
+          <a:srgbClr val="03306E"/>
+        </a:solidFill>
+        <a:effectLst/>
+      </p:bgPr>
+    </p:bg>
+    <p:spTree>
+      <p:nvGrpSpPr>
+        <p:cNvPr id="1" name=""/>
+        <p:cNvGrpSpPr/>
+        <p:nvPr/>
+      </p:nvGrpSpPr>
+      <p:grpSpPr/>
+      <p:sp>
+        <p:nvSpPr>
+          <p:cNvPr id="2" name="TextBox 1"/>
+          <p:cNvSpPr txBox="1"/>
+          <p:nvPr/>
+        </p:nvSpPr>
+        <p:spPr>
+          <a:xfrm>
+            <a:off x="548640" y="320040"/>
+            <a:ext cx="11094415" cy="274320"/>
+          </a:xfrm>
+          <a:prstGeom prst="rect">
+            <a:avLst/>
+          </a:prstGeom>
+          <a:noFill/>
+        </p:spPr>
+        <p:txBody>
+          <a:bodyPr wrap="square" anchor="t" lIns="0" rIns="0" tIns="0" bIns="0"/>
+          <a:lstStyle/>
+          <a:p>
+            <a:pPr algn="l"/>
+            <a:r>
+              <a:rPr sz="1100" b="1" i="0">
+                <a:solidFill>
+                  <a:srgbClr val="A9C8F0"/>
+                </a:solidFill>
+                <a:latin typeface="Calibri"/>
+              </a:rPr>
+              <a:t>CORE COMPONENT  ·  Core Paper 1</a:t>
+            </a:r>
+          </a:p>
+        </p:txBody>
+      </p:sp>
+      <p:sp>
+        <p:nvSpPr>
+          <p:cNvPr id="3" name="TextBox 2"/>
+          <p:cNvSpPr txBox="1"/>
+          <p:nvPr/>
+        </p:nvSpPr>
+        <p:spPr>
+          <a:xfrm>
+            <a:off x="548640" y="566928"/>
+            <a:ext cx="11094415" cy="822960"/>
+          </a:xfrm>
+          <a:prstGeom prst="rect">
+            <a:avLst/>
+          </a:prstGeom>
+          <a:noFill/>
+        </p:spPr>
+        <p:txBody>
+          <a:bodyPr wrap="square" anchor="ctr" lIns="0" rIns="0" tIns="0" bIns="0"/>
+          <a:lstStyle/>
+          <a:p>
+            <a:pPr algn="l"/>
+            <a:r>
+              <a:rPr sz="3200" b="1" i="0">
+                <a:solidFill>
+                  <a:srgbClr val="FFFFFF"/>
+                </a:solidFill>
+                <a:latin typeface="Cambria"/>
+              </a:rPr>
+              <a:t>Exit ticket</a:t>
+            </a:r>
+          </a:p>
+        </p:txBody>
+      </p:sp>
+      <p:sp>
+        <p:nvSpPr>
+          <p:cNvPr id="4" name="Oval 3"/>
+          <p:cNvSpPr/>
+          <p:nvPr/>
+        </p:nvSpPr>
+        <p:spPr>
+          <a:xfrm>
+            <a:off x="548640" y="1737360"/>
+            <a:ext cx="502920" cy="502920"/>
+          </a:xfrm>
+          <a:prstGeom prst="ellipse">
+            <a:avLst/>
+          </a:prstGeom>
+          <a:solidFill>
+            <a:srgbClr val="F2B705"/>
+          </a:solidFill>
+          <a:ln>
+            <a:noFill/>
+          </a:ln>
+          <a:effectLst/>
+        </p:spPr>
+        <p:style>
+          <a:lnRef idx="1">
+            <a:schemeClr val="accent1"/>
+          </a:lnRef>
+          <a:fillRef idx="3">
+            <a:schemeClr val="accent1"/>
+          </a:fillRef>
+          <a:effectRef idx="2">
+            <a:schemeClr val="accent1"/>
+          </a:effectRef>
+          <a:fontRef idx="minor">
+            <a:schemeClr val="lt1"/>
+          </a:fontRef>
+        </p:style>
+        <p:txBody>
+          <a:bodyPr rtlCol="0" anchor="ctr" lIns="0" rIns="0" tIns="0" bIns="0"/>
+          <a:lstStyle/>
+          <a:p>
+            <a:pPr algn="ctr"/>
+            <a:r>
+              <a:rPr sz="1700" b="1">
+                <a:solidFill>
+                  <a:srgbClr val="202122"/>
+                </a:solidFill>
+                <a:latin typeface="Calibri"/>
+              </a:rPr>
+              <a:t>1</a:t>
+            </a:r>
+          </a:p>
+        </p:txBody>
+      </p:sp>
+      <p:sp>
+        <p:nvSpPr>
+          <p:cNvPr id="5" name="TextBox 4"/>
+          <p:cNvSpPr txBox="1"/>
+          <p:nvPr/>
+        </p:nvSpPr>
+        <p:spPr>
+          <a:xfrm>
+            <a:off x="1325880" y="1645920"/>
+            <a:ext cx="6583680" cy="822960"/>
+          </a:xfrm>
+          <a:prstGeom prst="rect">
+            <a:avLst/>
+          </a:prstGeom>
+          <a:noFill/>
+        </p:spPr>
+        <p:txBody>
+          <a:bodyPr wrap="square" anchor="ctr" lIns="0" rIns="0" tIns="0" bIns="0"/>
+          <a:lstStyle/>
+          <a:p>
+            <a:pPr algn="l"/>
+            <a:r>
+              <a:rPr sz="2000" b="0" i="0">
+                <a:solidFill>
+                  <a:srgbClr val="FFFFFF"/>
+                </a:solidFill>
+                <a:latin typeface="Calibri"/>
+              </a:rPr>
+              <a:t>Is print() a function or a procedure in your own code terms, and why?</a:t>
+            </a:r>
+          </a:p>
+        </p:txBody>
+      </p:sp>
+      <p:sp>
+        <p:nvSpPr>
+          <p:cNvPr id="6" name="Oval 5"/>
+          <p:cNvSpPr/>
+          <p:nvPr/>
+        </p:nvSpPr>
+        <p:spPr>
+          <a:xfrm>
+            <a:off x="548640" y="2697480"/>
+            <a:ext cx="502920" cy="502920"/>
+          </a:xfrm>
+          <a:prstGeom prst="ellipse">
+            <a:avLst/>
+          </a:prstGeom>
+          <a:solidFill>
+            <a:srgbClr val="F2B705"/>
+          </a:solidFill>
+          <a:ln>
+            <a:noFill/>
+          </a:ln>
+          <a:effectLst/>
+        </p:spPr>
+        <p:style>
+          <a:lnRef idx="1">
+            <a:schemeClr val="accent1"/>
+          </a:lnRef>
+          <a:fillRef idx="3">
+            <a:schemeClr val="accent1"/>
+          </a:fillRef>
+          <a:effectRef idx="2">
+            <a:schemeClr val="accent1"/>
+          </a:effectRef>
+          <a:fontRef idx="minor">
+            <a:schemeClr val="lt1"/>
+          </a:fontRef>
+        </p:style>
+        <p:txBody>
+          <a:bodyPr rtlCol="0" anchor="ctr" lIns="0" rIns="0" tIns="0" bIns="0"/>
+          <a:lstStyle/>
+          <a:p>
+            <a:pPr algn="ctr"/>
+            <a:r>
+              <a:rPr sz="1700" b="1">
+                <a:solidFill>
+                  <a:srgbClr val="202122"/>
+                </a:solidFill>
+                <a:latin typeface="Calibri"/>
+              </a:rPr>
+              <a:t>2</a:t>
+            </a:r>
+          </a:p>
+        </p:txBody>
+      </p:sp>
+      <p:sp>
+        <p:nvSpPr>
+          <p:cNvPr id="7" name="TextBox 6"/>
+          <p:cNvSpPr txBox="1"/>
+          <p:nvPr/>
+        </p:nvSpPr>
+        <p:spPr>
+          <a:xfrm>
+            <a:off x="1325880" y="2606040"/>
+            <a:ext cx="6583680" cy="822960"/>
+          </a:xfrm>
+          <a:prstGeom prst="rect">
+            <a:avLst/>
+          </a:prstGeom>
+          <a:noFill/>
+        </p:spPr>
+        <p:txBody>
+          <a:bodyPr wrap="square" anchor="ctr" lIns="0" rIns="0" tIns="0" bIns="0"/>
+          <a:lstStyle/>
+          <a:p>
+            <a:pPr algn="l"/>
+            <a:r>
+              <a:rPr sz="2000" b="0" i="0">
+                <a:solidFill>
+                  <a:srgbClr val="FFFFFF"/>
+                </a:solidFill>
+                <a:latin typeface="Calibri"/>
+              </a:rPr>
+              <a:t>What does a check digit protect against?</a:t>
+            </a:r>
+          </a:p>
+        </p:txBody>
+      </p:sp>
+      <p:sp>
+        <p:nvSpPr>
+          <p:cNvPr id="8" name="Oval 7"/>
+          <p:cNvSpPr/>
+          <p:nvPr/>
+        </p:nvSpPr>
+        <p:spPr>
+          <a:xfrm>
+            <a:off x="548640" y="3657600"/>
+            <a:ext cx="502920" cy="502920"/>
+          </a:xfrm>
+          <a:prstGeom prst="ellipse">
+            <a:avLst/>
+          </a:prstGeom>
+          <a:solidFill>
+            <a:srgbClr val="F2B705"/>
+          </a:solidFill>
+          <a:ln>
+            <a:noFill/>
+          </a:ln>
+          <a:effectLst/>
+        </p:spPr>
+        <p:style>
+          <a:lnRef idx="1">
+            <a:schemeClr val="accent1"/>
+          </a:lnRef>
+          <a:fillRef idx="3">
+            <a:schemeClr val="accent1"/>
+          </a:fillRef>
+          <a:effectRef idx="2">
+            <a:schemeClr val="accent1"/>
+          </a:effectRef>
+          <a:fontRef idx="minor">
+            <a:schemeClr val="lt1"/>
+          </a:fontRef>
+        </p:style>
+        <p:txBody>
+          <a:bodyPr rtlCol="0" anchor="ctr" lIns="0" rIns="0" tIns="0" bIns="0"/>
+          <a:lstStyle/>
+          <a:p>
+            <a:pPr algn="ctr"/>
+            <a:r>
+              <a:rPr sz="1700" b="1">
+                <a:solidFill>
+                  <a:srgbClr val="202122"/>
+                </a:solidFill>
+                <a:latin typeface="Calibri"/>
+              </a:rPr>
+              <a:t>3</a:t>
+            </a:r>
+          </a:p>
+        </p:txBody>
+      </p:sp>
+      <p:sp>
+        <p:nvSpPr>
+          <p:cNvPr id="9" name="TextBox 8"/>
+          <p:cNvSpPr txBox="1"/>
+          <p:nvPr/>
+        </p:nvSpPr>
+        <p:spPr>
+          <a:xfrm>
+            <a:off x="1325880" y="3566160"/>
+            <a:ext cx="6583680" cy="822960"/>
+          </a:xfrm>
+          <a:prstGeom prst="rect">
+            <a:avLst/>
+          </a:prstGeom>
+          <a:noFill/>
+        </p:spPr>
+        <p:txBody>
+          <a:bodyPr wrap="square" anchor="ctr" lIns="0" rIns="0" tIns="0" bIns="0"/>
+          <a:lstStyle/>
+          <a:p>
+            <a:pPr algn="l"/>
+            <a:r>
+              <a:rPr sz="2000" b="0" i="0">
+                <a:solidFill>
+                  <a:srgbClr val="FFFFFF"/>
+                </a:solidFill>
+                <a:latin typeface="Calibri"/>
+              </a:rPr>
+              <a:t>Why reuse a validation function instead of copying code?</a:t>
+            </a:r>
+          </a:p>
+        </p:txBody>
+      </p:sp>
+      <p:sp>
+        <p:nvSpPr>
+          <p:cNvPr id="10" name="Rounded Rectangle 9"/>
+          <p:cNvSpPr/>
+          <p:nvPr/>
+        </p:nvSpPr>
+        <p:spPr>
+          <a:xfrm>
+            <a:off x="8229600" y="1645920"/>
+            <a:ext cx="3410712" cy="2926080"/>
+          </a:xfrm>
+          <a:prstGeom prst="roundRect">
+            <a:avLst>
+              <a:gd name="adj" fmla="val 8000"/>
+            </a:avLst>
+          </a:prstGeom>
+          <a:solidFill>
+            <a:srgbClr val="0645AD"/>
+          </a:solidFill>
+          <a:ln>
+            <a:noFill/>
+          </a:ln>
+          <a:effectLst/>
+        </p:spPr>
+        <p:style>
+          <a:lnRef idx="1">
+            <a:schemeClr val="accent1"/>
+          </a:lnRef>
+          <a:fillRef idx="3">
+            <a:schemeClr val="accent1"/>
+          </a:fillRef>
+          <a:effectRef idx="2">
+            <a:schemeClr val="accent1"/>
+          </a:effectRef>
+          <a:fontRef idx="minor">
+            <a:schemeClr val="lt1"/>
+          </a:fontRef>
+        </p:style>
+        <p:txBody>
+          <a:bodyPr rtlCol="0" anchor="ctr"/>
+          <a:lstStyle/>
+          <a:p/>
+        </p:txBody>
+      </p:sp>
+      <p:sp>
+        <p:nvSpPr>
+          <p:cNvPr id="11" name="TextBox 10"/>
+          <p:cNvSpPr txBox="1"/>
+          <p:nvPr/>
+        </p:nvSpPr>
+        <p:spPr>
+          <a:xfrm>
+            <a:off x="8503920" y="1874519"/>
+            <a:ext cx="2926080" cy="365760"/>
+          </a:xfrm>
+          <a:prstGeom prst="rect">
+            <a:avLst/>
+          </a:prstGeom>
+          <a:noFill/>
+        </p:spPr>
+        <p:txBody>
+          <a:bodyPr wrap="square" anchor="t" lIns="0" rIns="0" tIns="0" bIns="0"/>
+          <a:lstStyle/>
+          <a:p>
+            <a:pPr algn="l"/>
+            <a:r>
+              <a:rPr sz="1300" b="1" i="0">
+                <a:solidFill>
+                  <a:srgbClr val="A9C8F0"/>
+                </a:solidFill>
+                <a:latin typeface="Calibri"/>
+              </a:rPr>
+              <a:t>REVISE THIS TOPIC</a:t>
+            </a:r>
+          </a:p>
+        </p:txBody>
+      </p:sp>
+      <p:sp>
+        <p:nvSpPr>
+          <p:cNvPr id="12" name="TextBox 11"/>
+          <p:cNvSpPr txBox="1"/>
+          <p:nvPr/>
+        </p:nvSpPr>
+        <p:spPr>
+          <a:xfrm>
+            <a:off x="8503920" y="2286000"/>
+            <a:ext cx="2926080" cy="548640"/>
+          </a:xfrm>
+          <a:prstGeom prst="rect">
+            <a:avLst/>
+          </a:prstGeom>
+          <a:noFill/>
+        </p:spPr>
+        <p:txBody>
+          <a:bodyPr wrap="square" anchor="t" lIns="0" rIns="0" tIns="0" bIns="0"/>
+          <a:lstStyle/>
+          <a:p>
+            <a:pPr algn="l"/>
+            <a:r>
+              <a:rPr sz="1400" b="0" i="0">
+                <a:solidFill>
+                  <a:srgbClr val="FFFFFF"/>
+                </a:solidFill>
+                <a:latin typeface="Calibri"/>
+              </a:rPr>
+              <a:t>Revision notes for this lesson are on the study wiki:</a:t>
+            </a:r>
+          </a:p>
+        </p:txBody>
+      </p:sp>
+      <p:sp>
+        <p:nvSpPr>
+          <p:cNvPr id="13" name="TextBox 12"/>
+          <p:cNvSpPr txBox="1"/>
+          <p:nvPr/>
+        </p:nvSpPr>
+        <p:spPr>
+          <a:xfrm>
+            <a:off x="8503920" y="2926080"/>
+            <a:ext cx="2926080" cy="1463040"/>
+          </a:xfrm>
+          <a:prstGeom prst="rect">
+            <a:avLst/>
+          </a:prstGeom>
+          <a:noFill/>
+        </p:spPr>
+        <p:txBody>
+          <a:bodyPr wrap="square" anchor="t" lIns="0" rIns="0" tIns="0" bIns="0"/>
+          <a:lstStyle/>
+          <a:p>
+            <a:pPr algn="l"/>
+            <a:r>
+              <a:rPr sz="2000" b="1" i="0">
+                <a:solidFill>
+                  <a:srgbClr val="FFFFFF"/>
+                </a:solidFill>
+                <a:latin typeface="Cambria"/>
+              </a:rPr>
+              <a:t>Core Paper 1: Problem Solving, Programming, Emerging Issues and Legislation</a:t>
+            </a:r>
+          </a:p>
+        </p:txBody>
+      </p:sp>
+      <p:sp>
+        <p:nvSpPr>
+          <p:cNvPr id="14" name="TextBox 13"/>
+          <p:cNvSpPr txBox="1"/>
+          <p:nvPr/>
+        </p:nvSpPr>
+        <p:spPr>
+          <a:xfrm>
+            <a:off x="548640" y="5669280"/>
+            <a:ext cx="11094415" cy="548640"/>
+          </a:xfrm>
+          <a:prstGeom prst="rect">
+            <a:avLst/>
+          </a:prstGeom>
+          <a:noFill/>
+        </p:spPr>
+        <p:txBody>
+          <a:bodyPr wrap="square" anchor="t" lIns="0" rIns="0" tIns="0" bIns="0"/>
+          <a:lstStyle/>
+          <a:p>
+            <a:pPr algn="l"/>
+            <a:r>
+              <a:rPr sz="1200" b="0" i="0">
+                <a:solidFill>
+                  <a:srgbClr val="A9C8F0"/>
+                </a:solidFill>
+                <a:latin typeface="Calibri"/>
+              </a:rPr>
+              <a:t>https://lana6478.github.io/T-level-Digital-Software-Development/#/01-core-component/01-core-paper-1.md</a:t>
+            </a:r>
+          </a:p>
+        </p:txBody>
+      </p:sp>
+    </p:spTree>
+  </p:cSld>
+  <p:clrMapOvr>
+    <a:masterClrMapping/>
+  </p:clrMapOvr>
+</p:sld>
+</file>
+
+<file path=ppt/slides/slide2.xml><?xml version="1.0" encoding="utf-8"?>
+<p:sld xmlns:a="http://schemas.openxmlformats.org/drawingml/2006/main" xmlns:p="http://schemas.openxmlformats.org/presentationml/2006/main" xmlns:r="http://schemas.openxmlformats.org/officeDocument/2006/relationships">
+  <p:cSld>
+    <p:bg>
+      <p:bgPr>
+        <a:solidFill>
+          <a:srgbClr val="FFFFFF"/>
+        </a:solidFill>
+        <a:effectLst/>
+      </p:bgPr>
+    </p:bg>
+    <p:spTree>
+      <p:nvGrpSpPr>
+        <p:cNvPr id="1" name=""/>
+        <p:cNvGrpSpPr/>
+        <p:nvPr/>
+      </p:nvGrpSpPr>
+      <p:grpSpPr/>
+      <p:sp>
+        <p:nvSpPr>
+          <p:cNvPr id="2" name="TextBox 1"/>
+          <p:cNvSpPr txBox="1"/>
+          <p:nvPr/>
+        </p:nvSpPr>
+        <p:spPr>
+          <a:xfrm>
+            <a:off x="548640" y="320040"/>
+            <a:ext cx="11094415" cy="274320"/>
+          </a:xfrm>
+          <a:prstGeom prst="rect">
+            <a:avLst/>
+          </a:prstGeom>
+          <a:noFill/>
+        </p:spPr>
+        <p:txBody>
+          <a:bodyPr wrap="square" anchor="t" lIns="0" rIns="0" tIns="0" bIns="0"/>
+          <a:lstStyle/>
+          <a:p>
+            <a:pPr algn="l"/>
+            <a:r>
+              <a:rPr sz="1100" b="1" i="0">
+                <a:solidFill>
+                  <a:srgbClr val="54595D"/>
+                </a:solidFill>
+                <a:latin typeface="Calibri"/>
+              </a:rPr>
+              <a:t>CORE COMPONENT  ·  Core Paper 1</a:t>
+            </a:r>
+          </a:p>
+        </p:txBody>
+      </p:sp>
+      <p:sp>
+        <p:nvSpPr>
+          <p:cNvPr id="3" name="TextBox 2"/>
+          <p:cNvSpPr txBox="1"/>
+          <p:nvPr/>
+        </p:nvSpPr>
+        <p:spPr>
+          <a:xfrm>
+            <a:off x="548640" y="566928"/>
+            <a:ext cx="11094415" cy="822960"/>
+          </a:xfrm>
+          <a:prstGeom prst="rect">
+            <a:avLst/>
+          </a:prstGeom>
+          <a:noFill/>
+        </p:spPr>
+        <p:txBody>
+          <a:bodyPr wrap="square" anchor="ctr" lIns="0" rIns="0" tIns="0" bIns="0"/>
+          <a:lstStyle/>
+          <a:p>
+            <a:pPr algn="l"/>
+            <a:r>
+              <a:rPr sz="3200" b="1" i="0">
+                <a:solidFill>
+                  <a:srgbClr val="03306E"/>
+                </a:solidFill>
+                <a:latin typeface="Cambria"/>
+              </a:rPr>
+              <a:t>Learning objectives</a:t>
+            </a:r>
+          </a:p>
+        </p:txBody>
+      </p:sp>
+      <p:sp>
+        <p:nvSpPr>
+          <p:cNvPr id="4" name="TextBox 3"/>
+          <p:cNvSpPr txBox="1"/>
+          <p:nvPr/>
+        </p:nvSpPr>
+        <p:spPr>
+          <a:xfrm>
+            <a:off x="548640" y="6446520"/>
+            <a:ext cx="8229600" cy="274320"/>
+          </a:xfrm>
+          <a:prstGeom prst="rect">
+            <a:avLst/>
+          </a:prstGeom>
+          <a:noFill/>
+        </p:spPr>
+        <p:txBody>
+          <a:bodyPr wrap="square" anchor="t" lIns="0" rIns="0" tIns="0" bIns="0"/>
+          <a:lstStyle/>
+          <a:p>
+            <a:pPr algn="l"/>
+            <a:r>
+              <a:rPr sz="1000" b="0" i="0">
+                <a:solidFill>
+                  <a:srgbClr val="54595D"/>
+                </a:solidFill>
+                <a:latin typeface="Calibri"/>
+              </a:rPr>
+              <a:t>Digital Software Development T Level  ·  Functions, Procedures and Validation</a:t>
+            </a:r>
+          </a:p>
+        </p:txBody>
+      </p:sp>
+      <p:sp>
+        <p:nvSpPr>
+          <p:cNvPr id="5" name="TextBox 4"/>
+          <p:cNvSpPr txBox="1"/>
+          <p:nvPr/>
+        </p:nvSpPr>
+        <p:spPr>
+          <a:xfrm>
+            <a:off x="10728655" y="6446520"/>
+            <a:ext cx="914400" cy="274320"/>
+          </a:xfrm>
+          <a:prstGeom prst="rect">
+            <a:avLst/>
+          </a:prstGeom>
+          <a:noFill/>
+        </p:spPr>
+        <p:txBody>
+          <a:bodyPr wrap="square" anchor="t" lIns="0" rIns="0" tIns="0" bIns="0"/>
+          <a:lstStyle/>
+          <a:p>
+            <a:pPr algn="r"/>
+            <a:r>
+              <a:rPr sz="1000" b="0" i="0">
+                <a:solidFill>
+                  <a:srgbClr val="54595D"/>
+                </a:solidFill>
+                <a:latin typeface="Calibri"/>
+              </a:rPr>
+              <a:t>2</a:t>
+            </a:r>
+          </a:p>
+        </p:txBody>
+      </p:sp>
+      <p:sp>
+        <p:nvSpPr>
+          <p:cNvPr id="6" name="TextBox 5"/>
+          <p:cNvSpPr txBox="1"/>
+          <p:nvPr/>
+        </p:nvSpPr>
+        <p:spPr>
+          <a:xfrm>
+            <a:off x="548640" y="1508760"/>
+            <a:ext cx="6766560" cy="365760"/>
+          </a:xfrm>
+          <a:prstGeom prst="rect">
+            <a:avLst/>
+          </a:prstGeom>
+          <a:noFill/>
+        </p:spPr>
+        <p:txBody>
+          <a:bodyPr wrap="square" anchor="t" lIns="0" rIns="0" tIns="0" bIns="0"/>
+          <a:lstStyle/>
+          <a:p>
+            <a:pPr algn="l"/>
+            <a:r>
+              <a:rPr sz="1600" b="0" i="1">
+                <a:solidFill>
+                  <a:srgbClr val="54595D"/>
+                </a:solidFill>
+                <a:latin typeface="Calibri"/>
+              </a:rPr>
+              <a:t>By the end of this lesson you should be able to:</a:t>
+            </a:r>
+          </a:p>
+        </p:txBody>
+      </p:sp>
+      <p:sp>
+        <p:nvSpPr>
+          <p:cNvPr id="7" name="Oval 6"/>
+          <p:cNvSpPr/>
+          <p:nvPr/>
+        </p:nvSpPr>
+        <p:spPr>
+          <a:xfrm>
+            <a:off x="548640" y="2240280"/>
+            <a:ext cx="457200" cy="457200"/>
+          </a:xfrm>
+          <a:prstGeom prst="ellipse">
+            <a:avLst/>
+          </a:prstGeom>
+          <a:solidFill>
+            <a:srgbClr val="F2B705"/>
+          </a:solidFill>
+          <a:ln>
+            <a:noFill/>
+          </a:ln>
+          <a:effectLst/>
+        </p:spPr>
+        <p:style>
+          <a:lnRef idx="1">
+            <a:schemeClr val="accent1"/>
+          </a:lnRef>
+          <a:fillRef idx="3">
+            <a:schemeClr val="accent1"/>
+          </a:fillRef>
+          <a:effectRef idx="2">
+            <a:schemeClr val="accent1"/>
+          </a:effectRef>
+          <a:fontRef idx="minor">
+            <a:schemeClr val="lt1"/>
+          </a:fontRef>
+        </p:style>
+        <p:txBody>
+          <a:bodyPr rtlCol="0" anchor="ctr" lIns="0" rIns="0" tIns="0" bIns="0"/>
+          <a:lstStyle/>
+          <a:p>
+            <a:pPr algn="ctr"/>
+            <a:r>
+              <a:rPr sz="1600" b="1">
+                <a:solidFill>
+                  <a:srgbClr val="202122"/>
+                </a:solidFill>
+                <a:latin typeface="Calibri"/>
+              </a:rPr>
+              <a:t>1</a:t>
+            </a:r>
+          </a:p>
+        </p:txBody>
+      </p:sp>
+      <p:sp>
+        <p:nvSpPr>
+          <p:cNvPr id="8" name="TextBox 7"/>
+          <p:cNvSpPr txBox="1"/>
+          <p:nvPr/>
+        </p:nvSpPr>
+        <p:spPr>
+          <a:xfrm>
+            <a:off x="1234440" y="2011680"/>
+            <a:ext cx="6035040" cy="914400"/>
+          </a:xfrm>
+          <a:prstGeom prst="rect">
+            <a:avLst/>
+          </a:prstGeom>
+          <a:noFill/>
+        </p:spPr>
+        <p:txBody>
+          <a:bodyPr wrap="square" anchor="ctr" lIns="0" rIns="0" tIns="0" bIns="0"/>
+          <a:lstStyle/>
+          <a:p>
+            <a:pPr algn="l"/>
+            <a:r>
+              <a:rPr sz="2000" b="0" i="0">
+                <a:solidFill>
+                  <a:srgbClr val="202122"/>
+                </a:solidFill>
+                <a:latin typeface="Calibri"/>
+              </a:rPr>
+              <a:t>Explain the difference between a function and a procedure.</a:t>
+            </a:r>
+          </a:p>
+        </p:txBody>
+      </p:sp>
+      <p:sp>
+        <p:nvSpPr>
+          <p:cNvPr id="9" name="Oval 8"/>
+          <p:cNvSpPr/>
+          <p:nvPr/>
+        </p:nvSpPr>
+        <p:spPr>
+          <a:xfrm>
+            <a:off x="548640" y="3291840"/>
+            <a:ext cx="457200" cy="457200"/>
+          </a:xfrm>
+          <a:prstGeom prst="ellipse">
+            <a:avLst/>
+          </a:prstGeom>
+          <a:solidFill>
+            <a:srgbClr val="F2B705"/>
+          </a:solidFill>
+          <a:ln>
+            <a:noFill/>
+          </a:ln>
+          <a:effectLst/>
+        </p:spPr>
+        <p:style>
+          <a:lnRef idx="1">
+            <a:schemeClr val="accent1"/>
+          </a:lnRef>
+          <a:fillRef idx="3">
+            <a:schemeClr val="accent1"/>
+          </a:fillRef>
+          <a:effectRef idx="2">
+            <a:schemeClr val="accent1"/>
+          </a:effectRef>
+          <a:fontRef idx="minor">
+            <a:schemeClr val="lt1"/>
+          </a:fontRef>
+        </p:style>
+        <p:txBody>
+          <a:bodyPr rtlCol="0" anchor="ctr" lIns="0" rIns="0" tIns="0" bIns="0"/>
+          <a:lstStyle/>
+          <a:p>
+            <a:pPr algn="ctr"/>
+            <a:r>
+              <a:rPr sz="1600" b="1">
+                <a:solidFill>
+                  <a:srgbClr val="202122"/>
+                </a:solidFill>
+                <a:latin typeface="Calibri"/>
+              </a:rPr>
+              <a:t>2</a:t>
+            </a:r>
+          </a:p>
+        </p:txBody>
+      </p:sp>
+      <p:sp>
+        <p:nvSpPr>
+          <p:cNvPr id="10" name="TextBox 9"/>
+          <p:cNvSpPr txBox="1"/>
+          <p:nvPr/>
+        </p:nvSpPr>
+        <p:spPr>
+          <a:xfrm>
+            <a:off x="1234440" y="3063240"/>
+            <a:ext cx="6035040" cy="914400"/>
+          </a:xfrm>
+          <a:prstGeom prst="rect">
+            <a:avLst/>
+          </a:prstGeom>
+          <a:noFill/>
+        </p:spPr>
+        <p:txBody>
+          <a:bodyPr wrap="square" anchor="ctr" lIns="0" rIns="0" tIns="0" bIns="0"/>
+          <a:lstStyle/>
+          <a:p>
+            <a:pPr algn="l"/>
+            <a:r>
+              <a:rPr sz="2000" b="0" i="0">
+                <a:solidFill>
+                  <a:srgbClr val="202122"/>
+                </a:solidFill>
+                <a:latin typeface="Calibri"/>
+              </a:rPr>
+              <a:t>Compare user-written, built-in and library subroutines.</a:t>
+            </a:r>
+          </a:p>
+        </p:txBody>
+      </p:sp>
+      <p:sp>
+        <p:nvSpPr>
+          <p:cNvPr id="11" name="Oval 10"/>
+          <p:cNvSpPr/>
+          <p:nvPr/>
+        </p:nvSpPr>
+        <p:spPr>
+          <a:xfrm>
+            <a:off x="548640" y="4343400"/>
+            <a:ext cx="457200" cy="457200"/>
+          </a:xfrm>
+          <a:prstGeom prst="ellipse">
+            <a:avLst/>
+          </a:prstGeom>
+          <a:solidFill>
+            <a:srgbClr val="F2B705"/>
+          </a:solidFill>
+          <a:ln>
+            <a:noFill/>
+          </a:ln>
+          <a:effectLst/>
+        </p:spPr>
+        <p:style>
+          <a:lnRef idx="1">
+            <a:schemeClr val="accent1"/>
+          </a:lnRef>
+          <a:fillRef idx="3">
+            <a:schemeClr val="accent1"/>
+          </a:fillRef>
+          <a:effectRef idx="2">
+            <a:schemeClr val="accent1"/>
+          </a:effectRef>
+          <a:fontRef idx="minor">
+            <a:schemeClr val="lt1"/>
+          </a:fontRef>
+        </p:style>
+        <p:txBody>
+          <a:bodyPr rtlCol="0" anchor="ctr" lIns="0" rIns="0" tIns="0" bIns="0"/>
+          <a:lstStyle/>
+          <a:p>
+            <a:pPr algn="ctr"/>
+            <a:r>
+              <a:rPr sz="1600" b="1">
+                <a:solidFill>
+                  <a:srgbClr val="202122"/>
+                </a:solidFill>
+                <a:latin typeface="Calibri"/>
+              </a:rPr>
+              <a:t>3</a:t>
+            </a:r>
+          </a:p>
+        </p:txBody>
+      </p:sp>
+      <p:sp>
+        <p:nvSpPr>
+          <p:cNvPr id="12" name="TextBox 11"/>
+          <p:cNvSpPr txBox="1"/>
+          <p:nvPr/>
+        </p:nvSpPr>
+        <p:spPr>
+          <a:xfrm>
+            <a:off x="1234440" y="4114800"/>
+            <a:ext cx="6035040" cy="914400"/>
+          </a:xfrm>
+          <a:prstGeom prst="rect">
+            <a:avLst/>
+          </a:prstGeom>
+          <a:noFill/>
+        </p:spPr>
+        <p:txBody>
+          <a:bodyPr wrap="square" anchor="ctr" lIns="0" rIns="0" tIns="0" bIns="0"/>
+          <a:lstStyle/>
+          <a:p>
+            <a:pPr algn="l"/>
+            <a:r>
+              <a:rPr sz="2000" b="0" i="0">
+                <a:solidFill>
+                  <a:srgbClr val="202122"/>
+                </a:solidFill>
+                <a:latin typeface="Calibri"/>
+              </a:rPr>
+              <a:t>Write validation checks in code.</a:t>
+            </a:r>
+          </a:p>
+        </p:txBody>
+      </p:sp>
+      <p:sp>
+        <p:nvSpPr>
+          <p:cNvPr id="13" name="Rounded Rectangle 12"/>
+          <p:cNvSpPr/>
+          <p:nvPr/>
+        </p:nvSpPr>
+        <p:spPr>
+          <a:xfrm>
+            <a:off x="7772400" y="1508760"/>
+            <a:ext cx="3867912" cy="4526280"/>
+          </a:xfrm>
+          <a:prstGeom prst="roundRect">
+            <a:avLst>
+              <a:gd name="adj" fmla="val 8000"/>
+            </a:avLst>
+          </a:prstGeom>
+          <a:solidFill>
+            <a:srgbClr val="EAF3FF"/>
+          </a:solidFill>
+          <a:ln>
+            <a:noFill/>
+          </a:ln>
+          <a:effectLst/>
+        </p:spPr>
+        <p:style>
+          <a:lnRef idx="1">
+            <a:schemeClr val="accent1"/>
+          </a:lnRef>
+          <a:fillRef idx="3">
+            <a:schemeClr val="accent1"/>
+          </a:fillRef>
+          <a:effectRef idx="2">
+            <a:schemeClr val="accent1"/>
+          </a:effectRef>
+          <a:fontRef idx="minor">
+            <a:schemeClr val="lt1"/>
+          </a:fontRef>
+        </p:style>
+        <p:txBody>
+          <a:bodyPr rtlCol="0" anchor="ctr"/>
+          <a:lstStyle/>
+          <a:p/>
+        </p:txBody>
+      </p:sp>
+      <p:sp>
+        <p:nvSpPr>
+          <p:cNvPr id="14" name="TextBox 13"/>
+          <p:cNvSpPr txBox="1"/>
+          <p:nvPr/>
+        </p:nvSpPr>
+        <p:spPr>
+          <a:xfrm>
+            <a:off x="8046720" y="1737360"/>
+            <a:ext cx="3291840" cy="365760"/>
+          </a:xfrm>
+          <a:prstGeom prst="rect">
+            <a:avLst/>
+          </a:prstGeom>
+          <a:noFill/>
+        </p:spPr>
+        <p:txBody>
+          <a:bodyPr wrap="square" anchor="t" lIns="0" rIns="0" tIns="0" bIns="0"/>
+          <a:lstStyle/>
+          <a:p>
+            <a:pPr algn="l"/>
+            <a:r>
+              <a:rPr sz="1300" b="1" i="0">
+                <a:solidFill>
+                  <a:srgbClr val="0645AD"/>
+                </a:solidFill>
+                <a:latin typeface="Calibri"/>
+              </a:rPr>
+              <a:t>STARTER</a:t>
+            </a:r>
+          </a:p>
+        </p:txBody>
+      </p:sp>
+      <p:sp>
+        <p:nvSpPr>
+          <p:cNvPr id="15" name="TextBox 14"/>
+          <p:cNvSpPr txBox="1"/>
+          <p:nvPr/>
+        </p:nvSpPr>
+        <p:spPr>
+          <a:xfrm>
+            <a:off x="8046720" y="2194560"/>
+            <a:ext cx="3291840" cy="3657600"/>
+          </a:xfrm>
+          <a:prstGeom prst="rect">
+            <a:avLst/>
+          </a:prstGeom>
+          <a:noFill/>
+        </p:spPr>
+        <p:txBody>
+          <a:bodyPr wrap="square" anchor="t" lIns="0" rIns="0" tIns="0" bIns="0"/>
+          <a:lstStyle/>
+          <a:p>
+            <a:pPr algn="l"/>
+            <a:r>
+              <a:rPr sz="2200" b="0" i="0">
+                <a:solidFill>
+                  <a:srgbClr val="03306E"/>
+                </a:solidFill>
+                <a:latin typeface="Cambria"/>
+              </a:rPr>
+              <a:t>You need to check an email address in five places in your program. Would you copy the code five times? Why not?</a:t>
+            </a:r>
+          </a:p>
+        </p:txBody>
+      </p:sp>
+    </p:spTree>
+  </p:cSld>
+  <p:clrMapOvr>
+    <a:masterClrMapping/>
+  </p:clrMapOvr>
+</p:sld>
+</file>
+
+<file path=ppt/slides/slide3.xml><?xml version="1.0" encoding="utf-8"?>
+<p:sld xmlns:a="http://schemas.openxmlformats.org/drawingml/2006/main" xmlns:p="http://schemas.openxmlformats.org/presentationml/2006/main" xmlns:r="http://schemas.openxmlformats.org/officeDocument/2006/relationships">
+  <p:cSld>
+    <p:bg>
+      <p:bgPr>
+        <a:solidFill>
+          <a:srgbClr val="FFFFFF"/>
+        </a:solidFill>
+        <a:effectLst/>
+      </p:bgPr>
+    </p:bg>
+    <p:spTree>
+      <p:nvGrpSpPr>
+        <p:cNvPr id="1" name=""/>
+        <p:cNvGrpSpPr/>
+        <p:nvPr/>
+      </p:nvGrpSpPr>
+      <p:grpSpPr/>
+      <p:sp>
+        <p:nvSpPr>
+          <p:cNvPr id="2" name="TextBox 1"/>
+          <p:cNvSpPr txBox="1"/>
+          <p:nvPr/>
+        </p:nvSpPr>
+        <p:spPr>
+          <a:xfrm>
+            <a:off x="548640" y="320040"/>
+            <a:ext cx="11094415" cy="274320"/>
+          </a:xfrm>
+          <a:prstGeom prst="rect">
+            <a:avLst/>
+          </a:prstGeom>
+          <a:noFill/>
+        </p:spPr>
+        <p:txBody>
+          <a:bodyPr wrap="square" anchor="t" lIns="0" rIns="0" tIns="0" bIns="0"/>
+          <a:lstStyle/>
+          <a:p>
+            <a:pPr algn="l"/>
+            <a:r>
+              <a:rPr sz="1100" b="1" i="0">
+                <a:solidFill>
+                  <a:srgbClr val="54595D"/>
+                </a:solidFill>
+                <a:latin typeface="Calibri"/>
+              </a:rPr>
+              <a:t>CORE COMPONENT  ·  Core Paper 1</a:t>
+            </a:r>
+          </a:p>
+        </p:txBody>
+      </p:sp>
+      <p:sp>
+        <p:nvSpPr>
+          <p:cNvPr id="3" name="TextBox 2"/>
+          <p:cNvSpPr txBox="1"/>
+          <p:nvPr/>
+        </p:nvSpPr>
+        <p:spPr>
+          <a:xfrm>
+            <a:off x="548640" y="566928"/>
+            <a:ext cx="11094415" cy="822960"/>
+          </a:xfrm>
+          <a:prstGeom prst="rect">
+            <a:avLst/>
+          </a:prstGeom>
+          <a:noFill/>
+        </p:spPr>
+        <p:txBody>
+          <a:bodyPr wrap="square" anchor="ctr" lIns="0" rIns="0" tIns="0" bIns="0"/>
+          <a:lstStyle/>
+          <a:p>
+            <a:pPr algn="l"/>
+            <a:r>
+              <a:rPr sz="3200" b="1" i="0">
+                <a:solidFill>
+                  <a:srgbClr val="03306E"/>
+                </a:solidFill>
+                <a:latin typeface="Cambria"/>
+              </a:rPr>
+              <a:t>Functions and procedures</a:t>
+            </a:r>
+          </a:p>
+        </p:txBody>
+      </p:sp>
+      <p:sp>
+        <p:nvSpPr>
+          <p:cNvPr id="4" name="TextBox 3"/>
+          <p:cNvSpPr txBox="1"/>
+          <p:nvPr/>
+        </p:nvSpPr>
+        <p:spPr>
+          <a:xfrm>
+            <a:off x="548640" y="6446520"/>
+            <a:ext cx="8229600" cy="274320"/>
+          </a:xfrm>
+          <a:prstGeom prst="rect">
+            <a:avLst/>
+          </a:prstGeom>
+          <a:noFill/>
+        </p:spPr>
+        <p:txBody>
+          <a:bodyPr wrap="square" anchor="t" lIns="0" rIns="0" tIns="0" bIns="0"/>
+          <a:lstStyle/>
+          <a:p>
+            <a:pPr algn="l"/>
+            <a:r>
+              <a:rPr sz="1000" b="0" i="0">
+                <a:solidFill>
+                  <a:srgbClr val="54595D"/>
+                </a:solidFill>
+                <a:latin typeface="Calibri"/>
+              </a:rPr>
+              <a:t>Digital Software Development T Level  ·  Functions, Procedures and Validation</a:t>
+            </a:r>
+          </a:p>
+        </p:txBody>
+      </p:sp>
+      <p:sp>
+        <p:nvSpPr>
+          <p:cNvPr id="5" name="TextBox 4"/>
+          <p:cNvSpPr txBox="1"/>
+          <p:nvPr/>
+        </p:nvSpPr>
+        <p:spPr>
+          <a:xfrm>
+            <a:off x="10728655" y="6446520"/>
+            <a:ext cx="914400" cy="274320"/>
+          </a:xfrm>
+          <a:prstGeom prst="rect">
+            <a:avLst/>
+          </a:prstGeom>
+          <a:noFill/>
+        </p:spPr>
+        <p:txBody>
+          <a:bodyPr wrap="square" anchor="t" lIns="0" rIns="0" tIns="0" bIns="0"/>
+          <a:lstStyle/>
+          <a:p>
+            <a:pPr algn="r"/>
+            <a:r>
+              <a:rPr sz="1000" b="0" i="0">
+                <a:solidFill>
+                  <a:srgbClr val="54595D"/>
+                </a:solidFill>
+                <a:latin typeface="Calibri"/>
+              </a:rPr>
+              <a:t>3</a:t>
+            </a:r>
+          </a:p>
+        </p:txBody>
+      </p:sp>
+      <p:sp>
+        <p:nvSpPr>
+          <p:cNvPr id="6" name="TextBox 5"/>
+          <p:cNvSpPr txBox="1"/>
+          <p:nvPr/>
+        </p:nvSpPr>
+        <p:spPr>
+          <a:xfrm>
+            <a:off x="548640" y="1554480"/>
+            <a:ext cx="6720840" cy="4617720"/>
+          </a:xfrm>
+          <a:prstGeom prst="rect">
+            <a:avLst/>
+          </a:prstGeom>
+          <a:noFill/>
+        </p:spPr>
+        <p:txBody>
+          <a:bodyPr wrap="square" lIns="0" rIns="0" tIns="0" bIns="0">
+            <a:spAutoFit/>
+          </a:bodyPr>
+          <a:lstStyle/>
+          <a:p>
+            <a:pPr>
+              <a:spcAft>
+                <a:spcPts val="1320"/>
+              </a:spcAft>
+            </a:pPr>
+            <a:r>
+              <a:rPr sz="2200" b="0">
+                <a:solidFill>
+                  <a:srgbClr val="202122"/>
+                </a:solidFill>
+                <a:latin typeface="Calibri"/>
+              </a:rPr>
+              <a:t>Subroutines are named blocks of code you can call whenever you need them, so you don't repeat code.</a:t>
+            </a:r>
+          </a:p>
+          <a:p>
+            <a:pPr>
+              <a:spcAft>
+                <a:spcPts val="1320"/>
+              </a:spcAft>
+            </a:pPr>
+            <a:r>
+              <a:rPr sz="2200" b="0">
+                <a:solidFill>
+                  <a:srgbClr val="202122"/>
+                </a:solidFill>
+                <a:latin typeface="Calibri"/>
+              </a:rPr>
+              <a:t>A function may take parameters and must return a result, which the calling code can use.</a:t>
+            </a:r>
+          </a:p>
+          <a:p>
+            <a:pPr>
+              <a:spcAft>
+                <a:spcPts val="1320"/>
+              </a:spcAft>
+            </a:pPr>
+            <a:r>
+              <a:rPr sz="2200" b="0">
+                <a:solidFill>
+                  <a:srgbClr val="202122"/>
+                </a:solidFill>
+                <a:latin typeface="Calibri"/>
+              </a:rPr>
+              <a:t>A procedure may take parameters but doesn't return a result; it just does something, such as printing or saving.</a:t>
+            </a:r>
+          </a:p>
+          <a:p>
+            <a:pPr>
+              <a:spcAft>
+                <a:spcPts val="1320"/>
+              </a:spcAft>
+            </a:pPr>
+            <a:r>
+              <a:rPr sz="2200" b="0">
+                <a:solidFill>
+                  <a:srgbClr val="202122"/>
+                </a:solidFill>
+                <a:latin typeface="Calibri"/>
+              </a:rPr>
+              <a:t>Parameters are the values passed in. Using subroutines makes code shorter, easier to test and easier to change: fix the subroutine once and every call benefits.</a:t>
+            </a:r>
+          </a:p>
+        </p:txBody>
+      </p:sp>
+      <p:sp>
+        <p:nvSpPr>
+          <p:cNvPr id="7" name="Rounded Rectangle 6"/>
+          <p:cNvSpPr/>
+          <p:nvPr/>
+        </p:nvSpPr>
+        <p:spPr>
+          <a:xfrm>
+            <a:off x="7772400" y="1554480"/>
+            <a:ext cx="3867912" cy="4526280"/>
+          </a:xfrm>
+          <a:prstGeom prst="roundRect">
+            <a:avLst>
+              <a:gd name="adj" fmla="val 8000"/>
+            </a:avLst>
+          </a:prstGeom>
+          <a:solidFill>
+            <a:srgbClr val="03306E"/>
+          </a:solidFill>
+          <a:ln>
+            <a:noFill/>
+          </a:ln>
+          <a:effectLst/>
+        </p:spPr>
+        <p:style>
+          <a:lnRef idx="1">
+            <a:schemeClr val="accent1"/>
+          </a:lnRef>
+          <a:fillRef idx="3">
+            <a:schemeClr val="accent1"/>
+          </a:fillRef>
+          <a:effectRef idx="2">
+            <a:schemeClr val="accent1"/>
+          </a:effectRef>
+          <a:fontRef idx="minor">
+            <a:schemeClr val="lt1"/>
+          </a:fontRef>
+        </p:style>
+        <p:txBody>
+          <a:bodyPr rtlCol="0" anchor="ctr"/>
+          <a:lstStyle/>
+          <a:p/>
+        </p:txBody>
+      </p:sp>
+      <p:sp>
+        <p:nvSpPr>
+          <p:cNvPr id="8" name="Oval 7"/>
+          <p:cNvSpPr/>
+          <p:nvPr/>
+        </p:nvSpPr>
+        <p:spPr>
+          <a:xfrm>
+            <a:off x="8046720" y="1828800"/>
+            <a:ext cx="548640" cy="548640"/>
+          </a:xfrm>
+          <a:prstGeom prst="ellipse">
+            <a:avLst/>
+          </a:prstGeom>
+          <a:solidFill>
+            <a:srgbClr val="F2B705"/>
+          </a:solidFill>
+          <a:ln>
+            <a:noFill/>
+          </a:ln>
+          <a:effectLst/>
+        </p:spPr>
+        <p:style>
+          <a:lnRef idx="1">
+            <a:schemeClr val="accent1"/>
+          </a:lnRef>
+          <a:fillRef idx="3">
+            <a:schemeClr val="accent1"/>
+          </a:fillRef>
+          <a:effectRef idx="2">
+            <a:schemeClr val="accent1"/>
+          </a:effectRef>
+          <a:fontRef idx="minor">
+            <a:schemeClr val="lt1"/>
+          </a:fontRef>
+        </p:style>
+        <p:txBody>
+          <a:bodyPr rtlCol="0" anchor="ctr" lIns="0" rIns="0" tIns="0" bIns="0"/>
+          <a:lstStyle/>
+          <a:p>
+            <a:pPr algn="ctr"/>
+            <a:r>
+              <a:rPr sz="1300" b="1">
+                <a:solidFill>
+                  <a:srgbClr val="202122"/>
+                </a:solidFill>
+                <a:latin typeface="Calibri"/>
+              </a:rPr>
+              <a:t>e.g.</a:t>
+            </a:r>
+          </a:p>
+        </p:txBody>
+      </p:sp>
+      <p:sp>
+        <p:nvSpPr>
+          <p:cNvPr id="9" name="TextBox 8"/>
+          <p:cNvSpPr txBox="1"/>
+          <p:nvPr/>
+        </p:nvSpPr>
+        <p:spPr>
+          <a:xfrm>
+            <a:off x="8046720" y="2560320"/>
+            <a:ext cx="3291840" cy="365760"/>
+          </a:xfrm>
+          <a:prstGeom prst="rect">
+            <a:avLst/>
+          </a:prstGeom>
+          <a:noFill/>
+        </p:spPr>
+        <p:txBody>
+          <a:bodyPr wrap="square" anchor="t" lIns="0" rIns="0" tIns="0" bIns="0"/>
+          <a:lstStyle/>
+          <a:p>
+            <a:pPr algn="l"/>
+            <a:r>
+              <a:rPr sz="1300" b="1" i="0">
+                <a:solidFill>
+                  <a:srgbClr val="A9C8F0"/>
+                </a:solidFill>
+                <a:latin typeface="Calibri"/>
+              </a:rPr>
+              <a:t>EXAMPLE</a:t>
+            </a:r>
+          </a:p>
+        </p:txBody>
+      </p:sp>
+      <p:sp>
+        <p:nvSpPr>
+          <p:cNvPr id="10" name="TextBox 9"/>
+          <p:cNvSpPr txBox="1"/>
+          <p:nvPr/>
+        </p:nvSpPr>
+        <p:spPr>
+          <a:xfrm>
+            <a:off x="8046720" y="2971800"/>
+            <a:ext cx="3291840" cy="2971800"/>
+          </a:xfrm>
+          <a:prstGeom prst="rect">
+            <a:avLst/>
+          </a:prstGeom>
+          <a:noFill/>
+        </p:spPr>
+        <p:txBody>
+          <a:bodyPr wrap="square" anchor="t" lIns="0" rIns="0" tIns="0" bIns="0"/>
+          <a:lstStyle/>
+          <a:p>
+            <a:pPr algn="l"/>
+            <a:r>
+              <a:rPr sz="1900" b="0" i="0">
+                <a:solidFill>
+                  <a:srgbClr val="FFFFFF"/>
+                </a:solidFill>
+                <a:latin typeface="Cambria"/>
+              </a:rPr>
+              <a:t>def vat(price): return price * 0.2 is a function: total = price + vat(price). def welcome(name): print('Hi', name) is a procedure.</a:t>
+            </a:r>
+          </a:p>
+        </p:txBody>
+      </p:sp>
+    </p:spTree>
+  </p:cSld>
+  <p:clrMapOvr>
+    <a:masterClrMapping/>
+  </p:clrMapOvr>
+</p:sld>
+</file>
+
+<file path=ppt/slides/slide4.xml><?xml version="1.0" encoding="utf-8"?>
+<p:sld xmlns:a="http://schemas.openxmlformats.org/drawingml/2006/main" xmlns:p="http://schemas.openxmlformats.org/presentationml/2006/main" xmlns:r="http://schemas.openxmlformats.org/officeDocument/2006/relationships">
+  <p:cSld>
+    <p:bg>
+      <p:bgPr>
+        <a:solidFill>
+          <a:srgbClr val="FFFFFF"/>
+        </a:solidFill>
+        <a:effectLst/>
+      </p:bgPr>
+    </p:bg>
+    <p:spTree>
+      <p:nvGrpSpPr>
+        <p:cNvPr id="1" name=""/>
+        <p:cNvGrpSpPr/>
+        <p:nvPr/>
+      </p:nvGrpSpPr>
+      <p:grpSpPr/>
+      <p:sp>
+        <p:nvSpPr>
+          <p:cNvPr id="2" name="TextBox 1"/>
+          <p:cNvSpPr txBox="1"/>
+          <p:nvPr/>
+        </p:nvSpPr>
+        <p:spPr>
+          <a:xfrm>
+            <a:off x="548640" y="320040"/>
+            <a:ext cx="11094415" cy="274320"/>
+          </a:xfrm>
+          <a:prstGeom prst="rect">
+            <a:avLst/>
+          </a:prstGeom>
+          <a:noFill/>
+        </p:spPr>
+        <p:txBody>
+          <a:bodyPr wrap="square" anchor="t" lIns="0" rIns="0" tIns="0" bIns="0"/>
+          <a:lstStyle/>
+          <a:p>
+            <a:pPr algn="l"/>
+            <a:r>
+              <a:rPr sz="1100" b="1" i="0">
+                <a:solidFill>
+                  <a:srgbClr val="54595D"/>
+                </a:solidFill>
+                <a:latin typeface="Calibri"/>
+              </a:rPr>
+              <a:t>CORE COMPONENT  ·  Core Paper 1</a:t>
+            </a:r>
+          </a:p>
+        </p:txBody>
+      </p:sp>
+      <p:sp>
+        <p:nvSpPr>
+          <p:cNvPr id="3" name="TextBox 2"/>
+          <p:cNvSpPr txBox="1"/>
+          <p:nvPr/>
+        </p:nvSpPr>
+        <p:spPr>
+          <a:xfrm>
+            <a:off x="548640" y="566928"/>
+            <a:ext cx="11094415" cy="822960"/>
+          </a:xfrm>
+          <a:prstGeom prst="rect">
+            <a:avLst/>
+          </a:prstGeom>
+          <a:noFill/>
+        </p:spPr>
+        <p:txBody>
+          <a:bodyPr wrap="square" anchor="ctr" lIns="0" rIns="0" tIns="0" bIns="0"/>
+          <a:lstStyle/>
+          <a:p>
+            <a:pPr algn="l"/>
+            <a:r>
+              <a:rPr sz="3200" b="1" i="0">
+                <a:solidFill>
+                  <a:srgbClr val="03306E"/>
+                </a:solidFill>
+                <a:latin typeface="Cambria"/>
+              </a:rPr>
+              <a:t>Functions and procedures</a:t>
+            </a:r>
+          </a:p>
+        </p:txBody>
+      </p:sp>
+      <p:sp>
+        <p:nvSpPr>
+          <p:cNvPr id="4" name="TextBox 3"/>
+          <p:cNvSpPr txBox="1"/>
+          <p:nvPr/>
+        </p:nvSpPr>
+        <p:spPr>
+          <a:xfrm>
+            <a:off x="548640" y="6446520"/>
+            <a:ext cx="8229600" cy="274320"/>
+          </a:xfrm>
+          <a:prstGeom prst="rect">
+            <a:avLst/>
+          </a:prstGeom>
+          <a:noFill/>
+        </p:spPr>
+        <p:txBody>
+          <a:bodyPr wrap="square" anchor="t" lIns="0" rIns="0" tIns="0" bIns="0"/>
+          <a:lstStyle/>
+          <a:p>
+            <a:pPr algn="l"/>
+            <a:r>
+              <a:rPr sz="1000" b="0" i="0">
+                <a:solidFill>
+                  <a:srgbClr val="54595D"/>
+                </a:solidFill>
+                <a:latin typeface="Calibri"/>
+              </a:rPr>
+              <a:t>Digital Software Development T Level  ·  Functions, Procedures and Validation</a:t>
+            </a:r>
+          </a:p>
+        </p:txBody>
+      </p:sp>
+      <p:sp>
+        <p:nvSpPr>
+          <p:cNvPr id="5" name="TextBox 4"/>
+          <p:cNvSpPr txBox="1"/>
+          <p:nvPr/>
+        </p:nvSpPr>
+        <p:spPr>
+          <a:xfrm>
+            <a:off x="10728655" y="6446520"/>
+            <a:ext cx="914400" cy="274320"/>
+          </a:xfrm>
+          <a:prstGeom prst="rect">
+            <a:avLst/>
+          </a:prstGeom>
+          <a:noFill/>
+        </p:spPr>
+        <p:txBody>
+          <a:bodyPr wrap="square" anchor="t" lIns="0" rIns="0" tIns="0" bIns="0"/>
+          <a:lstStyle/>
+          <a:p>
+            <a:pPr algn="r"/>
+            <a:r>
+              <a:rPr sz="1000" b="0" i="0">
+                <a:solidFill>
+                  <a:srgbClr val="54595D"/>
+                </a:solidFill>
+                <a:latin typeface="Calibri"/>
+              </a:rPr>
+              <a:t>4</a:t>
+            </a:r>
+          </a:p>
+        </p:txBody>
+      </p:sp>
+      <p:sp>
+        <p:nvSpPr>
+          <p:cNvPr id="6" name="Rounded Rectangle 5"/>
+          <p:cNvSpPr/>
+          <p:nvPr/>
+        </p:nvSpPr>
+        <p:spPr>
+          <a:xfrm>
+            <a:off x="548640" y="1600200"/>
+            <a:ext cx="5364327" cy="640080"/>
+          </a:xfrm>
+          <a:prstGeom prst="roundRect">
+            <a:avLst>
+              <a:gd name="adj" fmla="val 15000"/>
+            </a:avLst>
+          </a:prstGeom>
+          <a:solidFill>
+            <a:srgbClr val="03306E"/>
+          </a:solidFill>
+          <a:ln>
+            <a:noFill/>
+          </a:ln>
+          <a:effectLst/>
+        </p:spPr>
+        <p:style>
+          <a:lnRef idx="1">
+            <a:schemeClr val="accent1"/>
+          </a:lnRef>
+          <a:fillRef idx="3">
+            <a:schemeClr val="accent1"/>
+          </a:fillRef>
+          <a:effectRef idx="2">
+            <a:schemeClr val="accent1"/>
+          </a:effectRef>
+          <a:fontRef idx="minor">
+            <a:schemeClr val="lt1"/>
+          </a:fontRef>
+        </p:style>
+        <p:txBody>
+          <a:bodyPr rtlCol="0" anchor="ctr"/>
+          <a:lstStyle/>
+          <a:p/>
+        </p:txBody>
+      </p:sp>
+      <p:sp>
+        <p:nvSpPr>
+          <p:cNvPr id="7" name="TextBox 6"/>
+          <p:cNvSpPr txBox="1"/>
+          <p:nvPr/>
+        </p:nvSpPr>
+        <p:spPr>
+          <a:xfrm>
+            <a:off x="777240" y="1600200"/>
+            <a:ext cx="4907127" cy="640080"/>
+          </a:xfrm>
+          <a:prstGeom prst="rect">
+            <a:avLst/>
+          </a:prstGeom>
+          <a:noFill/>
+        </p:spPr>
+        <p:txBody>
+          <a:bodyPr wrap="square" anchor="ctr" lIns="0" rIns="0" tIns="0" bIns="0"/>
+          <a:lstStyle/>
+          <a:p>
+            <a:pPr algn="l"/>
+            <a:r>
+              <a:rPr sz="2000" b="1" i="0">
+                <a:solidFill>
+                  <a:srgbClr val="FFFFFF"/>
+                </a:solidFill>
+                <a:latin typeface="Calibri"/>
+              </a:rPr>
+              <a:t>Function</a:t>
+            </a:r>
+          </a:p>
+        </p:txBody>
+      </p:sp>
+      <p:sp>
+        <p:nvSpPr>
+          <p:cNvPr id="8" name="Rounded Rectangle 7"/>
+          <p:cNvSpPr/>
+          <p:nvPr/>
+        </p:nvSpPr>
+        <p:spPr>
+          <a:xfrm>
+            <a:off x="548640" y="2377440"/>
+            <a:ext cx="5364327" cy="3794760"/>
+          </a:xfrm>
+          <a:prstGeom prst="roundRect">
+            <a:avLst>
+              <a:gd name="adj" fmla="val 4000"/>
+            </a:avLst>
+          </a:prstGeom>
+          <a:solidFill>
+            <a:srgbClr val="EAF3FF"/>
+          </a:solidFill>
+          <a:ln>
+            <a:noFill/>
+          </a:ln>
+          <a:effectLst/>
+        </p:spPr>
+        <p:style>
+          <a:lnRef idx="1">
+            <a:schemeClr val="accent1"/>
+          </a:lnRef>
+          <a:fillRef idx="3">
+            <a:schemeClr val="accent1"/>
+          </a:fillRef>
+          <a:effectRef idx="2">
+            <a:schemeClr val="accent1"/>
+          </a:effectRef>
+          <a:fontRef idx="minor">
+            <a:schemeClr val="lt1"/>
+          </a:fontRef>
+        </p:style>
+        <p:txBody>
+          <a:bodyPr rtlCol="0" anchor="ctr"/>
+          <a:lstStyle/>
+          <a:p/>
+        </p:txBody>
+      </p:sp>
+      <p:sp>
+        <p:nvSpPr>
+          <p:cNvPr id="9" name="TextBox 8"/>
+          <p:cNvSpPr txBox="1"/>
+          <p:nvPr/>
+        </p:nvSpPr>
+        <p:spPr>
+          <a:xfrm>
+            <a:off x="822959" y="2606040"/>
+            <a:ext cx="4815687" cy="3337560"/>
+          </a:xfrm>
+          <a:prstGeom prst="rect">
+            <a:avLst/>
+          </a:prstGeom>
+          <a:noFill/>
+        </p:spPr>
+        <p:txBody>
+          <a:bodyPr wrap="square" lIns="0" rIns="0" tIns="0" bIns="0">
+            <a:spAutoFit/>
+          </a:bodyPr>
+          <a:lstStyle/>
+          <a:p>
+            <a:pPr marL="274320" indent="-274320">
+              <a:spcAft>
+                <a:spcPts val="990"/>
+              </a:spcAft>
+              <a:buClr>
+                <a:srgbClr val="0645AD"/>
+              </a:buClr>
+              <a:buFont typeface="Arial"/>
+              <a:buChar char="•"/>
+            </a:pPr>
+            <a:r>
+              <a:rPr sz="2200" b="0">
+                <a:solidFill>
+                  <a:srgbClr val="202122"/>
+                </a:solidFill>
+                <a:latin typeface="Calibri"/>
+              </a:rPr>
+              <a:t>May take parameters</a:t>
+            </a:r>
+          </a:p>
+          <a:p>
+            <a:pPr marL="274320" indent="-274320">
+              <a:spcAft>
+                <a:spcPts val="990"/>
+              </a:spcAft>
+              <a:buClr>
+                <a:srgbClr val="0645AD"/>
+              </a:buClr>
+              <a:buFont typeface="Arial"/>
+              <a:buChar char="•"/>
+            </a:pPr>
+            <a:r>
+              <a:rPr sz="2200" b="0">
+                <a:solidFill>
+                  <a:srgbClr val="202122"/>
+                </a:solidFill>
+                <a:latin typeface="Calibri"/>
+              </a:rPr>
+              <a:t>Must return a result</a:t>
+            </a:r>
+          </a:p>
+          <a:p>
+            <a:pPr marL="274320" indent="-274320">
+              <a:spcAft>
+                <a:spcPts val="990"/>
+              </a:spcAft>
+              <a:buClr>
+                <a:srgbClr val="0645AD"/>
+              </a:buClr>
+              <a:buFont typeface="Arial"/>
+              <a:buChar char="•"/>
+            </a:pPr>
+            <a:r>
+              <a:rPr sz="2200" b="1">
+                <a:solidFill>
+                  <a:srgbClr val="202122"/>
+                </a:solidFill>
+                <a:latin typeface="Calibri"/>
+              </a:rPr>
+              <a:t>Example:</a:t>
+            </a:r>
+            <a:r>
+              <a:rPr sz="2200" b="0">
+                <a:solidFill>
+                  <a:srgbClr val="202122"/>
+                </a:solidFill>
+                <a:latin typeface="Calibri"/>
+              </a:rPr>
+              <a:t> def area(w, h): return w * h</a:t>
+            </a:r>
+          </a:p>
+        </p:txBody>
+      </p:sp>
+      <p:sp>
+        <p:nvSpPr>
+          <p:cNvPr id="10" name="Rounded Rectangle 9"/>
+          <p:cNvSpPr/>
+          <p:nvPr/>
+        </p:nvSpPr>
+        <p:spPr>
+          <a:xfrm>
+            <a:off x="6278727" y="1600200"/>
+            <a:ext cx="5364327" cy="640080"/>
+          </a:xfrm>
+          <a:prstGeom prst="roundRect">
+            <a:avLst>
+              <a:gd name="adj" fmla="val 15000"/>
+            </a:avLst>
+          </a:prstGeom>
+          <a:solidFill>
+            <a:srgbClr val="0645AD"/>
+          </a:solidFill>
+          <a:ln>
+            <a:noFill/>
+          </a:ln>
+          <a:effectLst/>
+        </p:spPr>
+        <p:style>
+          <a:lnRef idx="1">
+            <a:schemeClr val="accent1"/>
+          </a:lnRef>
+          <a:fillRef idx="3">
+            <a:schemeClr val="accent1"/>
+          </a:fillRef>
+          <a:effectRef idx="2">
+            <a:schemeClr val="accent1"/>
+          </a:effectRef>
+          <a:fontRef idx="minor">
+            <a:schemeClr val="lt1"/>
+          </a:fontRef>
+        </p:style>
+        <p:txBody>
+          <a:bodyPr rtlCol="0" anchor="ctr"/>
+          <a:lstStyle/>
+          <a:p/>
+        </p:txBody>
+      </p:sp>
+      <p:sp>
+        <p:nvSpPr>
+          <p:cNvPr id="11" name="TextBox 10"/>
+          <p:cNvSpPr txBox="1"/>
+          <p:nvPr/>
+        </p:nvSpPr>
+        <p:spPr>
+          <a:xfrm>
+            <a:off x="6507327" y="1600200"/>
+            <a:ext cx="4907127" cy="640080"/>
+          </a:xfrm>
+          <a:prstGeom prst="rect">
+            <a:avLst/>
+          </a:prstGeom>
+          <a:noFill/>
+        </p:spPr>
+        <p:txBody>
+          <a:bodyPr wrap="square" anchor="ctr" lIns="0" rIns="0" tIns="0" bIns="0"/>
+          <a:lstStyle/>
+          <a:p>
+            <a:pPr algn="l"/>
+            <a:r>
+              <a:rPr sz="2000" b="1" i="0">
+                <a:solidFill>
+                  <a:srgbClr val="FFFFFF"/>
+                </a:solidFill>
+                <a:latin typeface="Calibri"/>
+              </a:rPr>
+              <a:t>Procedure</a:t>
+            </a:r>
+          </a:p>
+        </p:txBody>
+      </p:sp>
+      <p:sp>
+        <p:nvSpPr>
+          <p:cNvPr id="12" name="Rounded Rectangle 11"/>
+          <p:cNvSpPr/>
+          <p:nvPr/>
+        </p:nvSpPr>
+        <p:spPr>
+          <a:xfrm>
+            <a:off x="6278727" y="2377440"/>
+            <a:ext cx="5364327" cy="3794760"/>
+          </a:xfrm>
+          <a:prstGeom prst="roundRect">
+            <a:avLst>
+              <a:gd name="adj" fmla="val 4000"/>
+            </a:avLst>
+          </a:prstGeom>
+          <a:solidFill>
+            <a:srgbClr val="EAF3FF"/>
+          </a:solidFill>
+          <a:ln>
+            <a:noFill/>
+          </a:ln>
+          <a:effectLst/>
+        </p:spPr>
+        <p:style>
+          <a:lnRef idx="1">
+            <a:schemeClr val="accent1"/>
+          </a:lnRef>
+          <a:fillRef idx="3">
+            <a:schemeClr val="accent1"/>
+          </a:fillRef>
+          <a:effectRef idx="2">
+            <a:schemeClr val="accent1"/>
+          </a:effectRef>
+          <a:fontRef idx="minor">
+            <a:schemeClr val="lt1"/>
+          </a:fontRef>
+        </p:style>
+        <p:txBody>
+          <a:bodyPr rtlCol="0" anchor="ctr"/>
+          <a:lstStyle/>
+          <a:p/>
+        </p:txBody>
+      </p:sp>
+      <p:sp>
+        <p:nvSpPr>
+          <p:cNvPr id="13" name="TextBox 12"/>
+          <p:cNvSpPr txBox="1"/>
+          <p:nvPr/>
+        </p:nvSpPr>
+        <p:spPr>
+          <a:xfrm>
+            <a:off x="6553047" y="2606040"/>
+            <a:ext cx="4815687" cy="3337560"/>
+          </a:xfrm>
+          <a:prstGeom prst="rect">
+            <a:avLst/>
+          </a:prstGeom>
+          <a:noFill/>
+        </p:spPr>
+        <p:txBody>
+          <a:bodyPr wrap="square" lIns="0" rIns="0" tIns="0" bIns="0">
+            <a:spAutoFit/>
+          </a:bodyPr>
+          <a:lstStyle/>
+          <a:p>
+            <a:pPr marL="274320" indent="-274320">
+              <a:spcAft>
+                <a:spcPts val="990"/>
+              </a:spcAft>
+              <a:buClr>
+                <a:srgbClr val="0645AD"/>
+              </a:buClr>
+              <a:buFont typeface="Arial"/>
+              <a:buChar char="•"/>
+            </a:pPr>
+            <a:r>
+              <a:rPr sz="2200" b="0">
+                <a:solidFill>
+                  <a:srgbClr val="202122"/>
+                </a:solidFill>
+                <a:latin typeface="Calibri"/>
+              </a:rPr>
+              <a:t>May take parameters</a:t>
+            </a:r>
+          </a:p>
+          <a:p>
+            <a:pPr marL="274320" indent="-274320">
+              <a:spcAft>
+                <a:spcPts val="990"/>
+              </a:spcAft>
+              <a:buClr>
+                <a:srgbClr val="0645AD"/>
+              </a:buClr>
+              <a:buFont typeface="Arial"/>
+              <a:buChar char="•"/>
+            </a:pPr>
+            <a:r>
+              <a:rPr sz="2200" b="0">
+                <a:solidFill>
+                  <a:srgbClr val="202122"/>
+                </a:solidFill>
+                <a:latin typeface="Calibri"/>
+              </a:rPr>
+              <a:t>Does not return a result</a:t>
+            </a:r>
+          </a:p>
+          <a:p>
+            <a:pPr marL="274320" indent="-274320">
+              <a:spcAft>
+                <a:spcPts val="990"/>
+              </a:spcAft>
+              <a:buClr>
+                <a:srgbClr val="0645AD"/>
+              </a:buClr>
+              <a:buFont typeface="Arial"/>
+              <a:buChar char="•"/>
+            </a:pPr>
+            <a:r>
+              <a:rPr sz="2200" b="1">
+                <a:solidFill>
+                  <a:srgbClr val="202122"/>
+                </a:solidFill>
+                <a:latin typeface="Calibri"/>
+              </a:rPr>
+              <a:t>Example:</a:t>
+            </a:r>
+            <a:r>
+              <a:rPr sz="2200" b="0">
+                <a:solidFill>
+                  <a:srgbClr val="202122"/>
+                </a:solidFill>
+                <a:latin typeface="Calibri"/>
+              </a:rPr>
+              <a:t> def greet(name): print('Hello', name)</a:t>
+            </a:r>
+          </a:p>
+        </p:txBody>
+      </p:sp>
+    </p:spTree>
+  </p:cSld>
+  <p:clrMapOvr>
+    <a:masterClrMapping/>
+  </p:clrMapOvr>
+</p:sld>
+</file>
+
+<file path=ppt/slides/slide5.xml><?xml version="1.0" encoding="utf-8"?>
+<p:sld xmlns:a="http://schemas.openxmlformats.org/drawingml/2006/main" xmlns:p="http://schemas.openxmlformats.org/presentationml/2006/main" xmlns:r="http://schemas.openxmlformats.org/officeDocument/2006/relationships">
+  <p:cSld>
+    <p:bg>
+      <p:bgPr>
+        <a:solidFill>
+          <a:srgbClr val="FFFFFF"/>
+        </a:solidFill>
+        <a:effectLst/>
+      </p:bgPr>
+    </p:bg>
+    <p:spTree>
+      <p:nvGrpSpPr>
+        <p:cNvPr id="1" name=""/>
+        <p:cNvGrpSpPr/>
+        <p:nvPr/>
+      </p:nvGrpSpPr>
+      <p:grpSpPr/>
+      <p:sp>
+        <p:nvSpPr>
+          <p:cNvPr id="2" name="TextBox 1"/>
+          <p:cNvSpPr txBox="1"/>
+          <p:nvPr/>
+        </p:nvSpPr>
+        <p:spPr>
+          <a:xfrm>
+            <a:off x="548640" y="320040"/>
+            <a:ext cx="11094415" cy="274320"/>
+          </a:xfrm>
+          <a:prstGeom prst="rect">
+            <a:avLst/>
+          </a:prstGeom>
+          <a:noFill/>
+        </p:spPr>
+        <p:txBody>
+          <a:bodyPr wrap="square" anchor="t" lIns="0" rIns="0" tIns="0" bIns="0"/>
+          <a:lstStyle/>
+          <a:p>
+            <a:pPr algn="l"/>
+            <a:r>
+              <a:rPr sz="1100" b="1" i="0">
+                <a:solidFill>
+                  <a:srgbClr val="54595D"/>
+                </a:solidFill>
+                <a:latin typeface="Calibri"/>
+              </a:rPr>
+              <a:t>CORE COMPONENT  ·  Core Paper 1</a:t>
+            </a:r>
+          </a:p>
+        </p:txBody>
+      </p:sp>
+      <p:sp>
+        <p:nvSpPr>
+          <p:cNvPr id="3" name="TextBox 2"/>
+          <p:cNvSpPr txBox="1"/>
+          <p:nvPr/>
+        </p:nvSpPr>
+        <p:spPr>
+          <a:xfrm>
+            <a:off x="548640" y="566928"/>
+            <a:ext cx="11094415" cy="822960"/>
+          </a:xfrm>
+          <a:prstGeom prst="rect">
+            <a:avLst/>
+          </a:prstGeom>
+          <a:noFill/>
+        </p:spPr>
+        <p:txBody>
+          <a:bodyPr wrap="square" anchor="ctr" lIns="0" rIns="0" tIns="0" bIns="0"/>
+          <a:lstStyle/>
+          <a:p>
+            <a:pPr algn="l"/>
+            <a:r>
+              <a:rPr sz="3200" b="1" i="0">
+                <a:solidFill>
+                  <a:srgbClr val="03306E"/>
+                </a:solidFill>
+                <a:latin typeface="Cambria"/>
+              </a:rPr>
+              <a:t>Quick check: Functions and procedures</a:t>
+            </a:r>
+          </a:p>
+        </p:txBody>
+      </p:sp>
+      <p:sp>
+        <p:nvSpPr>
+          <p:cNvPr id="4" name="TextBox 3"/>
+          <p:cNvSpPr txBox="1"/>
+          <p:nvPr/>
+        </p:nvSpPr>
+        <p:spPr>
+          <a:xfrm>
+            <a:off x="548640" y="6446520"/>
+            <a:ext cx="8229600" cy="274320"/>
+          </a:xfrm>
+          <a:prstGeom prst="rect">
+            <a:avLst/>
+          </a:prstGeom>
+          <a:noFill/>
+        </p:spPr>
+        <p:txBody>
+          <a:bodyPr wrap="square" anchor="t" lIns="0" rIns="0" tIns="0" bIns="0"/>
+          <a:lstStyle/>
+          <a:p>
+            <a:pPr algn="l"/>
+            <a:r>
+              <a:rPr sz="1000" b="0" i="0">
+                <a:solidFill>
+                  <a:srgbClr val="54595D"/>
+                </a:solidFill>
+                <a:latin typeface="Calibri"/>
+              </a:rPr>
+              <a:t>Digital Software Development T Level  ·  Functions, Procedures and Validation</a:t>
+            </a:r>
+          </a:p>
+        </p:txBody>
+      </p:sp>
+      <p:sp>
+        <p:nvSpPr>
+          <p:cNvPr id="5" name="TextBox 4"/>
+          <p:cNvSpPr txBox="1"/>
+          <p:nvPr/>
+        </p:nvSpPr>
+        <p:spPr>
+          <a:xfrm>
+            <a:off x="10728655" y="6446520"/>
+            <a:ext cx="914400" cy="274320"/>
+          </a:xfrm>
+          <a:prstGeom prst="rect">
+            <a:avLst/>
+          </a:prstGeom>
+          <a:noFill/>
+        </p:spPr>
+        <p:txBody>
+          <a:bodyPr wrap="square" anchor="t" lIns="0" rIns="0" tIns="0" bIns="0"/>
+          <a:lstStyle/>
+          <a:p>
+            <a:pPr algn="r"/>
+            <a:r>
+              <a:rPr sz="1000" b="0" i="0">
+                <a:solidFill>
+                  <a:srgbClr val="54595D"/>
+                </a:solidFill>
+                <a:latin typeface="Calibri"/>
+              </a:rPr>
+              <a:t>5</a:t>
+            </a:r>
+          </a:p>
+        </p:txBody>
+      </p:sp>
+      <p:sp>
+        <p:nvSpPr>
+          <p:cNvPr id="6" name="Oval 5"/>
+          <p:cNvSpPr/>
+          <p:nvPr/>
+        </p:nvSpPr>
+        <p:spPr>
+          <a:xfrm>
+            <a:off x="548640" y="1691640"/>
+            <a:ext cx="502920" cy="502920"/>
+          </a:xfrm>
+          <a:prstGeom prst="ellipse">
+            <a:avLst/>
+          </a:prstGeom>
+          <a:solidFill>
+            <a:srgbClr val="F2B705"/>
+          </a:solidFill>
+          <a:ln>
+            <a:noFill/>
+          </a:ln>
+          <a:effectLst/>
+        </p:spPr>
+        <p:style>
+          <a:lnRef idx="1">
+            <a:schemeClr val="accent1"/>
+          </a:lnRef>
+          <a:fillRef idx="3">
+            <a:schemeClr val="accent1"/>
+          </a:fillRef>
+          <a:effectRef idx="2">
+            <a:schemeClr val="accent1"/>
+          </a:effectRef>
+          <a:fontRef idx="minor">
+            <a:schemeClr val="lt1"/>
+          </a:fontRef>
+        </p:style>
+        <p:txBody>
+          <a:bodyPr rtlCol="0" anchor="ctr" lIns="0" rIns="0" tIns="0" bIns="0"/>
+          <a:lstStyle/>
+          <a:p>
+            <a:pPr algn="ctr"/>
+            <a:r>
+              <a:rPr sz="1600" b="1">
+                <a:solidFill>
+                  <a:srgbClr val="202122"/>
+                </a:solidFill>
+                <a:latin typeface="Calibri"/>
+              </a:rPr>
+              <a:t>1</a:t>
+            </a:r>
+          </a:p>
+        </p:txBody>
+      </p:sp>
+      <p:sp>
+        <p:nvSpPr>
+          <p:cNvPr id="7" name="TextBox 6"/>
+          <p:cNvSpPr txBox="1"/>
+          <p:nvPr/>
+        </p:nvSpPr>
+        <p:spPr>
+          <a:xfrm>
+            <a:off x="1371600" y="1645920"/>
+            <a:ext cx="10271455" cy="1188720"/>
+          </a:xfrm>
+          <a:prstGeom prst="rect">
+            <a:avLst/>
+          </a:prstGeom>
+          <a:noFill/>
+        </p:spPr>
+        <p:txBody>
+          <a:bodyPr wrap="square" anchor="t" lIns="0" rIns="0" tIns="0" bIns="0"/>
+          <a:lstStyle/>
+          <a:p>
+            <a:pPr algn="l"/>
+            <a:r>
+              <a:rPr sz="2400" b="0" i="0">
+                <a:solidFill>
+                  <a:srgbClr val="202122"/>
+                </a:solidFill>
+                <a:latin typeface="Calibri"/>
+              </a:rPr>
+              <a:t>What must a function do?</a:t>
+            </a:r>
+          </a:p>
+        </p:txBody>
+      </p:sp>
+      <p:sp>
+        <p:nvSpPr>
+          <p:cNvPr id="8" name="Oval 7"/>
+          <p:cNvSpPr/>
+          <p:nvPr/>
+        </p:nvSpPr>
+        <p:spPr>
+          <a:xfrm>
+            <a:off x="548640" y="3108960"/>
+            <a:ext cx="502920" cy="502920"/>
+          </a:xfrm>
+          <a:prstGeom prst="ellipse">
+            <a:avLst/>
+          </a:prstGeom>
+          <a:solidFill>
+            <a:srgbClr val="F2B705"/>
+          </a:solidFill>
+          <a:ln>
+            <a:noFill/>
+          </a:ln>
+          <a:effectLst/>
+        </p:spPr>
+        <p:style>
+          <a:lnRef idx="1">
+            <a:schemeClr val="accent1"/>
+          </a:lnRef>
+          <a:fillRef idx="3">
+            <a:schemeClr val="accent1"/>
+          </a:fillRef>
+          <a:effectRef idx="2">
+            <a:schemeClr val="accent1"/>
+          </a:effectRef>
+          <a:fontRef idx="minor">
+            <a:schemeClr val="lt1"/>
+          </a:fontRef>
+        </p:style>
+        <p:txBody>
+          <a:bodyPr rtlCol="0" anchor="ctr" lIns="0" rIns="0" tIns="0" bIns="0"/>
+          <a:lstStyle/>
+          <a:p>
+            <a:pPr algn="ctr"/>
+            <a:r>
+              <a:rPr sz="1600" b="1">
+                <a:solidFill>
+                  <a:srgbClr val="202122"/>
+                </a:solidFill>
+                <a:latin typeface="Calibri"/>
+              </a:rPr>
+              <a:t>2</a:t>
+            </a:r>
+          </a:p>
+        </p:txBody>
+      </p:sp>
+      <p:sp>
+        <p:nvSpPr>
+          <p:cNvPr id="9" name="TextBox 8"/>
+          <p:cNvSpPr txBox="1"/>
+          <p:nvPr/>
+        </p:nvSpPr>
+        <p:spPr>
+          <a:xfrm>
+            <a:off x="1371600" y="3063240"/>
+            <a:ext cx="10271455" cy="1188720"/>
+          </a:xfrm>
+          <a:prstGeom prst="rect">
+            <a:avLst/>
+          </a:prstGeom>
+          <a:noFill/>
+        </p:spPr>
+        <p:txBody>
+          <a:bodyPr wrap="square" anchor="t" lIns="0" rIns="0" tIns="0" bIns="0"/>
+          <a:lstStyle/>
+          <a:p>
+            <a:pPr algn="l"/>
+            <a:r>
+              <a:rPr sz="2400" b="0" i="0">
+                <a:solidFill>
+                  <a:srgbClr val="202122"/>
+                </a:solidFill>
+                <a:latin typeface="Calibri"/>
+              </a:rPr>
+              <a:t>What is a parameter?</a:t>
+            </a:r>
+          </a:p>
+        </p:txBody>
+      </p:sp>
+      <p:sp>
+        <p:nvSpPr>
+          <p:cNvPr id="10" name="Oval 9"/>
+          <p:cNvSpPr/>
+          <p:nvPr/>
+        </p:nvSpPr>
+        <p:spPr>
+          <a:xfrm>
+            <a:off x="548640" y="4526280"/>
+            <a:ext cx="502920" cy="502920"/>
+          </a:xfrm>
+          <a:prstGeom prst="ellipse">
+            <a:avLst/>
+          </a:prstGeom>
+          <a:solidFill>
+            <a:srgbClr val="F2B705"/>
+          </a:solidFill>
+          <a:ln>
+            <a:noFill/>
+          </a:ln>
+          <a:effectLst/>
+        </p:spPr>
+        <p:style>
+          <a:lnRef idx="1">
+            <a:schemeClr val="accent1"/>
+          </a:lnRef>
+          <a:fillRef idx="3">
+            <a:schemeClr val="accent1"/>
+          </a:fillRef>
+          <a:effectRef idx="2">
+            <a:schemeClr val="accent1"/>
+          </a:effectRef>
+          <a:fontRef idx="minor">
+            <a:schemeClr val="lt1"/>
+          </a:fontRef>
+        </p:style>
+        <p:txBody>
+          <a:bodyPr rtlCol="0" anchor="ctr" lIns="0" rIns="0" tIns="0" bIns="0"/>
+          <a:lstStyle/>
+          <a:p>
+            <a:pPr algn="ctr"/>
+            <a:r>
+              <a:rPr sz="1600" b="1">
+                <a:solidFill>
+                  <a:srgbClr val="202122"/>
+                </a:solidFill>
+                <a:latin typeface="Calibri"/>
+              </a:rPr>
+              <a:t>3</a:t>
+            </a:r>
+          </a:p>
+        </p:txBody>
+      </p:sp>
+      <p:sp>
+        <p:nvSpPr>
+          <p:cNvPr id="11" name="TextBox 10"/>
+          <p:cNvSpPr txBox="1"/>
+          <p:nvPr/>
+        </p:nvSpPr>
+        <p:spPr>
+          <a:xfrm>
+            <a:off x="1371600" y="4480560"/>
+            <a:ext cx="10271455" cy="1188720"/>
+          </a:xfrm>
+          <a:prstGeom prst="rect">
+            <a:avLst/>
+          </a:prstGeom>
+          <a:noFill/>
+        </p:spPr>
+        <p:txBody>
+          <a:bodyPr wrap="square" anchor="t" lIns="0" rIns="0" tIns="0" bIns="0"/>
+          <a:lstStyle/>
+          <a:p>
+            <a:pPr algn="l"/>
+            <a:r>
+              <a:rPr sz="2400" b="0" i="0">
+                <a:solidFill>
+                  <a:srgbClr val="202122"/>
+                </a:solidFill>
+                <a:latin typeface="Calibri"/>
+              </a:rPr>
+              <a:t>Why use subroutines?</a:t>
+            </a:r>
+          </a:p>
+        </p:txBody>
+      </p:sp>
+      <p:sp>
+        <p:nvSpPr>
+          <p:cNvPr id="12" name="TextBox 11"/>
+          <p:cNvSpPr txBox="1"/>
+          <p:nvPr/>
+        </p:nvSpPr>
+        <p:spPr>
+          <a:xfrm>
+            <a:off x="548640" y="5852160"/>
+            <a:ext cx="11094415" cy="365760"/>
+          </a:xfrm>
+          <a:prstGeom prst="rect">
+            <a:avLst/>
+          </a:prstGeom>
+          <a:noFill/>
+        </p:spPr>
+        <p:txBody>
+          <a:bodyPr wrap="square" anchor="t" lIns="0" rIns="0" tIns="0" bIns="0"/>
+          <a:lstStyle/>
+          <a:p>
+            <a:pPr algn="l"/>
+            <a:r>
+              <a:rPr sz="1300" b="0" i="1">
+                <a:solidFill>
+                  <a:srgbClr val="54595D"/>
+                </a:solidFill>
+                <a:latin typeface="Calibri"/>
+              </a:rPr>
+              <a:t>Answer on mini whiteboards or in your book. Answers are in the speaker notes.</a:t>
+            </a:r>
+          </a:p>
+        </p:txBody>
+      </p:sp>
+    </p:spTree>
+  </p:cSld>
+  <p:clrMapOvr>
+    <a:masterClrMapping/>
+  </p:clrMapOvr>
+</p:sld>
+</file>
+
 <file path=ppt/slides/slide6.xml><?xml version="1.0" encoding="utf-8"?>
 <p:sld xmlns:a="http://schemas.openxmlformats.org/drawingml/2006/main" xmlns:p="http://schemas.openxmlformats.org/presentationml/2006/main" xmlns:r="http://schemas.openxmlformats.org/officeDocument/2006/relationships">
   <p:cSld>
@@ -6389,7 +9780,7 @@
                 </a:solidFill>
                 <a:latin typeface="Cambria"/>
               </a:rPr>
-              <a:t>Check your understanding</a:t>
+              <a:t>Where subroutines come from</a:t>
             </a:r>
           </a:p>
         </p:txBody>
@@ -6462,14 +9853,161 @@
       </p:sp>
       <p:sp>
         <p:nvSpPr>
-          <p:cNvPr id="6" name="Oval 5"/>
+          <p:cNvPr id="6" name="TextBox 5"/>
+          <p:cNvSpPr txBox="1"/>
+          <p:nvPr/>
+        </p:nvSpPr>
+        <p:spPr>
+          <a:xfrm>
+            <a:off x="548640" y="1554480"/>
+            <a:ext cx="6720840" cy="4617720"/>
+          </a:xfrm>
+          <a:prstGeom prst="rect">
+            <a:avLst/>
+          </a:prstGeom>
+          <a:noFill/>
+        </p:spPr>
+        <p:txBody>
+          <a:bodyPr wrap="square" lIns="0" rIns="0" tIns="0" bIns="0">
+            <a:spAutoFit/>
+          </a:bodyPr>
+          <a:lstStyle/>
+          <a:p>
+            <a:pPr>
+              <a:spcAft>
+                <a:spcPts val="1260"/>
+              </a:spcAft>
+            </a:pPr>
+            <a:r>
+              <a:rPr sz="2100" b="0">
+                <a:solidFill>
+                  <a:srgbClr val="202122"/>
+                </a:solidFill>
+                <a:latin typeface="Calibri"/>
+              </a:rPr>
+              <a:t>You don't have to write every subroutine yourself.</a:t>
+            </a:r>
+          </a:p>
+          <a:p>
+            <a:pPr>
+              <a:spcAft>
+                <a:spcPts val="1260"/>
+              </a:spcAft>
+            </a:pPr>
+            <a:r>
+              <a:rPr sz="2100" b="0">
+                <a:solidFill>
+                  <a:srgbClr val="202122"/>
+                </a:solidFill>
+                <a:latin typeface="Calibri"/>
+              </a:rPr>
+              <a:t>User-written subroutines do exactly what you need, but you must write and test them.</a:t>
+            </a:r>
+          </a:p>
+          <a:p>
+            <a:pPr>
+              <a:spcAft>
+                <a:spcPts val="1260"/>
+              </a:spcAft>
+            </a:pPr>
+            <a:r>
+              <a:rPr sz="2100" b="0">
+                <a:solidFill>
+                  <a:srgbClr val="202122"/>
+                </a:solidFill>
+                <a:latin typeface="Calibri"/>
+              </a:rPr>
+              <a:t>Built-in functions, such as len(), round() and max(), are always available, reliable and fast.</a:t>
+            </a:r>
+          </a:p>
+          <a:p>
+            <a:pPr>
+              <a:spcAft>
+                <a:spcPts val="1260"/>
+              </a:spcAft>
+            </a:pPr>
+            <a:r>
+              <a:rPr sz="2100" b="0">
+                <a:solidFill>
+                  <a:srgbClr val="202122"/>
+                </a:solidFill>
+                <a:latin typeface="Calibri"/>
+              </a:rPr>
+              <a:t>Standard libraries, such as math and random, are part of Python but need importing: import math, then math.sqrt(16).</a:t>
+            </a:r>
+          </a:p>
+          <a:p>
+            <a:pPr>
+              <a:spcAft>
+                <a:spcPts val="1260"/>
+              </a:spcAft>
+            </a:pPr>
+            <a:r>
+              <a:rPr sz="2100" b="0">
+                <a:solidFill>
+                  <a:srgbClr val="202122"/>
+                </a:solidFill>
+                <a:latin typeface="Calibri"/>
+              </a:rPr>
+              <a:t>Third-party libraries, such as pandas and Matplotlib, add powerful features but create dependencies to install and update, and can introduce security risks.</a:t>
+            </a:r>
+          </a:p>
+        </p:txBody>
+      </p:sp>
+      <p:sp>
+        <p:nvSpPr>
+          <p:cNvPr id="7" name="Rounded Rectangle 6"/>
           <p:cNvSpPr/>
           <p:nvPr/>
         </p:nvSpPr>
         <p:spPr>
           <a:xfrm>
-            <a:off x="548640" y="1618488"/>
-            <a:ext cx="411480" cy="411480"/>
+            <a:off x="7772400" y="1554480"/>
+            <a:ext cx="3867912" cy="4526280"/>
+          </a:xfrm>
+          <a:prstGeom prst="roundRect">
+            <a:avLst>
+              <a:gd name="adj" fmla="val 8000"/>
+            </a:avLst>
+          </a:prstGeom>
+          <a:solidFill>
+            <a:srgbClr val="03306E"/>
+          </a:solidFill>
+          <a:ln>
+            <a:noFill/>
+          </a:ln>
+          <a:effectLst/>
+        </p:spPr>
+        <p:style>
+          <a:lnRef idx="1">
+            <a:schemeClr val="accent1"/>
+          </a:lnRef>
+          <a:fillRef idx="3">
+            <a:schemeClr val="accent1"/>
+          </a:fillRef>
+          <a:effectRef idx="2">
+            <a:schemeClr val="accent1"/>
+          </a:effectRef>
+          <a:fontRef idx="minor">
+            <a:schemeClr val="lt1"/>
+          </a:fontRef>
+        </p:style>
+        <p:txBody>
+          <a:bodyPr rtlCol="0" anchor="ctr"/>
+          <a:lstStyle/>
+          <a:p/>
+        </p:txBody>
+      </p:sp>
+      <p:sp>
+        <p:nvSpPr>
+          <p:cNvPr id="8" name="Oval 7"/>
+          <p:cNvSpPr/>
+          <p:nvPr/>
+        </p:nvSpPr>
+        <p:spPr>
+          <a:xfrm>
+            <a:off x="8046720" y="1828800"/>
+            <a:ext cx="548640" cy="548640"/>
           </a:xfrm>
           <a:prstGeom prst="ellipse">
             <a:avLst/>
@@ -6502,99 +10040,13 @@
           <a:p>
             <a:pPr algn="ctr"/>
             <a:r>
-              <a:rPr sz="1400" b="1">
+              <a:rPr sz="1300" b="1">
                 <a:solidFill>
                   <a:srgbClr val="202122"/>
                 </a:solidFill>
                 <a:latin typeface="Calibri"/>
               </a:rPr>
-              <a:t>1</a:t>
-            </a:r>
-          </a:p>
-        </p:txBody>
-      </p:sp>
-      <p:sp>
-        <p:nvSpPr>
-          <p:cNvPr id="7" name="TextBox 6"/>
-          <p:cNvSpPr txBox="1"/>
-          <p:nvPr/>
-        </p:nvSpPr>
-        <p:spPr>
-          <a:xfrm>
-            <a:off x="1234440" y="1600200"/>
-            <a:ext cx="10408615" cy="1030986"/>
-          </a:xfrm>
-          <a:prstGeom prst="rect">
-            <a:avLst/>
-          </a:prstGeom>
-          <a:noFill/>
-        </p:spPr>
-        <p:txBody>
-          <a:bodyPr wrap="square" anchor="t" lIns="0" rIns="0" tIns="0" bIns="0"/>
-          <a:lstStyle/>
-          <a:p>
-            <a:pPr algn="l"/>
-            <a:r>
-              <a:rPr sz="2200" b="0" i="0">
-                <a:solidFill>
-                  <a:srgbClr val="202122"/>
-                </a:solidFill>
-                <a:latin typeface="Calibri"/>
-              </a:rPr>
-              <a:t>What must a function do that a procedure does not?</a:t>
-            </a:r>
-          </a:p>
-        </p:txBody>
-      </p:sp>
-      <p:sp>
-        <p:nvSpPr>
-          <p:cNvPr id="8" name="Oval 7"/>
-          <p:cNvSpPr/>
-          <p:nvPr/>
-        </p:nvSpPr>
-        <p:spPr>
-          <a:xfrm>
-            <a:off x="548640" y="2814066"/>
-            <a:ext cx="411480" cy="411480"/>
-          </a:xfrm>
-          <a:prstGeom prst="ellipse">
-            <a:avLst/>
-          </a:prstGeom>
-          <a:solidFill>
-            <a:srgbClr val="F2B705"/>
-          </a:solidFill>
-          <a:ln>
-            <a:noFill/>
-          </a:ln>
-          <a:effectLst/>
-        </p:spPr>
-        <p:style>
-          <a:lnRef idx="1">
-            <a:schemeClr val="accent1"/>
-          </a:lnRef>
-          <a:fillRef idx="3">
-            <a:schemeClr val="accent1"/>
-          </a:fillRef>
-          <a:effectRef idx="2">
-            <a:schemeClr val="accent1"/>
-          </a:effectRef>
-          <a:fontRef idx="minor">
-            <a:schemeClr val="lt1"/>
-          </a:fontRef>
-        </p:style>
-        <p:txBody>
-          <a:bodyPr rtlCol="0" anchor="ctr" lIns="0" rIns="0" tIns="0" bIns="0"/>
-          <a:lstStyle/>
-          <a:p>
-            <a:pPr algn="ctr"/>
-            <a:r>
-              <a:rPr sz="1400" b="1">
-                <a:solidFill>
-                  <a:srgbClr val="202122"/>
-                </a:solidFill>
-                <a:latin typeface="Calibri"/>
-              </a:rPr>
-              <a:t>2</a:t>
+              <a:t>e.g.</a:t>
             </a:r>
           </a:p>
         </p:txBody>
@@ -6607,8 +10059,8 @@
         </p:nvSpPr>
         <p:spPr>
           <a:xfrm>
-            <a:off x="1234440" y="2795778"/>
-            <a:ext cx="10408615" cy="1030986"/>
+            <a:off x="8046720" y="2560320"/>
+            <a:ext cx="3291840" cy="365760"/>
           </a:xfrm>
           <a:prstGeom prst="rect">
             <a:avLst/>
@@ -6621,80 +10073,27 @@
           <a:p>
             <a:pPr algn="l"/>
             <a:r>
-              <a:rPr sz="2200" b="0" i="0">
-                <a:solidFill>
-                  <a:srgbClr val="202122"/>
-                </a:solidFill>
-                <a:latin typeface="Calibri"/>
-              </a:rPr>
-              <a:t>Give one drawback of third-party libraries.</a:t>
-            </a:r>
-          </a:p>
-        </p:txBody>
-      </p:sp>
-      <p:sp>
-        <p:nvSpPr>
-          <p:cNvPr id="10" name="Oval 9"/>
-          <p:cNvSpPr/>
-          <p:nvPr/>
-        </p:nvSpPr>
-        <p:spPr>
-          <a:xfrm>
-            <a:off x="548640" y="4009644"/>
-            <a:ext cx="411480" cy="411480"/>
-          </a:xfrm>
-          <a:prstGeom prst="ellipse">
-            <a:avLst/>
-          </a:prstGeom>
-          <a:solidFill>
-            <a:srgbClr val="F2B705"/>
-          </a:solidFill>
-          <a:ln>
-            <a:noFill/>
-          </a:ln>
-          <a:effectLst/>
-        </p:spPr>
-        <p:style>
-          <a:lnRef idx="1">
-            <a:schemeClr val="accent1"/>
-          </a:lnRef>
-          <a:fillRef idx="3">
-            <a:schemeClr val="accent1"/>
-          </a:fillRef>
-          <a:effectRef idx="2">
-            <a:schemeClr val="accent1"/>
-          </a:effectRef>
-          <a:fontRef idx="minor">
-            <a:schemeClr val="lt1"/>
-          </a:fontRef>
-        </p:style>
-        <p:txBody>
-          <a:bodyPr rtlCol="0" anchor="ctr" lIns="0" rIns="0" tIns="0" bIns="0"/>
-          <a:lstStyle/>
-          <a:p>
-            <a:pPr algn="ctr"/>
-            <a:r>
-              <a:rPr sz="1400" b="1">
-                <a:solidFill>
-                  <a:srgbClr val="202122"/>
-                </a:solidFill>
-                <a:latin typeface="Calibri"/>
-              </a:rPr>
-              <a:t>3</a:t>
-            </a:r>
-          </a:p>
-        </p:txBody>
-      </p:sp>
-      <p:sp>
-        <p:nvSpPr>
-          <p:cNvPr id="11" name="TextBox 10"/>
+              <a:rPr sz="1300" b="1" i="0">
+                <a:solidFill>
+                  <a:srgbClr val="A9C8F0"/>
+                </a:solidFill>
+                <a:latin typeface="Calibri"/>
+              </a:rPr>
+              <a:t>EXAMPLE</a:t>
+            </a:r>
+          </a:p>
+        </p:txBody>
+      </p:sp>
+      <p:sp>
+        <p:nvSpPr>
+          <p:cNvPr id="10" name="TextBox 9"/>
           <p:cNvSpPr txBox="1"/>
           <p:nvPr/>
         </p:nvSpPr>
         <p:spPr>
           <a:xfrm>
-            <a:off x="1234440" y="3991356"/>
-            <a:ext cx="10408615" cy="1030986"/>
+            <a:off x="8046720" y="2971800"/>
+            <a:ext cx="3291840" cy="2971800"/>
           </a:xfrm>
           <a:prstGeom prst="rect">
             <a:avLst/>
@@ -6707,99 +10106,13 @@
           <a:p>
             <a:pPr algn="l"/>
             <a:r>
-              <a:rPr sz="2200" b="0" i="0">
-                <a:solidFill>
-                  <a:srgbClr val="202122"/>
-                </a:solidFill>
-                <a:latin typeface="Calibri"/>
-              </a:rPr>
-              <a:t>Which check makes sure a field is not blank?</a:t>
-            </a:r>
-          </a:p>
-        </p:txBody>
-      </p:sp>
-      <p:sp>
-        <p:nvSpPr>
-          <p:cNvPr id="12" name="Oval 11"/>
-          <p:cNvSpPr/>
-          <p:nvPr/>
-        </p:nvSpPr>
-        <p:spPr>
-          <a:xfrm>
-            <a:off x="548640" y="5205221"/>
-            <a:ext cx="411480" cy="411480"/>
-          </a:xfrm>
-          <a:prstGeom prst="ellipse">
-            <a:avLst/>
-          </a:prstGeom>
-          <a:solidFill>
-            <a:srgbClr val="F2B705"/>
-          </a:solidFill>
-          <a:ln>
-            <a:noFill/>
-          </a:ln>
-          <a:effectLst/>
-        </p:spPr>
-        <p:style>
-          <a:lnRef idx="1">
-            <a:schemeClr val="accent1"/>
-          </a:lnRef>
-          <a:fillRef idx="3">
-            <a:schemeClr val="accent1"/>
-          </a:fillRef>
-          <a:effectRef idx="2">
-            <a:schemeClr val="accent1"/>
-          </a:effectRef>
-          <a:fontRef idx="minor">
-            <a:schemeClr val="lt1"/>
-          </a:fontRef>
-        </p:style>
-        <p:txBody>
-          <a:bodyPr rtlCol="0" anchor="ctr" lIns="0" rIns="0" tIns="0" bIns="0"/>
-          <a:lstStyle/>
-          <a:p>
-            <a:pPr algn="ctr"/>
-            <a:r>
-              <a:rPr sz="1400" b="1">
-                <a:solidFill>
-                  <a:srgbClr val="202122"/>
-                </a:solidFill>
-                <a:latin typeface="Calibri"/>
-              </a:rPr>
-              <a:t>4</a:t>
-            </a:r>
-          </a:p>
-        </p:txBody>
-      </p:sp>
-      <p:sp>
-        <p:nvSpPr>
-          <p:cNvPr id="13" name="TextBox 12"/>
-          <p:cNvSpPr txBox="1"/>
-          <p:nvPr/>
-        </p:nvSpPr>
-        <p:spPr>
-          <a:xfrm>
-            <a:off x="1234440" y="5186933"/>
-            <a:ext cx="10408615" cy="1030986"/>
-          </a:xfrm>
-          <a:prstGeom prst="rect">
-            <a:avLst/>
-          </a:prstGeom>
-          <a:noFill/>
-        </p:spPr>
-        <p:txBody>
-          <a:bodyPr wrap="square" anchor="t" lIns="0" rIns="0" tIns="0" bIns="0"/>
-          <a:lstStyle/>
-          <a:p>
-            <a:pPr algn="l"/>
-            <a:r>
-              <a:rPr sz="2200" b="0" i="0">
-                <a:solidFill>
-                  <a:srgbClr val="202122"/>
-                </a:solidFill>
-                <a:latin typeface="Calibri"/>
-              </a:rPr>
-              <a:t>Write a range check for an age between 11 and 18.</a:t>
+              <a:rPr sz="1900" b="0" i="0">
+                <a:solidFill>
+                  <a:srgbClr val="FFFFFF"/>
+                </a:solidFill>
+                <a:latin typeface="Cambria"/>
+              </a:rPr>
+              <a:t>Rolling a dice: import random, then random.randint(1, 6): one line instead of writing your own random number generator.</a:t>
             </a:r>
           </a:p>
         </p:txBody>
@@ -6891,7 +10204,7 @@
                 </a:solidFill>
                 <a:latin typeface="Cambria"/>
               </a:rPr>
-              <a:t>Answers</a:t>
+              <a:t>Where subroutines come from</a:t>
             </a:r>
           </a:p>
         </p:txBody>
@@ -6962,394 +10275,373 @@
           </a:p>
         </p:txBody>
       </p:sp>
-      <p:sp>
-        <p:nvSpPr>
-          <p:cNvPr id="6" name="Oval 5"/>
-          <p:cNvSpPr/>
-          <p:nvPr/>
-        </p:nvSpPr>
-        <p:spPr>
-          <a:xfrm>
-            <a:off x="548640" y="1618488"/>
-            <a:ext cx="411480" cy="411480"/>
-          </a:xfrm>
-          <a:prstGeom prst="ellipse">
-            <a:avLst/>
-          </a:prstGeom>
-          <a:solidFill>
-            <a:srgbClr val="F2B705"/>
-          </a:solidFill>
-          <a:ln>
-            <a:noFill/>
-          </a:ln>
-          <a:effectLst/>
-        </p:spPr>
-        <p:style>
-          <a:lnRef idx="1">
-            <a:schemeClr val="accent1"/>
-          </a:lnRef>
-          <a:fillRef idx="3">
-            <a:schemeClr val="accent1"/>
-          </a:fillRef>
-          <a:effectRef idx="2">
-            <a:schemeClr val="accent1"/>
-          </a:effectRef>
-          <a:fontRef idx="minor">
-            <a:schemeClr val="lt1"/>
-          </a:fontRef>
-        </p:style>
-        <p:txBody>
-          <a:bodyPr rtlCol="0" anchor="ctr" lIns="0" rIns="0" tIns="0" bIns="0"/>
-          <a:lstStyle/>
-          <a:p>
-            <a:pPr algn="ctr"/>
-            <a:r>
-              <a:rPr sz="1400" b="1">
-                <a:solidFill>
-                  <a:srgbClr val="202122"/>
-                </a:solidFill>
-                <a:latin typeface="Calibri"/>
-              </a:rPr>
-              <a:t>1</a:t>
-            </a:r>
-          </a:p>
-        </p:txBody>
-      </p:sp>
-      <p:sp>
-        <p:nvSpPr>
-          <p:cNvPr id="7" name="TextBox 6"/>
-          <p:cNvSpPr txBox="1"/>
-          <p:nvPr/>
-        </p:nvSpPr>
-        <p:spPr>
-          <a:xfrm>
-            <a:off x="1234440" y="1600200"/>
-            <a:ext cx="10408615" cy="1030986"/>
-          </a:xfrm>
-          <a:prstGeom prst="rect">
-            <a:avLst/>
-          </a:prstGeom>
-          <a:noFill/>
-        </p:spPr>
-        <p:txBody>
-          <a:bodyPr wrap="square" anchor="t" lIns="0" rIns="0" tIns="0" bIns="0"/>
-          <a:lstStyle/>
-          <a:p>
-            <a:pPr algn="l"/>
-            <a:r>
-              <a:rPr sz="1800" b="0" i="0">
-                <a:solidFill>
-                  <a:srgbClr val="54595D"/>
-                </a:solidFill>
-                <a:latin typeface="Calibri"/>
-              </a:rPr>
-              <a:t>What must a function do that a procedure does not?</a:t>
-            </a:r>
-          </a:p>
-          <a:p>
-            <a:r>
-              <a:rPr sz="1800" b="1">
-                <a:solidFill>
-                  <a:srgbClr val="03306E"/>
-                </a:solidFill>
-                <a:latin typeface="Calibri"/>
-              </a:rPr>
-              <a:t>Return a result.</a:t>
-            </a:r>
-          </a:p>
-        </p:txBody>
-      </p:sp>
-      <p:sp>
-        <p:nvSpPr>
-          <p:cNvPr id="8" name="Oval 7"/>
-          <p:cNvSpPr/>
-          <p:nvPr/>
-        </p:nvSpPr>
-        <p:spPr>
-          <a:xfrm>
-            <a:off x="548640" y="2814066"/>
-            <a:ext cx="411480" cy="411480"/>
-          </a:xfrm>
-          <a:prstGeom prst="ellipse">
-            <a:avLst/>
-          </a:prstGeom>
-          <a:solidFill>
-            <a:srgbClr val="F2B705"/>
-          </a:solidFill>
-          <a:ln>
-            <a:noFill/>
-          </a:ln>
-          <a:effectLst/>
-        </p:spPr>
-        <p:style>
-          <a:lnRef idx="1">
-            <a:schemeClr val="accent1"/>
-          </a:lnRef>
-          <a:fillRef idx="3">
-            <a:schemeClr val="accent1"/>
-          </a:fillRef>
-          <a:effectRef idx="2">
-            <a:schemeClr val="accent1"/>
-          </a:effectRef>
-          <a:fontRef idx="minor">
-            <a:schemeClr val="lt1"/>
-          </a:fontRef>
-        </p:style>
-        <p:txBody>
-          <a:bodyPr rtlCol="0" anchor="ctr" lIns="0" rIns="0" tIns="0" bIns="0"/>
-          <a:lstStyle/>
-          <a:p>
-            <a:pPr algn="ctr"/>
-            <a:r>
-              <a:rPr sz="1400" b="1">
-                <a:solidFill>
-                  <a:srgbClr val="202122"/>
-                </a:solidFill>
-                <a:latin typeface="Calibri"/>
-              </a:rPr>
-              <a:t>2</a:t>
-            </a:r>
-          </a:p>
-        </p:txBody>
-      </p:sp>
-      <p:sp>
-        <p:nvSpPr>
-          <p:cNvPr id="9" name="TextBox 8"/>
-          <p:cNvSpPr txBox="1"/>
-          <p:nvPr/>
-        </p:nvSpPr>
-        <p:spPr>
-          <a:xfrm>
-            <a:off x="1234440" y="2795778"/>
-            <a:ext cx="10408615" cy="1030986"/>
-          </a:xfrm>
-          <a:prstGeom prst="rect">
-            <a:avLst/>
-          </a:prstGeom>
-          <a:noFill/>
-        </p:spPr>
-        <p:txBody>
-          <a:bodyPr wrap="square" anchor="t" lIns="0" rIns="0" tIns="0" bIns="0"/>
-          <a:lstStyle/>
-          <a:p>
-            <a:pPr algn="l"/>
-            <a:r>
-              <a:rPr sz="1800" b="0" i="0">
-                <a:solidFill>
-                  <a:srgbClr val="54595D"/>
-                </a:solidFill>
-                <a:latin typeface="Calibri"/>
-              </a:rPr>
-              <a:t>Give one drawback of third-party libraries.</a:t>
-            </a:r>
-          </a:p>
-          <a:p>
-            <a:r>
-              <a:rPr sz="1800" b="1">
-                <a:solidFill>
-                  <a:srgbClr val="03306E"/>
-                </a:solidFill>
-                <a:latin typeface="Calibri"/>
-              </a:rPr>
-              <a:t>Extra dependencies, or security and maintenance risk.</a:t>
-            </a:r>
-          </a:p>
-        </p:txBody>
-      </p:sp>
-      <p:sp>
-        <p:nvSpPr>
-          <p:cNvPr id="10" name="Oval 9"/>
-          <p:cNvSpPr/>
-          <p:nvPr/>
-        </p:nvSpPr>
-        <p:spPr>
-          <a:xfrm>
-            <a:off x="548640" y="4009644"/>
-            <a:ext cx="411480" cy="411480"/>
-          </a:xfrm>
-          <a:prstGeom prst="ellipse">
-            <a:avLst/>
-          </a:prstGeom>
-          <a:solidFill>
-            <a:srgbClr val="F2B705"/>
-          </a:solidFill>
-          <a:ln>
-            <a:noFill/>
-          </a:ln>
-          <a:effectLst/>
-        </p:spPr>
-        <p:style>
-          <a:lnRef idx="1">
-            <a:schemeClr val="accent1"/>
-          </a:lnRef>
-          <a:fillRef idx="3">
-            <a:schemeClr val="accent1"/>
-          </a:fillRef>
-          <a:effectRef idx="2">
-            <a:schemeClr val="accent1"/>
-          </a:effectRef>
-          <a:fontRef idx="minor">
-            <a:schemeClr val="lt1"/>
-          </a:fontRef>
-        </p:style>
-        <p:txBody>
-          <a:bodyPr rtlCol="0" anchor="ctr" lIns="0" rIns="0" tIns="0" bIns="0"/>
-          <a:lstStyle/>
-          <a:p>
-            <a:pPr algn="ctr"/>
-            <a:r>
-              <a:rPr sz="1400" b="1">
-                <a:solidFill>
-                  <a:srgbClr val="202122"/>
-                </a:solidFill>
-                <a:latin typeface="Calibri"/>
-              </a:rPr>
-              <a:t>3</a:t>
-            </a:r>
-          </a:p>
-        </p:txBody>
-      </p:sp>
-      <p:sp>
-        <p:nvSpPr>
-          <p:cNvPr id="11" name="TextBox 10"/>
-          <p:cNvSpPr txBox="1"/>
-          <p:nvPr/>
-        </p:nvSpPr>
-        <p:spPr>
-          <a:xfrm>
-            <a:off x="1234440" y="3991356"/>
-            <a:ext cx="10408615" cy="1030986"/>
-          </a:xfrm>
-          <a:prstGeom prst="rect">
-            <a:avLst/>
-          </a:prstGeom>
-          <a:noFill/>
-        </p:spPr>
-        <p:txBody>
-          <a:bodyPr wrap="square" anchor="t" lIns="0" rIns="0" tIns="0" bIns="0"/>
-          <a:lstStyle/>
-          <a:p>
-            <a:pPr algn="l"/>
-            <a:r>
-              <a:rPr sz="1800" b="0" i="0">
-                <a:solidFill>
-                  <a:srgbClr val="54595D"/>
-                </a:solidFill>
-                <a:latin typeface="Calibri"/>
-              </a:rPr>
-              <a:t>Which check makes sure a field is not blank?</a:t>
-            </a:r>
-          </a:p>
-          <a:p>
-            <a:r>
-              <a:rPr sz="1800" b="1">
-                <a:solidFill>
-                  <a:srgbClr val="03306E"/>
-                </a:solidFill>
-                <a:latin typeface="Calibri"/>
-              </a:rPr>
-              <a:t>Presence check.</a:t>
-            </a:r>
-          </a:p>
-        </p:txBody>
-      </p:sp>
-      <p:sp>
-        <p:nvSpPr>
-          <p:cNvPr id="12" name="Oval 11"/>
-          <p:cNvSpPr/>
-          <p:nvPr/>
-        </p:nvSpPr>
-        <p:spPr>
-          <a:xfrm>
-            <a:off x="548640" y="5205221"/>
-            <a:ext cx="411480" cy="411480"/>
-          </a:xfrm>
-          <a:prstGeom prst="ellipse">
-            <a:avLst/>
-          </a:prstGeom>
-          <a:solidFill>
-            <a:srgbClr val="F2B705"/>
-          </a:solidFill>
-          <a:ln>
-            <a:noFill/>
-          </a:ln>
-          <a:effectLst/>
-        </p:spPr>
-        <p:style>
-          <a:lnRef idx="1">
-            <a:schemeClr val="accent1"/>
-          </a:lnRef>
-          <a:fillRef idx="3">
-            <a:schemeClr val="accent1"/>
-          </a:fillRef>
-          <a:effectRef idx="2">
-            <a:schemeClr val="accent1"/>
-          </a:effectRef>
-          <a:fontRef idx="minor">
-            <a:schemeClr val="lt1"/>
-          </a:fontRef>
-        </p:style>
-        <p:txBody>
-          <a:bodyPr rtlCol="0" anchor="ctr" lIns="0" rIns="0" tIns="0" bIns="0"/>
-          <a:lstStyle/>
-          <a:p>
-            <a:pPr algn="ctr"/>
-            <a:r>
-              <a:rPr sz="1400" b="1">
-                <a:solidFill>
-                  <a:srgbClr val="202122"/>
-                </a:solidFill>
-                <a:latin typeface="Calibri"/>
-              </a:rPr>
-              <a:t>4</a:t>
-            </a:r>
-          </a:p>
-        </p:txBody>
-      </p:sp>
-      <p:sp>
-        <p:nvSpPr>
-          <p:cNvPr id="13" name="TextBox 12"/>
-          <p:cNvSpPr txBox="1"/>
-          <p:nvPr/>
-        </p:nvSpPr>
-        <p:spPr>
-          <a:xfrm>
-            <a:off x="1234440" y="5186933"/>
-            <a:ext cx="10408615" cy="1030986"/>
-          </a:xfrm>
-          <a:prstGeom prst="rect">
-            <a:avLst/>
-          </a:prstGeom>
-          <a:noFill/>
-        </p:spPr>
-        <p:txBody>
-          <a:bodyPr wrap="square" anchor="t" lIns="0" rIns="0" tIns="0" bIns="0"/>
-          <a:lstStyle/>
-          <a:p>
-            <a:pPr algn="l"/>
-            <a:r>
-              <a:rPr sz="1800" b="0" i="0">
-                <a:solidFill>
-                  <a:srgbClr val="54595D"/>
-                </a:solidFill>
-                <a:latin typeface="Calibri"/>
-              </a:rPr>
-              <a:t>Write a range check for an age between 11 and 18.</a:t>
-            </a:r>
-          </a:p>
-          <a:p>
-            <a:r>
-              <a:rPr sz="1800" b="1">
-                <a:solidFill>
-                  <a:srgbClr val="03306E"/>
-                </a:solidFill>
-                <a:latin typeface="Calibri"/>
-              </a:rPr>
-              <a:t>if 11 &lt;= age &lt;= 18:</a:t>
-            </a:r>
-          </a:p>
-        </p:txBody>
-      </p:sp>
+      <p:graphicFrame>
+        <p:nvGraphicFramePr>
+          <p:cNvPr id="6" name="Table 5"/>
+          <p:cNvGraphicFramePr>
+            <a:graphicFrameLocks noGrp="1"/>
+          </p:cNvGraphicFramePr>
+          <p:nvPr/>
+        </p:nvGraphicFramePr>
+        <p:xfrm>
+          <a:off x="548640" y="1600200"/>
+          <a:ext cx="11094413" cy="4526280"/>
+        </p:xfrm>
+        <a:graphic>
+          <a:graphicData uri="http://schemas.openxmlformats.org/drawingml/2006/table">
+            <a:tbl>
+              <a:tblPr firstRow="1" bandRow="1">
+                <a:tableStyleId>{5C22544A-7EE6-4342-B048-85BDC9FD1C3A}</a:tableStyleId>
+              </a:tblPr>
+              <a:tblGrid>
+                <a:gridCol w="2773603"/>
+                <a:gridCol w="3782186"/>
+                <a:gridCol w="4538624"/>
+              </a:tblGrid>
+              <a:tr h="905256">
+                <a:tc>
+                  <a:txBody>
+                    <a:bodyPr wrap="square"/>
+                    <a:lstStyle/>
+                    <a:p>
+                      <a:r>
+                        <a:rPr sz="1600" b="1">
+                          <a:solidFill>
+                            <a:srgbClr val="FFFFFF"/>
+                          </a:solidFill>
+                          <a:latin typeface="Calibri"/>
+                        </a:rPr>
+                        <a:t>Source</a:t>
+                      </a:r>
+                    </a:p>
+                  </a:txBody>
+                  <a:tcPr marL="91440" marR="91440" anchor="ctr">
+                    <a:solidFill>
+                      <a:srgbClr val="03306E"/>
+                    </a:solidFill>
+                  </a:tcPr>
+                </a:tc>
+                <a:tc>
+                  <a:txBody>
+                    <a:bodyPr wrap="square"/>
+                    <a:lstStyle/>
+                    <a:p>
+                      <a:r>
+                        <a:rPr sz="1600" b="1">
+                          <a:solidFill>
+                            <a:srgbClr val="FFFFFF"/>
+                          </a:solidFill>
+                          <a:latin typeface="Calibri"/>
+                        </a:rPr>
+                        <a:t>Example</a:t>
+                      </a:r>
+                    </a:p>
+                  </a:txBody>
+                  <a:tcPr marL="91440" marR="91440" anchor="ctr">
+                    <a:solidFill>
+                      <a:srgbClr val="03306E"/>
+                    </a:solidFill>
+                  </a:tcPr>
+                </a:tc>
+                <a:tc>
+                  <a:txBody>
+                    <a:bodyPr wrap="square"/>
+                    <a:lstStyle/>
+                    <a:p>
+                      <a:r>
+                        <a:rPr sz="1600" b="1">
+                          <a:solidFill>
+                            <a:srgbClr val="FFFFFF"/>
+                          </a:solidFill>
+                          <a:latin typeface="Calibri"/>
+                        </a:rPr>
+                        <a:t>Trade-off</a:t>
+                      </a:r>
+                    </a:p>
+                  </a:txBody>
+                  <a:tcPr marL="91440" marR="91440" anchor="ctr">
+                    <a:solidFill>
+                      <a:srgbClr val="03306E"/>
+                    </a:solidFill>
+                  </a:tcPr>
+                </a:tc>
+              </a:tr>
+              <a:tr h="905256">
+                <a:tc>
+                  <a:txBody>
+                    <a:bodyPr wrap="square"/>
+                    <a:lstStyle/>
+                    <a:p>
+                      <a:r>
+                        <a:rPr sz="1600" b="1">
+                          <a:solidFill>
+                            <a:srgbClr val="03306E"/>
+                          </a:solidFill>
+                          <a:latin typeface="Calibri"/>
+                        </a:rPr>
+                        <a:t>User-written</a:t>
+                      </a:r>
+                    </a:p>
+                  </a:txBody>
+                  <a:tcPr marL="91440" marR="91440" anchor="ctr">
+                    <a:solidFill>
+                      <a:srgbClr val="FFFFFF"/>
+                    </a:solidFill>
+                  </a:tcPr>
+                </a:tc>
+                <a:tc>
+                  <a:txBody>
+                    <a:bodyPr wrap="square"/>
+                    <a:lstStyle/>
+                    <a:p>
+                      <a:r>
+                        <a:rPr sz="1600" b="0">
+                          <a:solidFill>
+                            <a:srgbClr val="202122"/>
+                          </a:solidFill>
+                          <a:latin typeface="Calibri"/>
+                        </a:rPr>
+                        <a:t>def calculate_vat(price):</a:t>
+                      </a:r>
+                    </a:p>
+                  </a:txBody>
+                  <a:tcPr marL="91440" marR="91440" anchor="ctr">
+                    <a:solidFill>
+                      <a:srgbClr val="FFFFFF"/>
+                    </a:solidFill>
+                  </a:tcPr>
+                </a:tc>
+                <a:tc>
+                  <a:txBody>
+                    <a:bodyPr wrap="square"/>
+                    <a:lstStyle/>
+                    <a:p>
+                      <a:r>
+                        <a:rPr sz="1600" b="0">
+                          <a:solidFill>
+                            <a:srgbClr val="202122"/>
+                          </a:solidFill>
+                          <a:latin typeface="Calibri"/>
+                        </a:rPr>
+                        <a:t>Exactly what you need, but you must write and test it</a:t>
+                      </a:r>
+                    </a:p>
+                  </a:txBody>
+                  <a:tcPr marL="91440" marR="91440" anchor="ctr">
+                    <a:solidFill>
+                      <a:srgbClr val="FFFFFF"/>
+                    </a:solidFill>
+                  </a:tcPr>
+                </a:tc>
+              </a:tr>
+              <a:tr h="905256">
+                <a:tc>
+                  <a:txBody>
+                    <a:bodyPr wrap="square"/>
+                    <a:lstStyle/>
+                    <a:p>
+                      <a:r>
+                        <a:rPr sz="1600" b="1">
+                          <a:solidFill>
+                            <a:srgbClr val="03306E"/>
+                          </a:solidFill>
+                          <a:latin typeface="Calibri"/>
+                        </a:rPr>
+                        <a:t>Built into the language</a:t>
+                      </a:r>
+                    </a:p>
+                  </a:txBody>
+                  <a:tcPr marL="91440" marR="91440" anchor="ctr">
+                    <a:solidFill>
+                      <a:srgbClr val="EAF3FF"/>
+                    </a:solidFill>
+                  </a:tcPr>
+                </a:tc>
+                <a:tc>
+                  <a:txBody>
+                    <a:bodyPr wrap="square"/>
+                    <a:lstStyle/>
+                    <a:p>
+                      <a:r>
+                        <a:rPr sz="1600" b="0">
+                          <a:solidFill>
+                            <a:srgbClr val="202122"/>
+                          </a:solidFill>
+                          <a:latin typeface="Calibri"/>
+                        </a:rPr>
+                        <a:t>len(), round(), max()</a:t>
+                      </a:r>
+                    </a:p>
+                  </a:txBody>
+                  <a:tcPr marL="91440" marR="91440" anchor="ctr">
+                    <a:solidFill>
+                      <a:srgbClr val="EAF3FF"/>
+                    </a:solidFill>
+                  </a:tcPr>
+                </a:tc>
+                <a:tc>
+                  <a:txBody>
+                    <a:bodyPr wrap="square"/>
+                    <a:lstStyle/>
+                    <a:p>
+                      <a:r>
+                        <a:rPr sz="1600" b="0">
+                          <a:solidFill>
+                            <a:srgbClr val="202122"/>
+                          </a:solidFill>
+                          <a:latin typeface="Calibri"/>
+                        </a:rPr>
+                        <a:t>Reliable and fast, but general purpose</a:t>
+                      </a:r>
+                    </a:p>
+                  </a:txBody>
+                  <a:tcPr marL="91440" marR="91440" anchor="ctr">
+                    <a:solidFill>
+                      <a:srgbClr val="EAF3FF"/>
+                    </a:solidFill>
+                  </a:tcPr>
+                </a:tc>
+              </a:tr>
+              <a:tr h="905256">
+                <a:tc>
+                  <a:txBody>
+                    <a:bodyPr wrap="square"/>
+                    <a:lstStyle/>
+                    <a:p>
+                      <a:r>
+                        <a:rPr sz="1600" b="1">
+                          <a:solidFill>
+                            <a:srgbClr val="03306E"/>
+                          </a:solidFill>
+                          <a:latin typeface="Calibri"/>
+                        </a:rPr>
+                        <a:t>Language libraries</a:t>
+                      </a:r>
+                    </a:p>
+                  </a:txBody>
+                  <a:tcPr marL="91440" marR="91440" anchor="ctr">
+                    <a:solidFill>
+                      <a:srgbClr val="FFFFFF"/>
+                    </a:solidFill>
+                  </a:tcPr>
+                </a:tc>
+                <a:tc>
+                  <a:txBody>
+                    <a:bodyPr wrap="square"/>
+                    <a:lstStyle/>
+                    <a:p>
+                      <a:r>
+                        <a:rPr sz="1600" b="0">
+                          <a:solidFill>
+                            <a:srgbClr val="202122"/>
+                          </a:solidFill>
+                          <a:latin typeface="Calibri"/>
+                        </a:rPr>
+                        <a:t>math.sqrt(), random.randint()</a:t>
+                      </a:r>
+                    </a:p>
+                  </a:txBody>
+                  <a:tcPr marL="91440" marR="91440" anchor="ctr">
+                    <a:solidFill>
+                      <a:srgbClr val="FFFFFF"/>
+                    </a:solidFill>
+                  </a:tcPr>
+                </a:tc>
+                <a:tc>
+                  <a:txBody>
+                    <a:bodyPr wrap="square"/>
+                    <a:lstStyle/>
+                    <a:p>
+                      <a:r>
+                        <a:rPr sz="1600" b="0">
+                          <a:solidFill>
+                            <a:srgbClr val="202122"/>
+                          </a:solidFill>
+                          <a:latin typeface="Calibri"/>
+                        </a:rPr>
+                        <a:t>Tested and documented; needs an import</a:t>
+                      </a:r>
+                    </a:p>
+                  </a:txBody>
+                  <a:tcPr marL="91440" marR="91440" anchor="ctr">
+                    <a:solidFill>
+                      <a:srgbClr val="FFFFFF"/>
+                    </a:solidFill>
+                  </a:tcPr>
+                </a:tc>
+              </a:tr>
+              <a:tr h="905256">
+                <a:tc>
+                  <a:txBody>
+                    <a:bodyPr wrap="square"/>
+                    <a:lstStyle/>
+                    <a:p>
+                      <a:r>
+                        <a:rPr sz="1600" b="1">
+                          <a:solidFill>
+                            <a:srgbClr val="03306E"/>
+                          </a:solidFill>
+                          <a:latin typeface="Calibri"/>
+                        </a:rPr>
+                        <a:t>Third-party libraries</a:t>
+                      </a:r>
+                    </a:p>
+                  </a:txBody>
+                  <a:tcPr marL="91440" marR="91440" anchor="ctr">
+                    <a:solidFill>
+                      <a:srgbClr val="EAF3FF"/>
+                    </a:solidFill>
+                  </a:tcPr>
+                </a:tc>
+                <a:tc>
+                  <a:txBody>
+                    <a:bodyPr wrap="square"/>
+                    <a:lstStyle/>
+                    <a:p>
+                      <a:r>
+                        <a:rPr sz="1600" b="0">
+                          <a:solidFill>
+                            <a:srgbClr val="202122"/>
+                          </a:solidFill>
+                          <a:latin typeface="Calibri"/>
+                        </a:rPr>
+                        <a:t>pandas, Matplotlib</a:t>
+                      </a:r>
+                    </a:p>
+                  </a:txBody>
+                  <a:tcPr marL="91440" marR="91440" anchor="ctr">
+                    <a:solidFill>
+                      <a:srgbClr val="EAF3FF"/>
+                    </a:solidFill>
+                  </a:tcPr>
+                </a:tc>
+                <a:tc>
+                  <a:txBody>
+                    <a:bodyPr wrap="square"/>
+                    <a:lstStyle/>
+                    <a:p>
+                      <a:r>
+                        <a:rPr sz="1600" b="0">
+                          <a:solidFill>
+                            <a:srgbClr val="202122"/>
+                          </a:solidFill>
+                          <a:latin typeface="Calibri"/>
+                        </a:rPr>
+                        <a:t>Powerful, but adds dependencies and security risk</a:t>
+                      </a:r>
+                    </a:p>
+                  </a:txBody>
+                  <a:tcPr marL="91440" marR="91440" anchor="ctr">
+                    <a:solidFill>
+                      <a:srgbClr val="EAF3FF"/>
+                    </a:solidFill>
+                  </a:tcPr>
+                </a:tc>
+              </a:tr>
+            </a:tbl>
+          </a:graphicData>
+        </a:graphic>
+      </p:graphicFrame>
     </p:spTree>
   </p:cSld>
   <p:clrMapOvr>
@@ -7437,7 +10729,7 @@
                 </a:solidFill>
                 <a:latin typeface="Cambria"/>
               </a:rPr>
-              <a:t>Activity: Validation library</a:t>
+              <a:t>Quick check: Where subroutines come from</a:t>
             </a:r>
           </a:p>
         </p:txBody>
@@ -7510,19 +10802,17 @@
       </p:sp>
       <p:sp>
         <p:nvSpPr>
-          <p:cNvPr id="6" name="Rounded Rectangle 5"/>
+          <p:cNvPr id="6" name="Oval 5"/>
           <p:cNvSpPr/>
           <p:nvPr/>
         </p:nvSpPr>
         <p:spPr>
           <a:xfrm>
-            <a:off x="548640" y="1508760"/>
-            <a:ext cx="2011680" cy="457200"/>
-          </a:xfrm>
-          <a:prstGeom prst="roundRect">
-            <a:avLst>
-              <a:gd name="adj" fmla="val 50000"/>
-            </a:avLst>
+            <a:off x="548640" y="1691640"/>
+            <a:ext cx="502920" cy="502920"/>
+          </a:xfrm>
+          <a:prstGeom prst="ellipse">
+            <a:avLst/>
           </a:prstGeom>
           <a:solidFill>
             <a:srgbClr val="F2B705"/>
@@ -7547,9 +10837,20 @@
           </a:fontRef>
         </p:style>
         <p:txBody>
-          <a:bodyPr rtlCol="0" anchor="ctr"/>
-          <a:lstStyle/>
-          <a:p/>
+          <a:bodyPr rtlCol="0" anchor="ctr" lIns="0" rIns="0" tIns="0" bIns="0"/>
+          <a:lstStyle/>
+          <a:p>
+            <a:pPr algn="ctr"/>
+            <a:r>
+              <a:rPr sz="1600" b="1">
+                <a:solidFill>
+                  <a:srgbClr val="202122"/>
+                </a:solidFill>
+                <a:latin typeface="Calibri"/>
+              </a:rPr>
+              <a:t>1</a:t>
+            </a:r>
+          </a:p>
         </p:txBody>
       </p:sp>
       <p:sp>
@@ -7560,8 +10861,8 @@
         </p:nvSpPr>
         <p:spPr>
           <a:xfrm>
-            <a:off x="548640" y="1508760"/>
-            <a:ext cx="2011680" cy="457200"/>
+            <a:off x="1371600" y="1645920"/>
+            <a:ext cx="10271455" cy="1188720"/>
           </a:xfrm>
           <a:prstGeom prst="rect">
             <a:avLst/>
@@ -7569,71 +10870,38 @@
           <a:noFill/>
         </p:spPr>
         <p:txBody>
-          <a:bodyPr wrap="square" anchor="ctr" lIns="0" rIns="0" tIns="0" bIns="0"/>
-          <a:lstStyle/>
-          <a:p>
-            <a:pPr algn="ctr"/>
-            <a:r>
-              <a:rPr sz="1400" b="1" i="0">
+          <a:bodyPr wrap="square" anchor="t" lIns="0" rIns="0" tIns="0" bIns="0"/>
+          <a:lstStyle/>
+          <a:p>
+            <a:pPr algn="l"/>
+            <a:r>
+              <a:rPr sz="2400" b="0" i="0">
                 <a:solidFill>
                   <a:srgbClr val="202122"/>
                 </a:solidFill>
                 <a:latin typeface="Calibri"/>
               </a:rPr>
-              <a:t>30 minutes</a:t>
-            </a:r>
-          </a:p>
-        </p:txBody>
-      </p:sp>
-      <p:sp>
-        <p:nvSpPr>
-          <p:cNvPr id="8" name="TextBox 7"/>
-          <p:cNvSpPr txBox="1"/>
-          <p:nvPr/>
-        </p:nvSpPr>
-        <p:spPr>
-          <a:xfrm>
-            <a:off x="2743200" y="1508760"/>
-            <a:ext cx="4754880" cy="457200"/>
-          </a:xfrm>
-          <a:prstGeom prst="rect">
-            <a:avLst/>
-          </a:prstGeom>
-          <a:noFill/>
-        </p:spPr>
-        <p:txBody>
-          <a:bodyPr wrap="square" anchor="ctr" lIns="0" rIns="0" tIns="0" bIns="0"/>
-          <a:lstStyle/>
-          <a:p>
-            <a:pPr algn="l"/>
-            <a:r>
-              <a:rPr sz="1400" b="0" i="1">
-                <a:solidFill>
-                  <a:srgbClr val="54595D"/>
-                </a:solidFill>
-                <a:latin typeface="Calibri"/>
-              </a:rPr>
-              <a:t>Pairs, in Python</a:t>
-            </a:r>
-          </a:p>
-        </p:txBody>
-      </p:sp>
-      <p:sp>
-        <p:nvSpPr>
-          <p:cNvPr id="9" name="Oval 8"/>
+              <a:t>How do you use a standard library function?</a:t>
+            </a:r>
+          </a:p>
+        </p:txBody>
+      </p:sp>
+      <p:sp>
+        <p:nvSpPr>
+          <p:cNvPr id="8" name="Oval 7"/>
           <p:cNvSpPr/>
           <p:nvPr/>
         </p:nvSpPr>
         <p:spPr>
           <a:xfrm>
-            <a:off x="548640" y="2482596"/>
-            <a:ext cx="384048" cy="384048"/>
+            <a:off x="548640" y="3108960"/>
+            <a:ext cx="502920" cy="502920"/>
           </a:xfrm>
           <a:prstGeom prst="ellipse">
             <a:avLst/>
           </a:prstGeom>
           <a:solidFill>
-            <a:srgbClr val="0645AD"/>
+            <a:srgbClr val="F2B705"/>
           </a:solidFill>
           <a:ln>
             <a:noFill/>
@@ -7660,27 +10928,27 @@
           <a:p>
             <a:pPr algn="ctr"/>
             <a:r>
-              <a:rPr sz="1300" b="1">
-                <a:solidFill>
-                  <a:srgbClr val="FFFFFF"/>
-                </a:solidFill>
-                <a:latin typeface="Calibri"/>
-              </a:rPr>
-              <a:t>1</a:t>
-            </a:r>
-          </a:p>
-        </p:txBody>
-      </p:sp>
-      <p:sp>
-        <p:nvSpPr>
-          <p:cNvPr id="10" name="TextBox 9"/>
+              <a:rPr sz="1600" b="1">
+                <a:solidFill>
+                  <a:srgbClr val="202122"/>
+                </a:solidFill>
+                <a:latin typeface="Calibri"/>
+              </a:rPr>
+              <a:t>2</a:t>
+            </a:r>
+          </a:p>
+        </p:txBody>
+      </p:sp>
+      <p:sp>
+        <p:nvSpPr>
+          <p:cNvPr id="9" name="TextBox 8"/>
           <p:cNvSpPr txBox="1"/>
           <p:nvPr/>
         </p:nvSpPr>
         <p:spPr>
           <a:xfrm>
-            <a:off x="1143000" y="2240280"/>
-            <a:ext cx="5943600" cy="868680"/>
+            <a:off x="1371600" y="3063240"/>
+            <a:ext cx="10271455" cy="1188720"/>
           </a:xfrm>
           <a:prstGeom prst="rect">
             <a:avLst/>
@@ -7688,38 +10956,38 @@
           <a:noFill/>
         </p:spPr>
         <p:txBody>
-          <a:bodyPr wrap="square" anchor="ctr" lIns="0" rIns="0" tIns="0" bIns="0"/>
+          <a:bodyPr wrap="square" anchor="t" lIns="0" rIns="0" tIns="0" bIns="0"/>
           <a:lstStyle/>
           <a:p>
             <a:pPr algn="l"/>
             <a:r>
-              <a:rPr sz="1700" b="0" i="0">
+              <a:rPr sz="2400" b="0" i="0">
                 <a:solidFill>
                   <a:srgbClr val="202122"/>
                 </a:solidFill>
                 <a:latin typeface="Calibri"/>
               </a:rPr>
-              <a:t>Write functions is_present(), is_in_range() and is_valid_email() that return True or False.</a:t>
-            </a:r>
-          </a:p>
-        </p:txBody>
-      </p:sp>
-      <p:sp>
-        <p:nvSpPr>
-          <p:cNvPr id="11" name="Oval 10"/>
+              <a:t>Give one risk of third-party libraries.</a:t>
+            </a:r>
+          </a:p>
+        </p:txBody>
+      </p:sp>
+      <p:sp>
+        <p:nvSpPr>
+          <p:cNvPr id="10" name="Oval 9"/>
           <p:cNvSpPr/>
           <p:nvPr/>
         </p:nvSpPr>
         <p:spPr>
           <a:xfrm>
-            <a:off x="548640" y="3461004"/>
-            <a:ext cx="384048" cy="384048"/>
+            <a:off x="548640" y="4526280"/>
+            <a:ext cx="502920" cy="502920"/>
           </a:xfrm>
           <a:prstGeom prst="ellipse">
             <a:avLst/>
           </a:prstGeom>
           <a:solidFill>
-            <a:srgbClr val="0645AD"/>
+            <a:srgbClr val="F2B705"/>
           </a:solidFill>
           <a:ln>
             <a:noFill/>
@@ -7746,13 +11014,46 @@
           <a:p>
             <a:pPr algn="ctr"/>
             <a:r>
-              <a:rPr sz="1300" b="1">
-                <a:solidFill>
-                  <a:srgbClr val="FFFFFF"/>
-                </a:solidFill>
-                <a:latin typeface="Calibri"/>
-              </a:rPr>
-              <a:t>2</a:t>
+              <a:rPr sz="1600" b="1">
+                <a:solidFill>
+                  <a:srgbClr val="202122"/>
+                </a:solidFill>
+                <a:latin typeface="Calibri"/>
+              </a:rPr>
+              <a:t>3</a:t>
+            </a:r>
+          </a:p>
+        </p:txBody>
+      </p:sp>
+      <p:sp>
+        <p:nvSpPr>
+          <p:cNvPr id="11" name="TextBox 10"/>
+          <p:cNvSpPr txBox="1"/>
+          <p:nvPr/>
+        </p:nvSpPr>
+        <p:spPr>
+          <a:xfrm>
+            <a:off x="1371600" y="4480560"/>
+            <a:ext cx="10271455" cy="1188720"/>
+          </a:xfrm>
+          <a:prstGeom prst="rect">
+            <a:avLst/>
+          </a:prstGeom>
+          <a:noFill/>
+        </p:spPr>
+        <p:txBody>
+          <a:bodyPr wrap="square" anchor="t" lIns="0" rIns="0" tIns="0" bIns="0"/>
+          <a:lstStyle/>
+          <a:p>
+            <a:pPr algn="l"/>
+            <a:r>
+              <a:rPr sz="2400" b="0" i="0">
+                <a:solidFill>
+                  <a:srgbClr val="202122"/>
+                </a:solidFill>
+                <a:latin typeface="Calibri"/>
+              </a:rPr>
+              <a:t>Name two built-in functions.</a:t>
             </a:r>
           </a:p>
         </p:txBody>
@@ -7765,8 +11066,8 @@
         </p:nvSpPr>
         <p:spPr>
           <a:xfrm>
-            <a:off x="1143000" y="3218688"/>
-            <a:ext cx="5943600" cy="868680"/>
+            <a:off x="548640" y="5852160"/>
+            <a:ext cx="11094415" cy="365760"/>
           </a:xfrm>
           <a:prstGeom prst="rect">
             <a:avLst/>
@@ -7774,353 +11075,18 @@
           <a:noFill/>
         </p:spPr>
         <p:txBody>
-          <a:bodyPr wrap="square" anchor="ctr" lIns="0" rIns="0" tIns="0" bIns="0"/>
+          <a:bodyPr wrap="square" anchor="t" lIns="0" rIns="0" tIns="0" bIns="0"/>
           <a:lstStyle/>
           <a:p>
             <a:pPr algn="l"/>
             <a:r>
-              <a:rPr sz="1700" b="0" i="0">
-                <a:solidFill>
-                  <a:srgbClr val="202122"/>
-                </a:solidFill>
-                <a:latin typeface="Calibri"/>
-              </a:rPr>
-              <a:t>Write a procedure that keeps asking for input until every check passes.</a:t>
-            </a:r>
-          </a:p>
-        </p:txBody>
-      </p:sp>
-      <p:sp>
-        <p:nvSpPr>
-          <p:cNvPr id="13" name="Oval 12"/>
-          <p:cNvSpPr/>
-          <p:nvPr/>
-        </p:nvSpPr>
-        <p:spPr>
-          <a:xfrm>
-            <a:off x="548640" y="4439412"/>
-            <a:ext cx="384048" cy="384048"/>
-          </a:xfrm>
-          <a:prstGeom prst="ellipse">
-            <a:avLst/>
-          </a:prstGeom>
-          <a:solidFill>
-            <a:srgbClr val="0645AD"/>
-          </a:solidFill>
-          <a:ln>
-            <a:noFill/>
-          </a:ln>
-          <a:effectLst/>
-        </p:spPr>
-        <p:style>
-          <a:lnRef idx="1">
-            <a:schemeClr val="accent1"/>
-          </a:lnRef>
-          <a:fillRef idx="3">
-            <a:schemeClr val="accent1"/>
-          </a:fillRef>
-          <a:effectRef idx="2">
-            <a:schemeClr val="accent1"/>
-          </a:effectRef>
-          <a:fontRef idx="minor">
-            <a:schemeClr val="lt1"/>
-          </a:fontRef>
-        </p:style>
-        <p:txBody>
-          <a:bodyPr rtlCol="0" anchor="ctr" lIns="0" rIns="0" tIns="0" bIns="0"/>
-          <a:lstStyle/>
-          <a:p>
-            <a:pPr algn="ctr"/>
-            <a:r>
-              <a:rPr sz="1300" b="1">
-                <a:solidFill>
-                  <a:srgbClr val="FFFFFF"/>
-                </a:solidFill>
-                <a:latin typeface="Calibri"/>
-              </a:rPr>
-              <a:t>3</a:t>
-            </a:r>
-          </a:p>
-        </p:txBody>
-      </p:sp>
-      <p:sp>
-        <p:nvSpPr>
-          <p:cNvPr id="14" name="TextBox 13"/>
-          <p:cNvSpPr txBox="1"/>
-          <p:nvPr/>
-        </p:nvSpPr>
-        <p:spPr>
-          <a:xfrm>
-            <a:off x="1143000" y="4197096"/>
-            <a:ext cx="5943600" cy="868680"/>
-          </a:xfrm>
-          <a:prstGeom prst="rect">
-            <a:avLst/>
-          </a:prstGeom>
-          <a:noFill/>
-        </p:spPr>
-        <p:txBody>
-          <a:bodyPr wrap="square" anchor="ctr" lIns="0" rIns="0" tIns="0" bIns="0"/>
-          <a:lstStyle/>
-          <a:p>
-            <a:pPr algn="l"/>
-            <a:r>
-              <a:rPr sz="1700" b="0" i="0">
-                <a:solidFill>
-                  <a:srgbClr val="202122"/>
-                </a:solidFill>
-                <a:latin typeface="Calibri"/>
-              </a:rPr>
-              <a:t>Test each function with valid, invalid and boundary data.</a:t>
-            </a:r>
-          </a:p>
-        </p:txBody>
-      </p:sp>
-      <p:sp>
-        <p:nvSpPr>
-          <p:cNvPr id="15" name="Oval 14"/>
-          <p:cNvSpPr/>
-          <p:nvPr/>
-        </p:nvSpPr>
-        <p:spPr>
-          <a:xfrm>
-            <a:off x="548640" y="5417820"/>
-            <a:ext cx="384048" cy="384048"/>
-          </a:xfrm>
-          <a:prstGeom prst="ellipse">
-            <a:avLst/>
-          </a:prstGeom>
-          <a:solidFill>
-            <a:srgbClr val="0645AD"/>
-          </a:solidFill>
-          <a:ln>
-            <a:noFill/>
-          </a:ln>
-          <a:effectLst/>
-        </p:spPr>
-        <p:style>
-          <a:lnRef idx="1">
-            <a:schemeClr val="accent1"/>
-          </a:lnRef>
-          <a:fillRef idx="3">
-            <a:schemeClr val="accent1"/>
-          </a:fillRef>
-          <a:effectRef idx="2">
-            <a:schemeClr val="accent1"/>
-          </a:effectRef>
-          <a:fontRef idx="minor">
-            <a:schemeClr val="lt1"/>
-          </a:fontRef>
-        </p:style>
-        <p:txBody>
-          <a:bodyPr rtlCol="0" anchor="ctr" lIns="0" rIns="0" tIns="0" bIns="0"/>
-          <a:lstStyle/>
-          <a:p>
-            <a:pPr algn="ctr"/>
-            <a:r>
-              <a:rPr sz="1300" b="1">
-                <a:solidFill>
-                  <a:srgbClr val="FFFFFF"/>
-                </a:solidFill>
-                <a:latin typeface="Calibri"/>
-              </a:rPr>
-              <a:t>4</a:t>
-            </a:r>
-          </a:p>
-        </p:txBody>
-      </p:sp>
-      <p:sp>
-        <p:nvSpPr>
-          <p:cNvPr id="16" name="TextBox 15"/>
-          <p:cNvSpPr txBox="1"/>
-          <p:nvPr/>
-        </p:nvSpPr>
-        <p:spPr>
-          <a:xfrm>
-            <a:off x="1143000" y="5175504"/>
-            <a:ext cx="5943600" cy="868680"/>
-          </a:xfrm>
-          <a:prstGeom prst="rect">
-            <a:avLst/>
-          </a:prstGeom>
-          <a:noFill/>
-        </p:spPr>
-        <p:txBody>
-          <a:bodyPr wrap="square" anchor="ctr" lIns="0" rIns="0" tIns="0" bIns="0"/>
-          <a:lstStyle/>
-          <a:p>
-            <a:pPr algn="l"/>
-            <a:r>
-              <a:rPr sz="1700" b="0" i="0">
-                <a:solidFill>
-                  <a:srgbClr val="202122"/>
-                </a:solidFill>
-                <a:latin typeface="Calibri"/>
-              </a:rPr>
-              <a:t>Add a docstring to each function.</a:t>
-            </a:r>
-          </a:p>
-        </p:txBody>
-      </p:sp>
-      <p:sp>
-        <p:nvSpPr>
-          <p:cNvPr id="17" name="Rounded Rectangle 16"/>
-          <p:cNvSpPr/>
-          <p:nvPr/>
-        </p:nvSpPr>
-        <p:spPr>
-          <a:xfrm>
-            <a:off x="7772400" y="1508760"/>
-            <a:ext cx="3867912" cy="4572000"/>
-          </a:xfrm>
-          <a:prstGeom prst="roundRect">
-            <a:avLst>
-              <a:gd name="adj" fmla="val 8000"/>
-            </a:avLst>
-          </a:prstGeom>
-          <a:solidFill>
-            <a:srgbClr val="EAF3FF"/>
-          </a:solidFill>
-          <a:ln>
-            <a:noFill/>
-          </a:ln>
-          <a:effectLst/>
-        </p:spPr>
-        <p:style>
-          <a:lnRef idx="1">
-            <a:schemeClr val="accent1"/>
-          </a:lnRef>
-          <a:fillRef idx="3">
-            <a:schemeClr val="accent1"/>
-          </a:fillRef>
-          <a:effectRef idx="2">
-            <a:schemeClr val="accent1"/>
-          </a:effectRef>
-          <a:fontRef idx="minor">
-            <a:schemeClr val="lt1"/>
-          </a:fontRef>
-        </p:style>
-        <p:txBody>
-          <a:bodyPr rtlCol="0" anchor="ctr"/>
-          <a:lstStyle/>
-          <a:p/>
-        </p:txBody>
-      </p:sp>
-      <p:sp>
-        <p:nvSpPr>
-          <p:cNvPr id="18" name="TextBox 17"/>
-          <p:cNvSpPr txBox="1"/>
-          <p:nvPr/>
-        </p:nvSpPr>
-        <p:spPr>
-          <a:xfrm>
-            <a:off x="8046720" y="1737360"/>
-            <a:ext cx="3291840" cy="365760"/>
-          </a:xfrm>
-          <a:prstGeom prst="rect">
-            <a:avLst/>
-          </a:prstGeom>
-          <a:noFill/>
-        </p:spPr>
-        <p:txBody>
-          <a:bodyPr wrap="square" anchor="t" lIns="0" rIns="0" tIns="0" bIns="0"/>
-          <a:lstStyle/>
-          <a:p>
-            <a:pPr algn="l"/>
-            <a:r>
-              <a:rPr sz="1300" b="1" i="0">
-                <a:solidFill>
-                  <a:srgbClr val="0645AD"/>
-                </a:solidFill>
-                <a:latin typeface="Calibri"/>
-              </a:rPr>
-              <a:t>SUCCESS CRITERIA</a:t>
-            </a:r>
-          </a:p>
-        </p:txBody>
-      </p:sp>
-      <p:sp>
-        <p:nvSpPr>
-          <p:cNvPr id="19" name="TextBox 18"/>
-          <p:cNvSpPr txBox="1"/>
-          <p:nvPr/>
-        </p:nvSpPr>
-        <p:spPr>
-          <a:xfrm>
-            <a:off x="8046720" y="2240280"/>
-            <a:ext cx="3337560" cy="3657600"/>
-          </a:xfrm>
-          <a:prstGeom prst="rect">
-            <a:avLst/>
-          </a:prstGeom>
-          <a:noFill/>
-        </p:spPr>
-        <p:txBody>
-          <a:bodyPr wrap="square" lIns="0" rIns="0" tIns="0" bIns="0">
-            <a:spAutoFit/>
-          </a:bodyPr>
-          <a:lstStyle/>
-          <a:p>
-            <a:pPr marL="274320" indent="-274320">
-              <a:spcAft>
-                <a:spcPts val="810"/>
-              </a:spcAft>
-              <a:buClr>
-                <a:srgbClr val="0645AD"/>
-              </a:buClr>
-              <a:buFont typeface="Arial"/>
-              <a:buChar char="•"/>
-            </a:pPr>
-            <a:r>
-              <a:rPr sz="1800" b="0">
-                <a:solidFill>
-                  <a:srgbClr val="202122"/>
-                </a:solidFill>
-                <a:latin typeface="Calibri"/>
-              </a:rPr>
-              <a:t>Functions return Booleans</a:t>
-            </a:r>
-          </a:p>
-          <a:p>
-            <a:pPr marL="274320" indent="-274320">
-              <a:spcAft>
-                <a:spcPts val="810"/>
-              </a:spcAft>
-              <a:buClr>
-                <a:srgbClr val="0645AD"/>
-              </a:buClr>
-              <a:buFont typeface="Arial"/>
-              <a:buChar char="•"/>
-            </a:pPr>
-            <a:r>
-              <a:rPr sz="1800" b="0">
-                <a:solidFill>
-                  <a:srgbClr val="202122"/>
-                </a:solidFill>
-                <a:latin typeface="Calibri"/>
-              </a:rPr>
-              <a:t>No repeated code</a:t>
-            </a:r>
-          </a:p>
-          <a:p>
-            <a:pPr marL="274320" indent="-274320">
-              <a:spcAft>
-                <a:spcPts val="810"/>
-              </a:spcAft>
-              <a:buClr>
-                <a:srgbClr val="0645AD"/>
-              </a:buClr>
-              <a:buFont typeface="Arial"/>
-              <a:buChar char="•"/>
-            </a:pPr>
-            <a:r>
-              <a:rPr sz="1800" b="0">
-                <a:solidFill>
-                  <a:srgbClr val="202122"/>
-                </a:solidFill>
-                <a:latin typeface="Calibri"/>
-              </a:rPr>
-              <a:t>Boundaries tested</a:t>
+              <a:rPr sz="1300" b="0" i="1">
+                <a:solidFill>
+                  <a:srgbClr val="54595D"/>
+                </a:solidFill>
+                <a:latin typeface="Calibri"/>
+              </a:rPr>
+              <a:t>Answer on mini whiteboards or in your book. Answers are in the speaker notes.</a:t>
             </a:r>
           </a:p>
         </p:txBody>
@@ -8139,7 +11105,7 @@
     <p:bg>
       <p:bgPr>
         <a:solidFill>
-          <a:srgbClr val="03306E"/>
+          <a:srgbClr val="FFFFFF"/>
         </a:solidFill>
         <a:effectLst/>
       </p:bgPr>
@@ -8175,7 +11141,7 @@
             <a:r>
               <a:rPr sz="1100" b="1" i="0">
                 <a:solidFill>
-                  <a:srgbClr val="A9C8F0"/>
+                  <a:srgbClr val="54595D"/>
                 </a:solidFill>
                 <a:latin typeface="Calibri"/>
               </a:rPr>
@@ -8208,25 +11174,215 @@
             <a:r>
               <a:rPr sz="3200" b="1" i="0">
                 <a:solidFill>
-                  <a:srgbClr val="FFFFFF"/>
+                  <a:srgbClr val="03306E"/>
                 </a:solidFill>
                 <a:latin typeface="Cambria"/>
               </a:rPr>
-              <a:t>Exit ticket</a:t>
-            </a:r>
-          </a:p>
-        </p:txBody>
-      </p:sp>
-      <p:sp>
-        <p:nvSpPr>
-          <p:cNvPr id="4" name="Oval 3"/>
+              <a:t>Validation checks</a:t>
+            </a:r>
+          </a:p>
+        </p:txBody>
+      </p:sp>
+      <p:sp>
+        <p:nvSpPr>
+          <p:cNvPr id="4" name="TextBox 3"/>
+          <p:cNvSpPr txBox="1"/>
+          <p:nvPr/>
+        </p:nvSpPr>
+        <p:spPr>
+          <a:xfrm>
+            <a:off x="548640" y="6446520"/>
+            <a:ext cx="8229600" cy="274320"/>
+          </a:xfrm>
+          <a:prstGeom prst="rect">
+            <a:avLst/>
+          </a:prstGeom>
+          <a:noFill/>
+        </p:spPr>
+        <p:txBody>
+          <a:bodyPr wrap="square" anchor="t" lIns="0" rIns="0" tIns="0" bIns="0"/>
+          <a:lstStyle/>
+          <a:p>
+            <a:pPr algn="l"/>
+            <a:r>
+              <a:rPr sz="1000" b="0" i="0">
+                <a:solidFill>
+                  <a:srgbClr val="54595D"/>
+                </a:solidFill>
+                <a:latin typeface="Calibri"/>
+              </a:rPr>
+              <a:t>Digital Software Development T Level  ·  Functions, Procedures and Validation</a:t>
+            </a:r>
+          </a:p>
+        </p:txBody>
+      </p:sp>
+      <p:sp>
+        <p:nvSpPr>
+          <p:cNvPr id="5" name="TextBox 4"/>
+          <p:cNvSpPr txBox="1"/>
+          <p:nvPr/>
+        </p:nvSpPr>
+        <p:spPr>
+          <a:xfrm>
+            <a:off x="10728655" y="6446520"/>
+            <a:ext cx="914400" cy="274320"/>
+          </a:xfrm>
+          <a:prstGeom prst="rect">
+            <a:avLst/>
+          </a:prstGeom>
+          <a:noFill/>
+        </p:spPr>
+        <p:txBody>
+          <a:bodyPr wrap="square" anchor="t" lIns="0" rIns="0" tIns="0" bIns="0"/>
+          <a:lstStyle/>
+          <a:p>
+            <a:pPr algn="r"/>
+            <a:r>
+              <a:rPr sz="1000" b="0" i="0">
+                <a:solidFill>
+                  <a:srgbClr val="54595D"/>
+                </a:solidFill>
+                <a:latin typeface="Calibri"/>
+              </a:rPr>
+              <a:t>9</a:t>
+            </a:r>
+          </a:p>
+        </p:txBody>
+      </p:sp>
+      <p:sp>
+        <p:nvSpPr>
+          <p:cNvPr id="6" name="TextBox 5"/>
+          <p:cNvSpPr txBox="1"/>
+          <p:nvPr/>
+        </p:nvSpPr>
+        <p:spPr>
+          <a:xfrm>
+            <a:off x="548640" y="1554480"/>
+            <a:ext cx="6720840" cy="4617720"/>
+          </a:xfrm>
+          <a:prstGeom prst="rect">
+            <a:avLst/>
+          </a:prstGeom>
+          <a:noFill/>
+        </p:spPr>
+        <p:txBody>
+          <a:bodyPr wrap="square" lIns="0" rIns="0" tIns="0" bIns="0">
+            <a:spAutoFit/>
+          </a:bodyPr>
+          <a:lstStyle/>
+          <a:p>
+            <a:pPr>
+              <a:spcAft>
+                <a:spcPts val="1260"/>
+              </a:spcAft>
+            </a:pPr>
+            <a:r>
+              <a:rPr sz="2100" b="0">
+                <a:solidFill>
+                  <a:srgbClr val="202122"/>
+                </a:solidFill>
+                <a:latin typeface="Calibri"/>
+              </a:rPr>
+              <a:t>Validation checks input is sensible before the program uses it.</a:t>
+            </a:r>
+          </a:p>
+          <a:p>
+            <a:pPr>
+              <a:spcAft>
+                <a:spcPts val="1260"/>
+              </a:spcAft>
+            </a:pPr>
+            <a:r>
+              <a:rPr sz="2100" b="1">
+                <a:solidFill>
+                  <a:srgbClr val="202122"/>
+                </a:solidFill>
+                <a:latin typeface="Calibri"/>
+              </a:rPr>
+              <a:t>Presence:</a:t>
+            </a:r>
+            <a:r>
+              <a:rPr sz="2100" b="0">
+                <a:solidFill>
+                  <a:srgbClr val="202122"/>
+                </a:solidFill>
+                <a:latin typeface="Calibri"/>
+              </a:rPr>
+              <a:t> something was entered (if name != ''). Length: the right number of characters (if len(password) &gt;= 8). Range: within limits (if 1 &lt;= guests &lt;= 8). Type: the right data type (if value.isdigit()). Format: matches a pattern, such as containing '@'. Check digit: a calculated digit at the end confirms the rest, as in barcodes and ISBNs.</a:t>
+            </a:r>
+          </a:p>
+          <a:p>
+            <a:pPr>
+              <a:spcAft>
+                <a:spcPts val="1260"/>
+              </a:spcAft>
+            </a:pPr>
+            <a:r>
+              <a:rPr sz="2100" b="0">
+                <a:solidFill>
+                  <a:srgbClr val="202122"/>
+                </a:solidFill>
+                <a:latin typeface="Calibri"/>
+              </a:rPr>
+              <a:t>Validation stops crashes and bad data, but it can't tell whether data is true, only that it's reasonable.</a:t>
+            </a:r>
+          </a:p>
+        </p:txBody>
+      </p:sp>
+      <p:sp>
+        <p:nvSpPr>
+          <p:cNvPr id="7" name="Rounded Rectangle 6"/>
           <p:cNvSpPr/>
           <p:nvPr/>
         </p:nvSpPr>
         <p:spPr>
           <a:xfrm>
-            <a:off x="548640" y="1737360"/>
-            <a:ext cx="502920" cy="502920"/>
+            <a:off x="7772400" y="1554480"/>
+            <a:ext cx="3867912" cy="4526280"/>
+          </a:xfrm>
+          <a:prstGeom prst="roundRect">
+            <a:avLst>
+              <a:gd name="adj" fmla="val 8000"/>
+            </a:avLst>
+          </a:prstGeom>
+          <a:solidFill>
+            <a:srgbClr val="03306E"/>
+          </a:solidFill>
+          <a:ln>
+            <a:noFill/>
+          </a:ln>
+          <a:effectLst/>
+        </p:spPr>
+        <p:style>
+          <a:lnRef idx="1">
+            <a:schemeClr val="accent1"/>
+          </a:lnRef>
+          <a:fillRef idx="3">
+            <a:schemeClr val="accent1"/>
+          </a:fillRef>
+          <a:effectRef idx="2">
+            <a:schemeClr val="accent1"/>
+          </a:effectRef>
+          <a:fontRef idx="minor">
+            <a:schemeClr val="lt1"/>
+          </a:fontRef>
+        </p:style>
+        <p:txBody>
+          <a:bodyPr rtlCol="0" anchor="ctr"/>
+          <a:lstStyle/>
+          <a:p/>
+        </p:txBody>
+      </p:sp>
+      <p:sp>
+        <p:nvSpPr>
+          <p:cNvPr id="8" name="Oval 7"/>
+          <p:cNvSpPr/>
+          <p:nvPr/>
+        </p:nvSpPr>
+        <p:spPr>
+          <a:xfrm>
+            <a:off x="8046720" y="1828800"/>
+            <a:ext cx="548640" cy="548640"/>
           </a:xfrm>
           <a:prstGeom prst="ellipse">
             <a:avLst/>
@@ -8259,185 +11415,13 @@
           <a:p>
             <a:pPr algn="ctr"/>
             <a:r>
-              <a:rPr sz="1700" b="1">
+              <a:rPr sz="1300" b="1">
                 <a:solidFill>
                   <a:srgbClr val="202122"/>
                 </a:solidFill>
                 <a:latin typeface="Calibri"/>
               </a:rPr>
-              <a:t>1</a:t>
-            </a:r>
-          </a:p>
-        </p:txBody>
-      </p:sp>
-      <p:sp>
-        <p:nvSpPr>
-          <p:cNvPr id="5" name="TextBox 4"/>
-          <p:cNvSpPr txBox="1"/>
-          <p:nvPr/>
-        </p:nvSpPr>
-        <p:spPr>
-          <a:xfrm>
-            <a:off x="1325880" y="1645920"/>
-            <a:ext cx="6583680" cy="822960"/>
-          </a:xfrm>
-          <a:prstGeom prst="rect">
-            <a:avLst/>
-          </a:prstGeom>
-          <a:noFill/>
-        </p:spPr>
-        <p:txBody>
-          <a:bodyPr wrap="square" anchor="ctr" lIns="0" rIns="0" tIns="0" bIns="0"/>
-          <a:lstStyle/>
-          <a:p>
-            <a:pPr algn="l"/>
-            <a:r>
-              <a:rPr sz="2000" b="0" i="0">
-                <a:solidFill>
-                  <a:srgbClr val="FFFFFF"/>
-                </a:solidFill>
-                <a:latin typeface="Calibri"/>
-              </a:rPr>
-              <a:t>Is print() a function or a procedure in your own code terms, and why?</a:t>
-            </a:r>
-          </a:p>
-        </p:txBody>
-      </p:sp>
-      <p:sp>
-        <p:nvSpPr>
-          <p:cNvPr id="6" name="Oval 5"/>
-          <p:cNvSpPr/>
-          <p:nvPr/>
-        </p:nvSpPr>
-        <p:spPr>
-          <a:xfrm>
-            <a:off x="548640" y="2697480"/>
-            <a:ext cx="502920" cy="502920"/>
-          </a:xfrm>
-          <a:prstGeom prst="ellipse">
-            <a:avLst/>
-          </a:prstGeom>
-          <a:solidFill>
-            <a:srgbClr val="F2B705"/>
-          </a:solidFill>
-          <a:ln>
-            <a:noFill/>
-          </a:ln>
-          <a:effectLst/>
-        </p:spPr>
-        <p:style>
-          <a:lnRef idx="1">
-            <a:schemeClr val="accent1"/>
-          </a:lnRef>
-          <a:fillRef idx="3">
-            <a:schemeClr val="accent1"/>
-          </a:fillRef>
-          <a:effectRef idx="2">
-            <a:schemeClr val="accent1"/>
-          </a:effectRef>
-          <a:fontRef idx="minor">
-            <a:schemeClr val="lt1"/>
-          </a:fontRef>
-        </p:style>
-        <p:txBody>
-          <a:bodyPr rtlCol="0" anchor="ctr" lIns="0" rIns="0" tIns="0" bIns="0"/>
-          <a:lstStyle/>
-          <a:p>
-            <a:pPr algn="ctr"/>
-            <a:r>
-              <a:rPr sz="1700" b="1">
-                <a:solidFill>
-                  <a:srgbClr val="202122"/>
-                </a:solidFill>
-                <a:latin typeface="Calibri"/>
-              </a:rPr>
-              <a:t>2</a:t>
-            </a:r>
-          </a:p>
-        </p:txBody>
-      </p:sp>
-      <p:sp>
-        <p:nvSpPr>
-          <p:cNvPr id="7" name="TextBox 6"/>
-          <p:cNvSpPr txBox="1"/>
-          <p:nvPr/>
-        </p:nvSpPr>
-        <p:spPr>
-          <a:xfrm>
-            <a:off x="1325880" y="2606040"/>
-            <a:ext cx="6583680" cy="822960"/>
-          </a:xfrm>
-          <a:prstGeom prst="rect">
-            <a:avLst/>
-          </a:prstGeom>
-          <a:noFill/>
-        </p:spPr>
-        <p:txBody>
-          <a:bodyPr wrap="square" anchor="ctr" lIns="0" rIns="0" tIns="0" bIns="0"/>
-          <a:lstStyle/>
-          <a:p>
-            <a:pPr algn="l"/>
-            <a:r>
-              <a:rPr sz="2000" b="0" i="0">
-                <a:solidFill>
-                  <a:srgbClr val="FFFFFF"/>
-                </a:solidFill>
-                <a:latin typeface="Calibri"/>
-              </a:rPr>
-              <a:t>What does a check digit protect against?</a:t>
-            </a:r>
-          </a:p>
-        </p:txBody>
-      </p:sp>
-      <p:sp>
-        <p:nvSpPr>
-          <p:cNvPr id="8" name="Oval 7"/>
-          <p:cNvSpPr/>
-          <p:nvPr/>
-        </p:nvSpPr>
-        <p:spPr>
-          <a:xfrm>
-            <a:off x="548640" y="3657600"/>
-            <a:ext cx="502920" cy="502920"/>
-          </a:xfrm>
-          <a:prstGeom prst="ellipse">
-            <a:avLst/>
-          </a:prstGeom>
-          <a:solidFill>
-            <a:srgbClr val="F2B705"/>
-          </a:solidFill>
-          <a:ln>
-            <a:noFill/>
-          </a:ln>
-          <a:effectLst/>
-        </p:spPr>
-        <p:style>
-          <a:lnRef idx="1">
-            <a:schemeClr val="accent1"/>
-          </a:lnRef>
-          <a:fillRef idx="3">
-            <a:schemeClr val="accent1"/>
-          </a:fillRef>
-          <a:effectRef idx="2">
-            <a:schemeClr val="accent1"/>
-          </a:effectRef>
-          <a:fontRef idx="minor">
-            <a:schemeClr val="lt1"/>
-          </a:fontRef>
-        </p:style>
-        <p:txBody>
-          <a:bodyPr rtlCol="0" anchor="ctr" lIns="0" rIns="0" tIns="0" bIns="0"/>
-          <a:lstStyle/>
-          <a:p>
-            <a:pPr algn="ctr"/>
-            <a:r>
-              <a:rPr sz="1700" b="1">
-                <a:solidFill>
-                  <a:srgbClr val="202122"/>
-                </a:solidFill>
-                <a:latin typeface="Calibri"/>
-              </a:rPr>
-              <a:t>3</a:t>
+              <a:t>e.g.</a:t>
             </a:r>
           </a:p>
         </p:txBody>
@@ -8450,8 +11434,8 @@
         </p:nvSpPr>
         <p:spPr>
           <a:xfrm>
-            <a:off x="1325880" y="3566160"/>
-            <a:ext cx="6583680" cy="822960"/>
+            <a:off x="8046720" y="2560320"/>
+            <a:ext cx="3291840" cy="365760"/>
           </a:xfrm>
           <a:prstGeom prst="rect">
             <a:avLst/>
@@ -8459,194 +11443,51 @@
           <a:noFill/>
         </p:spPr>
         <p:txBody>
-          <a:bodyPr wrap="square" anchor="ctr" lIns="0" rIns="0" tIns="0" bIns="0"/>
+          <a:bodyPr wrap="square" anchor="t" lIns="0" rIns="0" tIns="0" bIns="0"/>
           <a:lstStyle/>
           <a:p>
             <a:pPr algn="l"/>
             <a:r>
-              <a:rPr sz="2000" b="0" i="0">
+              <a:rPr sz="1300" b="1" i="0">
+                <a:solidFill>
+                  <a:srgbClr val="A9C8F0"/>
+                </a:solidFill>
+                <a:latin typeface="Calibri"/>
+              </a:rPr>
+              <a:t>EXAMPLE</a:t>
+            </a:r>
+          </a:p>
+        </p:txBody>
+      </p:sp>
+      <p:sp>
+        <p:nvSpPr>
+          <p:cNvPr id="10" name="TextBox 9"/>
+          <p:cNvSpPr txBox="1"/>
+          <p:nvPr/>
+        </p:nvSpPr>
+        <p:spPr>
+          <a:xfrm>
+            <a:off x="8046720" y="2971800"/>
+            <a:ext cx="3291840" cy="2971800"/>
+          </a:xfrm>
+          <a:prstGeom prst="rect">
+            <a:avLst/>
+          </a:prstGeom>
+          <a:noFill/>
+        </p:spPr>
+        <p:txBody>
+          <a:bodyPr wrap="square" anchor="t" lIns="0" rIns="0" tIns="0" bIns="0"/>
+          <a:lstStyle/>
+          <a:p>
+            <a:pPr algn="l"/>
+            <a:r>
+              <a:rPr sz="1900" b="0" i="0">
                 <a:solidFill>
                   <a:srgbClr val="FFFFFF"/>
                 </a:solidFill>
-                <a:latin typeface="Calibri"/>
-              </a:rPr>
-              <a:t>Why reuse a validation function instead of copying code?</a:t>
-            </a:r>
-          </a:p>
-        </p:txBody>
-      </p:sp>
-      <p:sp>
-        <p:nvSpPr>
-          <p:cNvPr id="10" name="Rounded Rectangle 9"/>
-          <p:cNvSpPr/>
-          <p:nvPr/>
-        </p:nvSpPr>
-        <p:spPr>
-          <a:xfrm>
-            <a:off x="8229600" y="1645920"/>
-            <a:ext cx="3410712" cy="2926080"/>
-          </a:xfrm>
-          <a:prstGeom prst="roundRect">
-            <a:avLst>
-              <a:gd name="adj" fmla="val 8000"/>
-            </a:avLst>
-          </a:prstGeom>
-          <a:solidFill>
-            <a:srgbClr val="0645AD"/>
-          </a:solidFill>
-          <a:ln>
-            <a:noFill/>
-          </a:ln>
-          <a:effectLst/>
-        </p:spPr>
-        <p:style>
-          <a:lnRef idx="1">
-            <a:schemeClr val="accent1"/>
-          </a:lnRef>
-          <a:fillRef idx="3">
-            <a:schemeClr val="accent1"/>
-          </a:fillRef>
-          <a:effectRef idx="2">
-            <a:schemeClr val="accent1"/>
-          </a:effectRef>
-          <a:fontRef idx="minor">
-            <a:schemeClr val="lt1"/>
-          </a:fontRef>
-        </p:style>
-        <p:txBody>
-          <a:bodyPr rtlCol="0" anchor="ctr"/>
-          <a:lstStyle/>
-          <a:p/>
-        </p:txBody>
-      </p:sp>
-      <p:sp>
-        <p:nvSpPr>
-          <p:cNvPr id="11" name="TextBox 10"/>
-          <p:cNvSpPr txBox="1"/>
-          <p:nvPr/>
-        </p:nvSpPr>
-        <p:spPr>
-          <a:xfrm>
-            <a:off x="8503920" y="1874519"/>
-            <a:ext cx="2926080" cy="365760"/>
-          </a:xfrm>
-          <a:prstGeom prst="rect">
-            <a:avLst/>
-          </a:prstGeom>
-          <a:noFill/>
-        </p:spPr>
-        <p:txBody>
-          <a:bodyPr wrap="square" anchor="t" lIns="0" rIns="0" tIns="0" bIns="0"/>
-          <a:lstStyle/>
-          <a:p>
-            <a:pPr algn="l"/>
-            <a:r>
-              <a:rPr sz="1300" b="1" i="0">
-                <a:solidFill>
-                  <a:srgbClr val="A9C8F0"/>
-                </a:solidFill>
-                <a:latin typeface="Calibri"/>
-              </a:rPr>
-              <a:t>REVISE THIS TOPIC</a:t>
-            </a:r>
-          </a:p>
-        </p:txBody>
-      </p:sp>
-      <p:sp>
-        <p:nvSpPr>
-          <p:cNvPr id="12" name="TextBox 11"/>
-          <p:cNvSpPr txBox="1"/>
-          <p:nvPr/>
-        </p:nvSpPr>
-        <p:spPr>
-          <a:xfrm>
-            <a:off x="8503920" y="2286000"/>
-            <a:ext cx="2926080" cy="548640"/>
-          </a:xfrm>
-          <a:prstGeom prst="rect">
-            <a:avLst/>
-          </a:prstGeom>
-          <a:noFill/>
-        </p:spPr>
-        <p:txBody>
-          <a:bodyPr wrap="square" anchor="t" lIns="0" rIns="0" tIns="0" bIns="0"/>
-          <a:lstStyle/>
-          <a:p>
-            <a:pPr algn="l"/>
-            <a:r>
-              <a:rPr sz="1400" b="0" i="0">
-                <a:solidFill>
-                  <a:srgbClr val="FFFFFF"/>
-                </a:solidFill>
-                <a:latin typeface="Calibri"/>
-              </a:rPr>
-              <a:t>Revision notes for this lesson are on the study wiki:</a:t>
-            </a:r>
-          </a:p>
-        </p:txBody>
-      </p:sp>
-      <p:sp>
-        <p:nvSpPr>
-          <p:cNvPr id="13" name="TextBox 12"/>
-          <p:cNvSpPr txBox="1"/>
-          <p:nvPr/>
-        </p:nvSpPr>
-        <p:spPr>
-          <a:xfrm>
-            <a:off x="8503920" y="2926080"/>
-            <a:ext cx="2926080" cy="1463040"/>
-          </a:xfrm>
-          <a:prstGeom prst="rect">
-            <a:avLst/>
-          </a:prstGeom>
-          <a:noFill/>
-        </p:spPr>
-        <p:txBody>
-          <a:bodyPr wrap="square" anchor="t" lIns="0" rIns="0" tIns="0" bIns="0"/>
-          <a:lstStyle/>
-          <a:p>
-            <a:pPr algn="l"/>
-            <a:r>
-              <a:rPr sz="2000" b="1" i="0">
-                <a:solidFill>
-                  <a:srgbClr val="FFFFFF"/>
-                </a:solidFill>
                 <a:latin typeface="Cambria"/>
               </a:rPr>
-              <a:t>Core Paper 1: Problem Solving, Programming, Emerging Issues and Legislation</a:t>
-            </a:r>
-          </a:p>
-        </p:txBody>
-      </p:sp>
-      <p:sp>
-        <p:nvSpPr>
-          <p:cNvPr id="14" name="TextBox 13"/>
-          <p:cNvSpPr txBox="1"/>
-          <p:nvPr/>
-        </p:nvSpPr>
-        <p:spPr>
-          <a:xfrm>
-            <a:off x="548640" y="5669280"/>
-            <a:ext cx="11094415" cy="548640"/>
-          </a:xfrm>
-          <a:prstGeom prst="rect">
-            <a:avLst/>
-          </a:prstGeom>
-          <a:noFill/>
-        </p:spPr>
-        <p:txBody>
-          <a:bodyPr wrap="square" anchor="t" lIns="0" rIns="0" tIns="0" bIns="0"/>
-          <a:lstStyle/>
-          <a:p>
-            <a:pPr algn="l"/>
-            <a:r>
-              <a:rPr sz="1200" b="0" i="0">
-                <a:solidFill>
-                  <a:srgbClr val="A9C8F0"/>
-                </a:solidFill>
-                <a:latin typeface="Calibri"/>
-              </a:rPr>
-              <a:t>https://lana6478.github.io/T-level-Digital-Software-Development/#/01-core-component/01-core-paper-1.md</a:t>
+              <a:t>while not age.isdigit(): age = input('Please enter a number: ') keeps asking until the input is numeric.</a:t>
             </a:r>
           </a:p>
         </p:txBody>
